--- a/phase2-deliverables/PhaseII_Review.pptx
+++ b/phase2-deliverables/PhaseII_Review.pptx
@@ -1,26 +1,23 @@
 
 <file path=ppt/presentation.xml><?xml version="1.0" encoding="utf-8"?>
-<p:presentation xmlns:a="http://schemas.openxmlformats.org/drawingml/2006/main" xmlns:r="http://schemas.openxmlformats.org/officeDocument/2006/relationships" xmlns:p="http://schemas.openxmlformats.org/presentationml/2006/main" xmlns:m="http://schemas.openxmlformats.org/officeDocument/2006/math" xmlns:w="http://schemas.openxmlformats.org/wordprocessingml/2006/main" autoCompressPictures="0" saveSubsetFonts="1">
+<p:presentation xmlns:a="http://schemas.openxmlformats.org/drawingml/2006/main" xmlns:r="http://schemas.openxmlformats.org/officeDocument/2006/relationships" xmlns:p="http://schemas.openxmlformats.org/presentationml/2006/main" saveSubsetFonts="1" autoCompressPictures="0">
   <p:sldMasterIdLst>
     <p:sldMasterId id="2147483648" r:id="rId1"/>
   </p:sldMasterIdLst>
-  <p:notesMasterIdLst>
-    <p:notesMasterId r:id="rId17"/>
-  </p:notesMasterIdLst>
   <p:sldIdLst>
-    <p:sldId id="256" r:id="rId4"/>
-    <p:sldId id="257" r:id="rId5"/>
-    <p:sldId id="258" r:id="rId6"/>
-    <p:sldId id="259" r:id="rId7"/>
-    <p:sldId id="260" r:id="rId8"/>
-    <p:sldId id="261" r:id="rId9"/>
-    <p:sldId id="262" r:id="rId10"/>
-    <p:sldId id="263" r:id="rId11"/>
-    <p:sldId id="264" r:id="rId12"/>
-    <p:sldId id="265" r:id="rId13"/>
-    <p:sldId id="266" r:id="rId14"/>
-    <p:sldId id="267" r:id="rId15"/>
-    <p:sldId id="268" r:id="rId16"/>
+    <p:sldId id="256" r:id="rId7"/>
+    <p:sldId id="257" r:id="rId8"/>
+    <p:sldId id="258" r:id="rId9"/>
+    <p:sldId id="259" r:id="rId10"/>
+    <p:sldId id="260" r:id="rId11"/>
+    <p:sldId id="261" r:id="rId12"/>
+    <p:sldId id="262" r:id="rId13"/>
+    <p:sldId id="263" r:id="rId14"/>
+    <p:sldId id="264" r:id="rId15"/>
+    <p:sldId id="265" r:id="rId16"/>
+    <p:sldId id="266" r:id="rId17"/>
+    <p:sldId id="267" r:id="rId18"/>
+    <p:sldId id="268" r:id="rId19"/>
   </p:sldIdLst>
   <p:sldSz cx="12191695" cy="6858000" type="screen4x3"/>
   <p:notesSz cx="6858000" cy="9144000"/>
@@ -28,8 +25,8 @@
     <a:defPPr>
       <a:defRPr lang="en-US"/>
     </a:defPPr>
-    <a:lvl1pPr marL="0" algn="l" defTabSz="457200" rtl="0">
-      <a:defRPr sz="1800">
+    <a:lvl1pPr marL="0" algn="l" defTabSz="457200" rtl="0" eaLnBrk="1" latinLnBrk="0" hangingPunct="1">
+      <a:defRPr sz="1800" kern="1200">
         <a:solidFill>
           <a:schemeClr val="tx1"/>
         </a:solidFill>
@@ -38,8 +35,8 @@
         <a:cs typeface="+mn-cs"/>
       </a:defRPr>
     </a:lvl1pPr>
-    <a:lvl2pPr marL="457200" algn="l" defTabSz="457200" rtl="0">
-      <a:defRPr sz="1800">
+    <a:lvl2pPr marL="457200" algn="l" defTabSz="457200" rtl="0" eaLnBrk="1" latinLnBrk="0" hangingPunct="1">
+      <a:defRPr sz="1800" kern="1200">
         <a:solidFill>
           <a:schemeClr val="tx1"/>
         </a:solidFill>
@@ -48,8 +45,8 @@
         <a:cs typeface="+mn-cs"/>
       </a:defRPr>
     </a:lvl2pPr>
-    <a:lvl3pPr marL="914400" algn="l" defTabSz="457200" rtl="0">
-      <a:defRPr sz="1800">
+    <a:lvl3pPr marL="914400" algn="l" defTabSz="457200" rtl="0" eaLnBrk="1" latinLnBrk="0" hangingPunct="1">
+      <a:defRPr sz="1800" kern="1200">
         <a:solidFill>
           <a:schemeClr val="tx1"/>
         </a:solidFill>
@@ -58,8 +55,8 @@
         <a:cs typeface="+mn-cs"/>
       </a:defRPr>
     </a:lvl3pPr>
-    <a:lvl4pPr marL="1371600" algn="l" defTabSz="457200" rtl="0">
-      <a:defRPr sz="1800">
+    <a:lvl4pPr marL="1371600" algn="l" defTabSz="457200" rtl="0" eaLnBrk="1" latinLnBrk="0" hangingPunct="1">
+      <a:defRPr sz="1800" kern="1200">
         <a:solidFill>
           <a:schemeClr val="tx1"/>
         </a:solidFill>
@@ -68,8 +65,8 @@
         <a:cs typeface="+mn-cs"/>
       </a:defRPr>
     </a:lvl4pPr>
-    <a:lvl5pPr marL="1828800" algn="l" defTabSz="457200" rtl="0">
-      <a:defRPr sz="1800">
+    <a:lvl5pPr marL="1828800" algn="l" defTabSz="457200" rtl="0" eaLnBrk="1" latinLnBrk="0" hangingPunct="1">
+      <a:defRPr sz="1800" kern="1200">
         <a:solidFill>
           <a:schemeClr val="tx1"/>
         </a:solidFill>
@@ -78,8 +75,8 @@
         <a:cs typeface="+mn-cs"/>
       </a:defRPr>
     </a:lvl5pPr>
-    <a:lvl6pPr marL="2286000" algn="l" defTabSz="457200" rtl="0">
-      <a:defRPr sz="1800">
+    <a:lvl6pPr marL="2286000" algn="l" defTabSz="457200" rtl="0" eaLnBrk="1" latinLnBrk="0" hangingPunct="1">
+      <a:defRPr sz="1800" kern="1200">
         <a:solidFill>
           <a:schemeClr val="tx1"/>
         </a:solidFill>
@@ -88,8 +85,8 @@
         <a:cs typeface="+mn-cs"/>
       </a:defRPr>
     </a:lvl6pPr>
-    <a:lvl7pPr marL="2743200" algn="l" defTabSz="457200" rtl="0">
-      <a:defRPr sz="1800">
+    <a:lvl7pPr marL="2743200" algn="l" defTabSz="457200" rtl="0" eaLnBrk="1" latinLnBrk="0" hangingPunct="1">
+      <a:defRPr sz="1800" kern="1200">
         <a:solidFill>
           <a:schemeClr val="tx1"/>
         </a:solidFill>
@@ -98,8 +95,8 @@
         <a:cs typeface="+mn-cs"/>
       </a:defRPr>
     </a:lvl7pPr>
-    <a:lvl8pPr marL="3200400" algn="l" defTabSz="457200" rtl="0">
-      <a:defRPr sz="1800">
+    <a:lvl8pPr marL="3200400" algn="l" defTabSz="457200" rtl="0" eaLnBrk="1" latinLnBrk="0" hangingPunct="1">
+      <a:defRPr sz="1800" kern="1200">
         <a:solidFill>
           <a:schemeClr val="tx1"/>
         </a:solidFill>
@@ -108,8 +105,8 @@
         <a:cs typeface="+mn-cs"/>
       </a:defRPr>
     </a:lvl8pPr>
-    <a:lvl9pPr marL="3657600" algn="l" defTabSz="457200" rtl="0">
-      <a:defRPr sz="1800">
+    <a:lvl9pPr marL="3657600" algn="l" defTabSz="457200" rtl="0" eaLnBrk="1" latinLnBrk="0" hangingPunct="1">
+      <a:defRPr sz="1800" kern="1200">
         <a:solidFill>
           <a:schemeClr val="tx1"/>
         </a:solidFill>
@@ -122,21 +119,16 @@
 </p:presentation>
 </file>
 
-<file path=ppt/notesMasters/notesMaster1.xml><?xml version="1.0" encoding="utf-8"?>
-<p:notesMaster xmlns:a="http://schemas.openxmlformats.org/drawingml/2006/main" xmlns:r="http://schemas.openxmlformats.org/officeDocument/2006/relationships" xmlns:p="http://schemas.openxmlformats.org/presentationml/2006/main">
-  <p:cSld name="">
-    <p:bg>
-      <p:bgRef idx="1001">
-        <a:schemeClr val="bg1"/>
-      </p:bgRef>
-    </p:bg>
+<file path=ppt/slideLayouts/slideLayout1.xml><?xml version="1.0" encoding="utf-8"?>
+<p:sldLayout xmlns:a="http://schemas.openxmlformats.org/drawingml/2006/main" xmlns:r="http://schemas.openxmlformats.org/officeDocument/2006/relationships" xmlns:p="http://schemas.openxmlformats.org/presentationml/2006/main" type="title" preserve="1">
+  <p:cSld name="Title Slide">
     <p:spTree>
       <p:nvGrpSpPr>
         <p:cNvPr id="1" name=""/>
         <p:cNvGrpSpPr/>
         <p:nvPr/>
       </p:nvGrpSpPr>
-      <p:grpSpPr bwMode="auto">
+      <p:grpSpPr>
         <a:xfrm>
           <a:off x="0" y="0"/>
           <a:ext cx="0" cy="0"/>
@@ -146,1427 +138,7 @@
       </p:grpSpPr>
       <p:sp>
         <p:nvSpPr>
-          <p:cNvPr id="2" name="Header Placeholder 1"/>
-          <p:cNvSpPr>
-            <a:spLocks noGrp="1"/>
-          </p:cNvSpPr>
-          <p:nvPr>
-            <p:ph type="hdr" sz="quarter"/>
-          </p:nvPr>
-        </p:nvSpPr>
-        <p:spPr bwMode="auto">
-          <a:xfrm>
-            <a:off x="0" y="0"/>
-            <a:ext cx="2971800" cy="458788"/>
-          </a:xfrm>
-          <a:prstGeom prst="rect">
-            <a:avLst/>
-          </a:prstGeom>
-        </p:spPr>
-        <p:txBody>
-          <a:bodyPr vert="horz" lIns="91440" tIns="45720" rIns="91440" bIns="45720" rtlCol="0" anchor="ctr"/>
-          <a:lstStyle>
-            <a:lvl1pPr algn="l">
-              <a:defRPr sz="1200"/>
-            </a:lvl1pPr>
-          </a:lstStyle>
-          <a:p>
-            <a:pPr>
-              <a:defRPr/>
-            </a:pPr>
-            <a:endParaRPr/>
-          </a:p>
-        </p:txBody>
-      </p:sp>
-      <p:sp>
-        <p:nvSpPr>
-          <p:cNvPr id="3" name="Date Placeholder 2"/>
-          <p:cNvSpPr>
-            <a:spLocks noGrp="1"/>
-          </p:cNvSpPr>
-          <p:nvPr>
-            <p:ph type="dt" idx="2"/>
-          </p:nvPr>
-        </p:nvSpPr>
-        <p:spPr bwMode="auto">
-          <a:xfrm>
-            <a:off x="3884613" y="0"/>
-            <a:ext cx="2971800" cy="458788"/>
-          </a:xfrm>
-          <a:prstGeom prst="rect">
-            <a:avLst/>
-          </a:prstGeom>
-        </p:spPr>
-        <p:txBody>
-          <a:bodyPr vert="horz" lIns="91440" tIns="45720" rIns="91440" bIns="45720" rtlCol="0" anchor="ctr"/>
-          <a:lstStyle>
-            <a:lvl1pPr algn="r">
-              <a:defRPr sz="1200"/>
-            </a:lvl1pPr>
-          </a:lstStyle>
-          <a:p>
-            <a:pPr>
-              <a:defRPr/>
-            </a:pPr>
-            <a:endParaRPr/>
-          </a:p>
-        </p:txBody>
-      </p:sp>
-      <p:sp>
-        <p:nvSpPr>
-          <p:cNvPr id="3" name="Date Placeholder 2"/>
-          <p:cNvSpPr>
-            <a:spLocks noGrp="1"/>
-          </p:cNvSpPr>
-          <p:nvPr>
-            <p:ph type="dt" idx="3"/>
-          </p:nvPr>
-        </p:nvSpPr>
-        <p:spPr bwMode="auto">
-          <a:xfrm>
-            <a:off x="3884613" y="0"/>
-            <a:ext cx="2971800" cy="458788"/>
-          </a:xfrm>
-          <a:prstGeom prst="rect">
-            <a:avLst/>
-          </a:prstGeom>
-        </p:spPr>
-        <p:txBody>
-          <a:bodyPr vert="horz" lIns="91440" tIns="45720" rIns="91440" bIns="45720" rtlCol="0" anchor="ctr"/>
-          <a:lstStyle>
-            <a:lvl1pPr algn="r">
-              <a:defRPr sz="1200"/>
-            </a:lvl1pPr>
-          </a:lstStyle>
-          <a:p>
-            <a:pPr>
-              <a:defRPr/>
-            </a:pPr>
-            <a:endParaRPr/>
-          </a:p>
-        </p:txBody>
-      </p:sp>
-      <p:sp>
-        <p:nvSpPr>
-          <p:cNvPr id="5" name="Notes Placeholder 4"/>
-          <p:cNvSpPr>
-            <a:spLocks noGrp="1"/>
-          </p:cNvSpPr>
-          <p:nvPr>
-            <p:ph type="body" sz="quarter" idx="1"/>
-          </p:nvPr>
-        </p:nvSpPr>
-        <p:spPr bwMode="auto">
-          <a:xfrm>
-            <a:off x="685800" y="4400550"/>
-            <a:ext cx="5486400" cy="3600450"/>
-          </a:xfrm>
-          <a:prstGeom prst="rect">
-            <a:avLst/>
-          </a:prstGeom>
-        </p:spPr>
-        <p:txBody>
-          <a:bodyPr vert="horz" lIns="91440" tIns="45720" rIns="91440" bIns="45720" rtlCol="0" anchor="ctr"/>
-          <a:lstStyle/>
-          <a:p>
-            <a:pPr>
-              <a:defRPr/>
-            </a:pPr>
-            <a:endParaRPr/>
-          </a:p>
-        </p:txBody>
-      </p:sp>
-      <p:sp>
-        <p:nvSpPr>
-          <p:cNvPr id="6" name="Footer Placeholder 5"/>
-          <p:cNvSpPr>
-            <a:spLocks noGrp="1"/>
-          </p:cNvSpPr>
-          <p:nvPr>
-            <p:ph type="ftr" sz="quarter" idx="4"/>
-          </p:nvPr>
-        </p:nvSpPr>
-        <p:spPr bwMode="auto">
-          <a:xfrm>
-            <a:off x="0" y="8685213"/>
-            <a:ext cx="2971800" cy="458787"/>
-          </a:xfrm>
-          <a:prstGeom prst="rect">
-            <a:avLst/>
-          </a:prstGeom>
-        </p:spPr>
-        <p:txBody>
-          <a:bodyPr vert="horz" lIns="91440" tIns="45720" rIns="91440" bIns="45720" rtlCol="0" anchor="b"/>
-          <a:lstStyle>
-            <a:lvl1pPr algn="l">
-              <a:defRPr sz="1200"/>
-            </a:lvl1pPr>
-          </a:lstStyle>
-          <a:p>
-            <a:pPr>
-              <a:defRPr/>
-            </a:pPr>
-            <a:endParaRPr/>
-          </a:p>
-        </p:txBody>
-      </p:sp>
-      <p:sp>
-        <p:nvSpPr>
-          <p:cNvPr id="7" name="Slide Number Placeholder 6"/>
-          <p:cNvSpPr>
-            <a:spLocks noGrp="1"/>
-          </p:cNvSpPr>
-          <p:nvPr>
-            <p:ph type="sldNum" sz="quarter" idx="10"/>
-          </p:nvPr>
-        </p:nvSpPr>
-        <p:spPr bwMode="auto">
-          <a:xfrm>
-            <a:off x="3884613" y="8685213"/>
-            <a:ext cx="2971800" cy="458787"/>
-          </a:xfrm>
-          <a:prstGeom prst="rect">
-            <a:avLst/>
-          </a:prstGeom>
-        </p:spPr>
-        <p:txBody>
-          <a:bodyPr vert="horz" lIns="91440" tIns="45720" rIns="91440" bIns="45720" rtlCol="0" anchor="b"/>
-          <a:lstStyle>
-            <a:lvl1pPr algn="r">
-              <a:defRPr sz="1200"/>
-            </a:lvl1pPr>
-          </a:lstStyle>
-          <a:p>
-            <a:pPr>
-              <a:defRPr/>
-            </a:pPr>
-            <a:endParaRPr/>
-          </a:p>
-        </p:txBody>
-      </p:sp>
-    </p:spTree>
-  </p:cSld>
-  <p:clrMap bg1="lt1" tx1="dk1" bg2="lt2" tx2="dk2" accent1="accent1" accent2="accent2" accent3="accent3" accent4="accent4" accent5="accent5" accent6="accent6" hlink="hlink" folHlink="folHlink"/>
-  <p:notesStyle>
-    <a:lvl1pPr marL="0" algn="l" defTabSz="914400">
-      <a:defRPr sz="1200">
-        <a:solidFill>
-          <a:schemeClr val="tx1"/>
-        </a:solidFill>
-        <a:latin typeface="+mn-lt"/>
-        <a:ea typeface="+mn-ea"/>
-        <a:cs typeface="+mn-cs"/>
-      </a:defRPr>
-    </a:lvl1pPr>
-    <a:lvl2pPr marL="457200" algn="l" defTabSz="914400">
-      <a:defRPr sz="1200">
-        <a:solidFill>
-          <a:schemeClr val="tx1"/>
-        </a:solidFill>
-        <a:latin typeface="+mn-lt"/>
-        <a:ea typeface="+mn-ea"/>
-        <a:cs typeface="+mn-cs"/>
-      </a:defRPr>
-    </a:lvl2pPr>
-    <a:lvl3pPr marL="914400" algn="l" defTabSz="914400">
-      <a:defRPr sz="1200">
-        <a:solidFill>
-          <a:schemeClr val="tx1"/>
-        </a:solidFill>
-        <a:latin typeface="+mn-lt"/>
-        <a:ea typeface="+mn-ea"/>
-        <a:cs typeface="+mn-cs"/>
-      </a:defRPr>
-    </a:lvl3pPr>
-    <a:lvl4pPr marL="1371600" algn="l" defTabSz="914400">
-      <a:defRPr sz="1200">
-        <a:solidFill>
-          <a:schemeClr val="tx1"/>
-        </a:solidFill>
-        <a:latin typeface="+mn-lt"/>
-        <a:ea typeface="+mn-ea"/>
-        <a:cs typeface="+mn-cs"/>
-      </a:defRPr>
-    </a:lvl4pPr>
-    <a:lvl5pPr marL="1828800" algn="l" defTabSz="914400">
-      <a:defRPr sz="1200">
-        <a:solidFill>
-          <a:schemeClr val="tx1"/>
-        </a:solidFill>
-        <a:latin typeface="+mn-lt"/>
-        <a:ea typeface="+mn-ea"/>
-        <a:cs typeface="+mn-cs"/>
-      </a:defRPr>
-    </a:lvl5pPr>
-    <a:lvl6pPr marL="2286000" algn="l" defTabSz="914400">
-      <a:defRPr sz="1200">
-        <a:solidFill>
-          <a:schemeClr val="tx1"/>
-        </a:solidFill>
-        <a:latin typeface="+mn-lt"/>
-        <a:ea typeface="+mn-ea"/>
-        <a:cs typeface="+mn-cs"/>
-      </a:defRPr>
-    </a:lvl6pPr>
-    <a:lvl7pPr marL="2743200" algn="l" defTabSz="914400">
-      <a:defRPr sz="1200">
-        <a:solidFill>
-          <a:schemeClr val="tx1"/>
-        </a:solidFill>
-        <a:latin typeface="+mn-lt"/>
-        <a:ea typeface="+mn-ea"/>
-        <a:cs typeface="+mn-cs"/>
-      </a:defRPr>
-    </a:lvl7pPr>
-    <a:lvl8pPr marL="3200400" algn="l" defTabSz="914400">
-      <a:defRPr sz="1200">
-        <a:solidFill>
-          <a:schemeClr val="tx1"/>
-        </a:solidFill>
-        <a:latin typeface="+mn-lt"/>
-        <a:ea typeface="+mn-ea"/>
-        <a:cs typeface="+mn-cs"/>
-      </a:defRPr>
-    </a:lvl8pPr>
-    <a:lvl9pPr marL="3657600" algn="l" defTabSz="914400">
-      <a:defRPr sz="1200">
-        <a:solidFill>
-          <a:schemeClr val="tx1"/>
-        </a:solidFill>
-        <a:latin typeface="+mn-lt"/>
-        <a:ea typeface="+mn-ea"/>
-        <a:cs typeface="+mn-cs"/>
-      </a:defRPr>
-    </a:lvl9pPr>
-  </p:notesStyle>
-</p:notesMaster>
-</file>
-
-<file path=ppt/notesSlides/notesSlide1.xml><?xml version="1.0" encoding="utf-8"?>
-<p:notes xmlns:a="http://schemas.openxmlformats.org/drawingml/2006/main" xmlns:r="http://schemas.openxmlformats.org/officeDocument/2006/relationships" xmlns:p="http://schemas.openxmlformats.org/presentationml/2006/main" xmlns:m="http://schemas.openxmlformats.org/officeDocument/2006/math" xmlns:w="http://schemas.openxmlformats.org/wordprocessingml/2006/main">
-  <p:cSld name="">
-    <p:spTree>
-      <p:nvGrpSpPr>
-        <p:cNvPr id="1" name=""/>
-        <p:cNvGrpSpPr/>
-        <p:nvPr/>
-      </p:nvGrpSpPr>
-      <p:grpSpPr bwMode="auto">
-        <a:xfrm>
-          <a:off x="0" y="0"/>
-          <a:ext cx="0" cy="0"/>
-          <a:chOff x="0" y="0"/>
-          <a:chExt cx="0" cy="0"/>
-        </a:xfrm>
-      </p:grpSpPr>
-      <p:sp>
-        <p:nvSpPr>
-          <p:cNvPr id="2" name="Slide Image Placeholder 1"/>
-          <p:cNvSpPr>
-            <a:spLocks noChangeAspect="1" noGrp="1" noRot="1"/>
-          </p:cNvSpPr>
-          <p:nvPr>
-            <p:ph type="sldImg"/>
-          </p:nvPr>
-        </p:nvSpPr>
-        <p:spPr bwMode="auto"/>
-      </p:sp>
-      <p:sp>
-        <p:nvSpPr>
-          <p:cNvPr id="3" name="Notes Placeholder 2"/>
-          <p:cNvSpPr>
-            <a:spLocks noGrp="1"/>
-          </p:cNvSpPr>
-          <p:nvPr>
-            <p:ph type="body" idx="1"/>
-          </p:nvPr>
-        </p:nvSpPr>
-        <p:spPr bwMode="auto"/>
-        <p:txBody>
-          <a:bodyPr/>
-          <a:lstStyle/>
-          <a:p>
-            <a:pPr>
-              <a:defRPr/>
-            </a:pPr>
-            <a:endParaRPr/>
-          </a:p>
-        </p:txBody>
-      </p:sp>
-      <p:sp>
-        <p:nvSpPr>
-          <p:cNvPr id="4" name="Slide Number Placeholder 3"/>
-          <p:cNvSpPr>
-            <a:spLocks noGrp="1"/>
-          </p:cNvSpPr>
-          <p:nvPr>
-            <p:ph type="sldNum" sz="quarter" idx="10"/>
-          </p:nvPr>
-        </p:nvSpPr>
-        <p:spPr bwMode="auto"/>
-        <p:txBody>
-          <a:bodyPr/>
-          <a:lstStyle/>
-          <a:p>
-            <a:pPr>
-              <a:defRPr/>
-            </a:pPr>
-            <a:fld id="{030D9FE0-CFD2-3AEF-CCD6-1DCC526125F7}" type="slidenum">
-              <a:rPr/>
-              <a:t/>
-            </a:fld>
-            <a:endParaRPr/>
-          </a:p>
-        </p:txBody>
-      </p:sp>
-    </p:spTree>
-  </p:cSld>
-  <p:clrMapOvr>
-    <a:masterClrMapping/>
-  </p:clrMapOvr>
-</p:notes>
-</file>
-
-<file path=ppt/notesSlides/notesSlide10.xml><?xml version="1.0" encoding="utf-8"?>
-<p:notes xmlns:a="http://schemas.openxmlformats.org/drawingml/2006/main" xmlns:r="http://schemas.openxmlformats.org/officeDocument/2006/relationships" xmlns:p="http://schemas.openxmlformats.org/presentationml/2006/main" xmlns:m="http://schemas.openxmlformats.org/officeDocument/2006/math" xmlns:w="http://schemas.openxmlformats.org/wordprocessingml/2006/main">
-  <p:cSld name="">
-    <p:spTree>
-      <p:nvGrpSpPr>
-        <p:cNvPr id="1" name=""/>
-        <p:cNvGrpSpPr/>
-        <p:nvPr/>
-      </p:nvGrpSpPr>
-      <p:grpSpPr bwMode="auto">
-        <a:xfrm>
-          <a:off x="0" y="0"/>
-          <a:ext cx="0" cy="0"/>
-          <a:chOff x="0" y="0"/>
-          <a:chExt cx="0" cy="0"/>
-        </a:xfrm>
-      </p:grpSpPr>
-      <p:sp>
-        <p:nvSpPr>
-          <p:cNvPr id="2" name="Slide Image Placeholder 1"/>
-          <p:cNvSpPr>
-            <a:spLocks noChangeAspect="1" noGrp="1" noRot="1"/>
-          </p:cNvSpPr>
-          <p:nvPr>
-            <p:ph type="sldImg"/>
-          </p:nvPr>
-        </p:nvSpPr>
-        <p:spPr bwMode="auto"/>
-      </p:sp>
-      <p:sp>
-        <p:nvSpPr>
-          <p:cNvPr id="3" name="Notes Placeholder 2"/>
-          <p:cNvSpPr>
-            <a:spLocks noGrp="1"/>
-          </p:cNvSpPr>
-          <p:nvPr>
-            <p:ph type="body" idx="1"/>
-          </p:nvPr>
-        </p:nvSpPr>
-        <p:spPr bwMode="auto"/>
-        <p:txBody>
-          <a:bodyPr/>
-          <a:lstStyle/>
-          <a:p>
-            <a:pPr>
-              <a:defRPr/>
-            </a:pPr>
-            <a:endParaRPr/>
-          </a:p>
-        </p:txBody>
-      </p:sp>
-      <p:sp>
-        <p:nvSpPr>
-          <p:cNvPr id="4" name="Slide Number Placeholder 3"/>
-          <p:cNvSpPr>
-            <a:spLocks noGrp="1"/>
-          </p:cNvSpPr>
-          <p:nvPr>
-            <p:ph type="sldNum" sz="quarter" idx="10"/>
-          </p:nvPr>
-        </p:nvSpPr>
-        <p:spPr bwMode="auto"/>
-        <p:txBody>
-          <a:bodyPr/>
-          <a:lstStyle/>
-          <a:p>
-            <a:pPr>
-              <a:defRPr/>
-            </a:pPr>
-            <a:fld id="{0D7D4888-8B2C-A477-4A55-2F5DFFE0D0C6}" type="slidenum">
-              <a:rPr/>
-              <a:t/>
-            </a:fld>
-            <a:endParaRPr/>
-          </a:p>
-        </p:txBody>
-      </p:sp>
-    </p:spTree>
-  </p:cSld>
-  <p:clrMapOvr>
-    <a:masterClrMapping/>
-  </p:clrMapOvr>
-</p:notes>
-</file>
-
-<file path=ppt/notesSlides/notesSlide11.xml><?xml version="1.0" encoding="utf-8"?>
-<p:notes xmlns:a="http://schemas.openxmlformats.org/drawingml/2006/main" xmlns:r="http://schemas.openxmlformats.org/officeDocument/2006/relationships" xmlns:p="http://schemas.openxmlformats.org/presentationml/2006/main" xmlns:m="http://schemas.openxmlformats.org/officeDocument/2006/math" xmlns:w="http://schemas.openxmlformats.org/wordprocessingml/2006/main">
-  <p:cSld name="">
-    <p:spTree>
-      <p:nvGrpSpPr>
-        <p:cNvPr id="1" name=""/>
-        <p:cNvGrpSpPr/>
-        <p:nvPr/>
-      </p:nvGrpSpPr>
-      <p:grpSpPr bwMode="auto">
-        <a:xfrm>
-          <a:off x="0" y="0"/>
-          <a:ext cx="0" cy="0"/>
-          <a:chOff x="0" y="0"/>
-          <a:chExt cx="0" cy="0"/>
-        </a:xfrm>
-      </p:grpSpPr>
-      <p:sp>
-        <p:nvSpPr>
-          <p:cNvPr id="2" name="Slide Image Placeholder 1"/>
-          <p:cNvSpPr>
-            <a:spLocks noChangeAspect="1" noGrp="1" noRot="1"/>
-          </p:cNvSpPr>
-          <p:nvPr>
-            <p:ph type="sldImg"/>
-          </p:nvPr>
-        </p:nvSpPr>
-        <p:spPr bwMode="auto"/>
-      </p:sp>
-      <p:sp>
-        <p:nvSpPr>
-          <p:cNvPr id="3" name="Notes Placeholder 2"/>
-          <p:cNvSpPr>
-            <a:spLocks noGrp="1"/>
-          </p:cNvSpPr>
-          <p:nvPr>
-            <p:ph type="body" idx="1"/>
-          </p:nvPr>
-        </p:nvSpPr>
-        <p:spPr bwMode="auto"/>
-        <p:txBody>
-          <a:bodyPr/>
-          <a:lstStyle/>
-          <a:p>
-            <a:pPr>
-              <a:defRPr/>
-            </a:pPr>
-            <a:endParaRPr/>
-          </a:p>
-        </p:txBody>
-      </p:sp>
-      <p:sp>
-        <p:nvSpPr>
-          <p:cNvPr id="4" name="Slide Number Placeholder 3"/>
-          <p:cNvSpPr>
-            <a:spLocks noGrp="1"/>
-          </p:cNvSpPr>
-          <p:nvPr>
-            <p:ph type="sldNum" sz="quarter" idx="10"/>
-          </p:nvPr>
-        </p:nvSpPr>
-        <p:spPr bwMode="auto"/>
-        <p:txBody>
-          <a:bodyPr/>
-          <a:lstStyle/>
-          <a:p>
-            <a:pPr>
-              <a:defRPr/>
-            </a:pPr>
-            <a:fld id="{071DEF94-D248-E80C-A3DA-D8EBC7605DDA}" type="slidenum">
-              <a:rPr/>
-              <a:t/>
-            </a:fld>
-            <a:endParaRPr/>
-          </a:p>
-        </p:txBody>
-      </p:sp>
-    </p:spTree>
-  </p:cSld>
-  <p:clrMapOvr>
-    <a:masterClrMapping/>
-  </p:clrMapOvr>
-</p:notes>
-</file>
-
-<file path=ppt/notesSlides/notesSlide12.xml><?xml version="1.0" encoding="utf-8"?>
-<p:notes xmlns:a="http://schemas.openxmlformats.org/drawingml/2006/main" xmlns:r="http://schemas.openxmlformats.org/officeDocument/2006/relationships" xmlns:p="http://schemas.openxmlformats.org/presentationml/2006/main" xmlns:m="http://schemas.openxmlformats.org/officeDocument/2006/math" xmlns:w="http://schemas.openxmlformats.org/wordprocessingml/2006/main">
-  <p:cSld name="">
-    <p:spTree>
-      <p:nvGrpSpPr>
-        <p:cNvPr id="1" name=""/>
-        <p:cNvGrpSpPr/>
-        <p:nvPr/>
-      </p:nvGrpSpPr>
-      <p:grpSpPr bwMode="auto">
-        <a:xfrm>
-          <a:off x="0" y="0"/>
-          <a:ext cx="0" cy="0"/>
-          <a:chOff x="0" y="0"/>
-          <a:chExt cx="0" cy="0"/>
-        </a:xfrm>
-      </p:grpSpPr>
-      <p:sp>
-        <p:nvSpPr>
-          <p:cNvPr id="2" name="Slide Image Placeholder 1"/>
-          <p:cNvSpPr>
-            <a:spLocks noChangeAspect="1" noGrp="1" noRot="1"/>
-          </p:cNvSpPr>
-          <p:nvPr>
-            <p:ph type="sldImg"/>
-          </p:nvPr>
-        </p:nvSpPr>
-        <p:spPr bwMode="auto"/>
-      </p:sp>
-      <p:sp>
-        <p:nvSpPr>
-          <p:cNvPr id="3" name="Notes Placeholder 2"/>
-          <p:cNvSpPr>
-            <a:spLocks noGrp="1"/>
-          </p:cNvSpPr>
-          <p:nvPr>
-            <p:ph type="body" idx="1"/>
-          </p:nvPr>
-        </p:nvSpPr>
-        <p:spPr bwMode="auto"/>
-        <p:txBody>
-          <a:bodyPr/>
-          <a:lstStyle/>
-          <a:p>
-            <a:pPr>
-              <a:defRPr/>
-            </a:pPr>
-            <a:endParaRPr/>
-          </a:p>
-        </p:txBody>
-      </p:sp>
-      <p:sp>
-        <p:nvSpPr>
-          <p:cNvPr id="4" name="Slide Number Placeholder 3"/>
-          <p:cNvSpPr>
-            <a:spLocks noGrp="1"/>
-          </p:cNvSpPr>
-          <p:nvPr>
-            <p:ph type="sldNum" sz="quarter" idx="10"/>
-          </p:nvPr>
-        </p:nvSpPr>
-        <p:spPr bwMode="auto"/>
-        <p:txBody>
-          <a:bodyPr/>
-          <a:lstStyle/>
-          <a:p>
-            <a:pPr>
-              <a:defRPr/>
-            </a:pPr>
-            <a:fld id="{AE758712-DA9D-745F-5224-3CF0678A7084}" type="slidenum">
-              <a:rPr/>
-              <a:t/>
-            </a:fld>
-            <a:endParaRPr/>
-          </a:p>
-        </p:txBody>
-      </p:sp>
-    </p:spTree>
-  </p:cSld>
-  <p:clrMapOvr>
-    <a:masterClrMapping/>
-  </p:clrMapOvr>
-</p:notes>
-</file>
-
-<file path=ppt/notesSlides/notesSlide13.xml><?xml version="1.0" encoding="utf-8"?>
-<p:notes xmlns:a="http://schemas.openxmlformats.org/drawingml/2006/main" xmlns:r="http://schemas.openxmlformats.org/officeDocument/2006/relationships" xmlns:p="http://schemas.openxmlformats.org/presentationml/2006/main" xmlns:m="http://schemas.openxmlformats.org/officeDocument/2006/math" xmlns:w="http://schemas.openxmlformats.org/wordprocessingml/2006/main">
-  <p:cSld name="">
-    <p:spTree>
-      <p:nvGrpSpPr>
-        <p:cNvPr id="1" name=""/>
-        <p:cNvGrpSpPr/>
-        <p:nvPr/>
-      </p:nvGrpSpPr>
-      <p:grpSpPr bwMode="auto">
-        <a:xfrm>
-          <a:off x="0" y="0"/>
-          <a:ext cx="0" cy="0"/>
-          <a:chOff x="0" y="0"/>
-          <a:chExt cx="0" cy="0"/>
-        </a:xfrm>
-      </p:grpSpPr>
-      <p:sp>
-        <p:nvSpPr>
-          <p:cNvPr id="2" name="Slide Image Placeholder 1"/>
-          <p:cNvSpPr>
-            <a:spLocks noChangeAspect="1" noGrp="1" noRot="1"/>
-          </p:cNvSpPr>
-          <p:nvPr>
-            <p:ph type="sldImg"/>
-          </p:nvPr>
-        </p:nvSpPr>
-        <p:spPr bwMode="auto"/>
-      </p:sp>
-      <p:sp>
-        <p:nvSpPr>
-          <p:cNvPr id="3" name="Notes Placeholder 2"/>
-          <p:cNvSpPr>
-            <a:spLocks noGrp="1"/>
-          </p:cNvSpPr>
-          <p:nvPr>
-            <p:ph type="body" idx="1"/>
-          </p:nvPr>
-        </p:nvSpPr>
-        <p:spPr bwMode="auto"/>
-        <p:txBody>
-          <a:bodyPr/>
-          <a:lstStyle/>
-          <a:p>
-            <a:pPr>
-              <a:defRPr/>
-            </a:pPr>
-            <a:endParaRPr/>
-          </a:p>
-        </p:txBody>
-      </p:sp>
-      <p:sp>
-        <p:nvSpPr>
-          <p:cNvPr id="4" name="Slide Number Placeholder 3"/>
-          <p:cNvSpPr>
-            <a:spLocks noGrp="1"/>
-          </p:cNvSpPr>
-          <p:nvPr>
-            <p:ph type="sldNum" sz="quarter" idx="10"/>
-          </p:nvPr>
-        </p:nvSpPr>
-        <p:spPr bwMode="auto"/>
-        <p:txBody>
-          <a:bodyPr/>
-          <a:lstStyle/>
-          <a:p>
-            <a:pPr>
-              <a:defRPr/>
-            </a:pPr>
-            <a:fld id="{8CAAEE4C-58B2-DC42-839F-EACC7BB9A5BE}" type="slidenum">
-              <a:rPr/>
-              <a:t/>
-            </a:fld>
-            <a:endParaRPr/>
-          </a:p>
-        </p:txBody>
-      </p:sp>
-    </p:spTree>
-  </p:cSld>
-  <p:clrMapOvr>
-    <a:masterClrMapping/>
-  </p:clrMapOvr>
-</p:notes>
-</file>
-
-<file path=ppt/notesSlides/notesSlide2.xml><?xml version="1.0" encoding="utf-8"?>
-<p:notes xmlns:a="http://schemas.openxmlformats.org/drawingml/2006/main" xmlns:r="http://schemas.openxmlformats.org/officeDocument/2006/relationships" xmlns:p="http://schemas.openxmlformats.org/presentationml/2006/main" xmlns:m="http://schemas.openxmlformats.org/officeDocument/2006/math" xmlns:w="http://schemas.openxmlformats.org/wordprocessingml/2006/main">
-  <p:cSld name="">
-    <p:spTree>
-      <p:nvGrpSpPr>
-        <p:cNvPr id="1" name=""/>
-        <p:cNvGrpSpPr/>
-        <p:nvPr/>
-      </p:nvGrpSpPr>
-      <p:grpSpPr bwMode="auto">
-        <a:xfrm>
-          <a:off x="0" y="0"/>
-          <a:ext cx="0" cy="0"/>
-          <a:chOff x="0" y="0"/>
-          <a:chExt cx="0" cy="0"/>
-        </a:xfrm>
-      </p:grpSpPr>
-      <p:sp>
-        <p:nvSpPr>
-          <p:cNvPr id="2" name="Slide Image Placeholder 1"/>
-          <p:cNvSpPr>
-            <a:spLocks noChangeAspect="1" noGrp="1" noRot="1"/>
-          </p:cNvSpPr>
-          <p:nvPr>
-            <p:ph type="sldImg"/>
-          </p:nvPr>
-        </p:nvSpPr>
-        <p:spPr bwMode="auto"/>
-      </p:sp>
-      <p:sp>
-        <p:nvSpPr>
-          <p:cNvPr id="3" name="Notes Placeholder 2"/>
-          <p:cNvSpPr>
-            <a:spLocks noGrp="1"/>
-          </p:cNvSpPr>
-          <p:nvPr>
-            <p:ph type="body" idx="1"/>
-          </p:nvPr>
-        </p:nvSpPr>
-        <p:spPr bwMode="auto"/>
-        <p:txBody>
-          <a:bodyPr/>
-          <a:lstStyle/>
-          <a:p>
-            <a:pPr>
-              <a:defRPr/>
-            </a:pPr>
-            <a:endParaRPr/>
-          </a:p>
-        </p:txBody>
-      </p:sp>
-      <p:sp>
-        <p:nvSpPr>
-          <p:cNvPr id="4" name="Slide Number Placeholder 3"/>
-          <p:cNvSpPr>
-            <a:spLocks noGrp="1"/>
-          </p:cNvSpPr>
-          <p:nvPr>
-            <p:ph type="sldNum" sz="quarter" idx="10"/>
-          </p:nvPr>
-        </p:nvSpPr>
-        <p:spPr bwMode="auto"/>
-        <p:txBody>
-          <a:bodyPr/>
-          <a:lstStyle/>
-          <a:p>
-            <a:pPr>
-              <a:defRPr/>
-            </a:pPr>
-            <a:fld id="{050DD090-A5D7-164B-1B1B-49EBA842176E}" type="slidenum">
-              <a:rPr/>
-              <a:t/>
-            </a:fld>
-            <a:endParaRPr/>
-          </a:p>
-        </p:txBody>
-      </p:sp>
-    </p:spTree>
-  </p:cSld>
-  <p:clrMapOvr>
-    <a:masterClrMapping/>
-  </p:clrMapOvr>
-</p:notes>
-</file>
-
-<file path=ppt/notesSlides/notesSlide3.xml><?xml version="1.0" encoding="utf-8"?>
-<p:notes xmlns:a="http://schemas.openxmlformats.org/drawingml/2006/main" xmlns:r="http://schemas.openxmlformats.org/officeDocument/2006/relationships" xmlns:p="http://schemas.openxmlformats.org/presentationml/2006/main" xmlns:m="http://schemas.openxmlformats.org/officeDocument/2006/math" xmlns:w="http://schemas.openxmlformats.org/wordprocessingml/2006/main">
-  <p:cSld name="">
-    <p:spTree>
-      <p:nvGrpSpPr>
-        <p:cNvPr id="1" name=""/>
-        <p:cNvGrpSpPr/>
-        <p:nvPr/>
-      </p:nvGrpSpPr>
-      <p:grpSpPr bwMode="auto">
-        <a:xfrm>
-          <a:off x="0" y="0"/>
-          <a:ext cx="0" cy="0"/>
-          <a:chOff x="0" y="0"/>
-          <a:chExt cx="0" cy="0"/>
-        </a:xfrm>
-      </p:grpSpPr>
-      <p:sp>
-        <p:nvSpPr>
-          <p:cNvPr id="2" name="Slide Image Placeholder 1"/>
-          <p:cNvSpPr>
-            <a:spLocks noChangeAspect="1" noGrp="1" noRot="1"/>
-          </p:cNvSpPr>
-          <p:nvPr>
-            <p:ph type="sldImg"/>
-          </p:nvPr>
-        </p:nvSpPr>
-        <p:spPr bwMode="auto"/>
-      </p:sp>
-      <p:sp>
-        <p:nvSpPr>
-          <p:cNvPr id="3" name="Notes Placeholder 2"/>
-          <p:cNvSpPr>
-            <a:spLocks noGrp="1"/>
-          </p:cNvSpPr>
-          <p:nvPr>
-            <p:ph type="body" idx="1"/>
-          </p:nvPr>
-        </p:nvSpPr>
-        <p:spPr bwMode="auto"/>
-        <p:txBody>
-          <a:bodyPr/>
-          <a:lstStyle/>
-          <a:p>
-            <a:pPr>
-              <a:defRPr/>
-            </a:pPr>
-            <a:endParaRPr/>
-          </a:p>
-        </p:txBody>
-      </p:sp>
-      <p:sp>
-        <p:nvSpPr>
-          <p:cNvPr id="4" name="Slide Number Placeholder 3"/>
-          <p:cNvSpPr>
-            <a:spLocks noGrp="1"/>
-          </p:cNvSpPr>
-          <p:nvPr>
-            <p:ph type="sldNum" sz="quarter" idx="10"/>
-          </p:nvPr>
-        </p:nvSpPr>
-        <p:spPr bwMode="auto"/>
-        <p:txBody>
-          <a:bodyPr/>
-          <a:lstStyle/>
-          <a:p>
-            <a:pPr>
-              <a:defRPr/>
-            </a:pPr>
-            <a:fld id="{C2AE9F6A-A670-8227-F7B6-76F430B65182}" type="slidenum">
-              <a:rPr/>
-              <a:t/>
-            </a:fld>
-            <a:endParaRPr/>
-          </a:p>
-        </p:txBody>
-      </p:sp>
-    </p:spTree>
-  </p:cSld>
-  <p:clrMapOvr>
-    <a:masterClrMapping/>
-  </p:clrMapOvr>
-</p:notes>
-</file>
-
-<file path=ppt/notesSlides/notesSlide4.xml><?xml version="1.0" encoding="utf-8"?>
-<p:notes xmlns:a="http://schemas.openxmlformats.org/drawingml/2006/main" xmlns:r="http://schemas.openxmlformats.org/officeDocument/2006/relationships" xmlns:p="http://schemas.openxmlformats.org/presentationml/2006/main" xmlns:m="http://schemas.openxmlformats.org/officeDocument/2006/math" xmlns:w="http://schemas.openxmlformats.org/wordprocessingml/2006/main">
-  <p:cSld name="">
-    <p:spTree>
-      <p:nvGrpSpPr>
-        <p:cNvPr id="1" name=""/>
-        <p:cNvGrpSpPr/>
-        <p:nvPr/>
-      </p:nvGrpSpPr>
-      <p:grpSpPr bwMode="auto">
-        <a:xfrm>
-          <a:off x="0" y="0"/>
-          <a:ext cx="0" cy="0"/>
-          <a:chOff x="0" y="0"/>
-          <a:chExt cx="0" cy="0"/>
-        </a:xfrm>
-      </p:grpSpPr>
-      <p:sp>
-        <p:nvSpPr>
-          <p:cNvPr id="2" name="Slide Image Placeholder 1"/>
-          <p:cNvSpPr>
-            <a:spLocks noChangeAspect="1" noGrp="1" noRot="1"/>
-          </p:cNvSpPr>
-          <p:nvPr>
-            <p:ph type="sldImg"/>
-          </p:nvPr>
-        </p:nvSpPr>
-        <p:spPr bwMode="auto"/>
-      </p:sp>
-      <p:sp>
-        <p:nvSpPr>
-          <p:cNvPr id="3" name="Notes Placeholder 2"/>
-          <p:cNvSpPr>
-            <a:spLocks noGrp="1"/>
-          </p:cNvSpPr>
-          <p:nvPr>
-            <p:ph type="body" idx="1"/>
-          </p:nvPr>
-        </p:nvSpPr>
-        <p:spPr bwMode="auto"/>
-        <p:txBody>
-          <a:bodyPr/>
-          <a:lstStyle/>
-          <a:p>
-            <a:pPr>
-              <a:defRPr/>
-            </a:pPr>
-            <a:endParaRPr/>
-          </a:p>
-        </p:txBody>
-      </p:sp>
-      <p:sp>
-        <p:nvSpPr>
-          <p:cNvPr id="4" name="Slide Number Placeholder 3"/>
-          <p:cNvSpPr>
-            <a:spLocks noGrp="1"/>
-          </p:cNvSpPr>
-          <p:nvPr>
-            <p:ph type="sldNum" sz="quarter" idx="10"/>
-          </p:nvPr>
-        </p:nvSpPr>
-        <p:spPr bwMode="auto"/>
-        <p:txBody>
-          <a:bodyPr/>
-          <a:lstStyle/>
-          <a:p>
-            <a:pPr>
-              <a:defRPr/>
-            </a:pPr>
-            <a:fld id="{376CEC12-58EF-90A2-A3F7-13CC10886C09}" type="slidenum">
-              <a:rPr/>
-              <a:t/>
-            </a:fld>
-            <a:endParaRPr/>
-          </a:p>
-        </p:txBody>
-      </p:sp>
-    </p:spTree>
-  </p:cSld>
-  <p:clrMapOvr>
-    <a:masterClrMapping/>
-  </p:clrMapOvr>
-</p:notes>
-</file>
-
-<file path=ppt/notesSlides/notesSlide5.xml><?xml version="1.0" encoding="utf-8"?>
-<p:notes xmlns:a="http://schemas.openxmlformats.org/drawingml/2006/main" xmlns:r="http://schemas.openxmlformats.org/officeDocument/2006/relationships" xmlns:p="http://schemas.openxmlformats.org/presentationml/2006/main" xmlns:m="http://schemas.openxmlformats.org/officeDocument/2006/math" xmlns:w="http://schemas.openxmlformats.org/wordprocessingml/2006/main">
-  <p:cSld name="">
-    <p:spTree>
-      <p:nvGrpSpPr>
-        <p:cNvPr id="1" name=""/>
-        <p:cNvGrpSpPr/>
-        <p:nvPr/>
-      </p:nvGrpSpPr>
-      <p:grpSpPr bwMode="auto">
-        <a:xfrm>
-          <a:off x="0" y="0"/>
-          <a:ext cx="0" cy="0"/>
-          <a:chOff x="0" y="0"/>
-          <a:chExt cx="0" cy="0"/>
-        </a:xfrm>
-      </p:grpSpPr>
-      <p:sp>
-        <p:nvSpPr>
-          <p:cNvPr id="2" name="Slide Image Placeholder 1"/>
-          <p:cNvSpPr>
-            <a:spLocks noChangeAspect="1" noGrp="1" noRot="1"/>
-          </p:cNvSpPr>
-          <p:nvPr>
-            <p:ph type="sldImg"/>
-          </p:nvPr>
-        </p:nvSpPr>
-        <p:spPr bwMode="auto"/>
-      </p:sp>
-      <p:sp>
-        <p:nvSpPr>
-          <p:cNvPr id="3" name="Notes Placeholder 2"/>
-          <p:cNvSpPr>
-            <a:spLocks noGrp="1"/>
-          </p:cNvSpPr>
-          <p:nvPr>
-            <p:ph type="body" idx="1"/>
-          </p:nvPr>
-        </p:nvSpPr>
-        <p:spPr bwMode="auto"/>
-        <p:txBody>
-          <a:bodyPr/>
-          <a:lstStyle/>
-          <a:p>
-            <a:pPr>
-              <a:defRPr/>
-            </a:pPr>
-            <a:endParaRPr/>
-          </a:p>
-        </p:txBody>
-      </p:sp>
-      <p:sp>
-        <p:nvSpPr>
-          <p:cNvPr id="4" name="Slide Number Placeholder 3"/>
-          <p:cNvSpPr>
-            <a:spLocks noGrp="1"/>
-          </p:cNvSpPr>
-          <p:nvPr>
-            <p:ph type="sldNum" sz="quarter" idx="10"/>
-          </p:nvPr>
-        </p:nvSpPr>
-        <p:spPr bwMode="auto"/>
-        <p:txBody>
-          <a:bodyPr/>
-          <a:lstStyle/>
-          <a:p>
-            <a:pPr>
-              <a:defRPr/>
-            </a:pPr>
-            <a:fld id="{F19F92D6-9B12-EA2E-5127-0F18EBF1D3E0}" type="slidenum">
-              <a:rPr/>
-              <a:t/>
-            </a:fld>
-            <a:endParaRPr/>
-          </a:p>
-        </p:txBody>
-      </p:sp>
-    </p:spTree>
-  </p:cSld>
-  <p:clrMapOvr>
-    <a:masterClrMapping/>
-  </p:clrMapOvr>
-</p:notes>
-</file>
-
-<file path=ppt/notesSlides/notesSlide6.xml><?xml version="1.0" encoding="utf-8"?>
-<p:notes xmlns:a="http://schemas.openxmlformats.org/drawingml/2006/main" xmlns:r="http://schemas.openxmlformats.org/officeDocument/2006/relationships" xmlns:p="http://schemas.openxmlformats.org/presentationml/2006/main" xmlns:m="http://schemas.openxmlformats.org/officeDocument/2006/math" xmlns:w="http://schemas.openxmlformats.org/wordprocessingml/2006/main">
-  <p:cSld name="">
-    <p:spTree>
-      <p:nvGrpSpPr>
-        <p:cNvPr id="1" name=""/>
-        <p:cNvGrpSpPr/>
-        <p:nvPr/>
-      </p:nvGrpSpPr>
-      <p:grpSpPr bwMode="auto">
-        <a:xfrm>
-          <a:off x="0" y="0"/>
-          <a:ext cx="0" cy="0"/>
-          <a:chOff x="0" y="0"/>
-          <a:chExt cx="0" cy="0"/>
-        </a:xfrm>
-      </p:grpSpPr>
-      <p:sp>
-        <p:nvSpPr>
-          <p:cNvPr id="2" name="Slide Image Placeholder 1"/>
-          <p:cNvSpPr>
-            <a:spLocks noChangeAspect="1" noGrp="1" noRot="1"/>
-          </p:cNvSpPr>
-          <p:nvPr>
-            <p:ph type="sldImg"/>
-          </p:nvPr>
-        </p:nvSpPr>
-        <p:spPr bwMode="auto"/>
-      </p:sp>
-      <p:sp>
-        <p:nvSpPr>
-          <p:cNvPr id="3" name="Notes Placeholder 2"/>
-          <p:cNvSpPr>
-            <a:spLocks noGrp="1"/>
-          </p:cNvSpPr>
-          <p:nvPr>
-            <p:ph type="body" idx="1"/>
-          </p:nvPr>
-        </p:nvSpPr>
-        <p:spPr bwMode="auto"/>
-        <p:txBody>
-          <a:bodyPr/>
-          <a:lstStyle/>
-          <a:p>
-            <a:pPr>
-              <a:defRPr/>
-            </a:pPr>
-            <a:endParaRPr/>
-          </a:p>
-        </p:txBody>
-      </p:sp>
-      <p:sp>
-        <p:nvSpPr>
-          <p:cNvPr id="4" name="Slide Number Placeholder 3"/>
-          <p:cNvSpPr>
-            <a:spLocks noGrp="1"/>
-          </p:cNvSpPr>
-          <p:nvPr>
-            <p:ph type="sldNum" sz="quarter" idx="10"/>
-          </p:nvPr>
-        </p:nvSpPr>
-        <p:spPr bwMode="auto"/>
-        <p:txBody>
-          <a:bodyPr/>
-          <a:lstStyle/>
-          <a:p>
-            <a:pPr>
-              <a:defRPr/>
-            </a:pPr>
-            <a:fld id="{55A638EF-2CDD-5223-801C-FFC3EAF90205}" type="slidenum">
-              <a:rPr/>
-              <a:t/>
-            </a:fld>
-            <a:endParaRPr/>
-          </a:p>
-        </p:txBody>
-      </p:sp>
-    </p:spTree>
-  </p:cSld>
-  <p:clrMapOvr>
-    <a:masterClrMapping/>
-  </p:clrMapOvr>
-</p:notes>
-</file>
-
-<file path=ppt/notesSlides/notesSlide7.xml><?xml version="1.0" encoding="utf-8"?>
-<p:notes xmlns:a="http://schemas.openxmlformats.org/drawingml/2006/main" xmlns:r="http://schemas.openxmlformats.org/officeDocument/2006/relationships" xmlns:p="http://schemas.openxmlformats.org/presentationml/2006/main" xmlns:m="http://schemas.openxmlformats.org/officeDocument/2006/math" xmlns:w="http://schemas.openxmlformats.org/wordprocessingml/2006/main">
-  <p:cSld name="">
-    <p:spTree>
-      <p:nvGrpSpPr>
-        <p:cNvPr id="1" name=""/>
-        <p:cNvGrpSpPr/>
-        <p:nvPr/>
-      </p:nvGrpSpPr>
-      <p:grpSpPr bwMode="auto">
-        <a:xfrm>
-          <a:off x="0" y="0"/>
-          <a:ext cx="0" cy="0"/>
-          <a:chOff x="0" y="0"/>
-          <a:chExt cx="0" cy="0"/>
-        </a:xfrm>
-      </p:grpSpPr>
-      <p:sp>
-        <p:nvSpPr>
-          <p:cNvPr id="2" name="Slide Image Placeholder 1"/>
-          <p:cNvSpPr>
-            <a:spLocks noChangeAspect="1" noGrp="1" noRot="1"/>
-          </p:cNvSpPr>
-          <p:nvPr>
-            <p:ph type="sldImg"/>
-          </p:nvPr>
-        </p:nvSpPr>
-        <p:spPr bwMode="auto"/>
-      </p:sp>
-      <p:sp>
-        <p:nvSpPr>
-          <p:cNvPr id="3" name="Notes Placeholder 2"/>
-          <p:cNvSpPr>
-            <a:spLocks noGrp="1"/>
-          </p:cNvSpPr>
-          <p:nvPr>
-            <p:ph type="body" idx="1"/>
-          </p:nvPr>
-        </p:nvSpPr>
-        <p:spPr bwMode="auto"/>
-        <p:txBody>
-          <a:bodyPr/>
-          <a:lstStyle/>
-          <a:p>
-            <a:pPr>
-              <a:defRPr/>
-            </a:pPr>
-            <a:endParaRPr/>
-          </a:p>
-        </p:txBody>
-      </p:sp>
-      <p:sp>
-        <p:nvSpPr>
-          <p:cNvPr id="4" name="Slide Number Placeholder 3"/>
-          <p:cNvSpPr>
-            <a:spLocks noGrp="1"/>
-          </p:cNvSpPr>
-          <p:nvPr>
-            <p:ph type="sldNum" sz="quarter" idx="10"/>
-          </p:nvPr>
-        </p:nvSpPr>
-        <p:spPr bwMode="auto"/>
-        <p:txBody>
-          <a:bodyPr/>
-          <a:lstStyle/>
-          <a:p>
-            <a:pPr>
-              <a:defRPr/>
-            </a:pPr>
-            <a:fld id="{4B42ED9D-F63F-93C0-2494-A2DE677FF55F}" type="slidenum">
-              <a:rPr/>
-              <a:t/>
-            </a:fld>
-            <a:endParaRPr/>
-          </a:p>
-        </p:txBody>
-      </p:sp>
-    </p:spTree>
-  </p:cSld>
-  <p:clrMapOvr>
-    <a:masterClrMapping/>
-  </p:clrMapOvr>
-</p:notes>
-</file>
-
-<file path=ppt/notesSlides/notesSlide8.xml><?xml version="1.0" encoding="utf-8"?>
-<p:notes xmlns:a="http://schemas.openxmlformats.org/drawingml/2006/main" xmlns:r="http://schemas.openxmlformats.org/officeDocument/2006/relationships" xmlns:p="http://schemas.openxmlformats.org/presentationml/2006/main" xmlns:m="http://schemas.openxmlformats.org/officeDocument/2006/math" xmlns:w="http://schemas.openxmlformats.org/wordprocessingml/2006/main">
-  <p:cSld name="">
-    <p:spTree>
-      <p:nvGrpSpPr>
-        <p:cNvPr id="1" name=""/>
-        <p:cNvGrpSpPr/>
-        <p:nvPr/>
-      </p:nvGrpSpPr>
-      <p:grpSpPr bwMode="auto">
-        <a:xfrm>
-          <a:off x="0" y="0"/>
-          <a:ext cx="0" cy="0"/>
-          <a:chOff x="0" y="0"/>
-          <a:chExt cx="0" cy="0"/>
-        </a:xfrm>
-      </p:grpSpPr>
-      <p:sp>
-        <p:nvSpPr>
-          <p:cNvPr id="2" name="Slide Image Placeholder 1"/>
-          <p:cNvSpPr>
-            <a:spLocks noChangeAspect="1" noGrp="1" noRot="1"/>
-          </p:cNvSpPr>
-          <p:nvPr>
-            <p:ph type="sldImg"/>
-          </p:nvPr>
-        </p:nvSpPr>
-        <p:spPr bwMode="auto"/>
-      </p:sp>
-      <p:sp>
-        <p:nvSpPr>
-          <p:cNvPr id="3" name="Notes Placeholder 2"/>
-          <p:cNvSpPr>
-            <a:spLocks noGrp="1"/>
-          </p:cNvSpPr>
-          <p:nvPr>
-            <p:ph type="body" idx="1"/>
-          </p:nvPr>
-        </p:nvSpPr>
-        <p:spPr bwMode="auto"/>
-        <p:txBody>
-          <a:bodyPr/>
-          <a:lstStyle/>
-          <a:p>
-            <a:pPr>
-              <a:defRPr/>
-            </a:pPr>
-            <a:endParaRPr/>
-          </a:p>
-        </p:txBody>
-      </p:sp>
-      <p:sp>
-        <p:nvSpPr>
-          <p:cNvPr id="4" name="Slide Number Placeholder 3"/>
-          <p:cNvSpPr>
-            <a:spLocks noGrp="1"/>
-          </p:cNvSpPr>
-          <p:nvPr>
-            <p:ph type="sldNum" sz="quarter" idx="10"/>
-          </p:nvPr>
-        </p:nvSpPr>
-        <p:spPr bwMode="auto"/>
-        <p:txBody>
-          <a:bodyPr/>
-          <a:lstStyle/>
-          <a:p>
-            <a:pPr>
-              <a:defRPr/>
-            </a:pPr>
-            <a:fld id="{9054A140-2CFD-8955-5077-441280AE5FEA}" type="slidenum">
-              <a:rPr/>
-              <a:t/>
-            </a:fld>
-            <a:endParaRPr/>
-          </a:p>
-        </p:txBody>
-      </p:sp>
-    </p:spTree>
-  </p:cSld>
-  <p:clrMapOvr>
-    <a:masterClrMapping/>
-  </p:clrMapOvr>
-</p:notes>
-</file>
-
-<file path=ppt/notesSlides/notesSlide9.xml><?xml version="1.0" encoding="utf-8"?>
-<p:notes xmlns:a="http://schemas.openxmlformats.org/drawingml/2006/main" xmlns:r="http://schemas.openxmlformats.org/officeDocument/2006/relationships" xmlns:p="http://schemas.openxmlformats.org/presentationml/2006/main" xmlns:m="http://schemas.openxmlformats.org/officeDocument/2006/math" xmlns:w="http://schemas.openxmlformats.org/wordprocessingml/2006/main">
-  <p:cSld name="">
-    <p:spTree>
-      <p:nvGrpSpPr>
-        <p:cNvPr id="1" name=""/>
-        <p:cNvGrpSpPr/>
-        <p:nvPr/>
-      </p:nvGrpSpPr>
-      <p:grpSpPr bwMode="auto">
-        <a:xfrm>
-          <a:off x="0" y="0"/>
-          <a:ext cx="0" cy="0"/>
-          <a:chOff x="0" y="0"/>
-          <a:chExt cx="0" cy="0"/>
-        </a:xfrm>
-      </p:grpSpPr>
-      <p:sp>
-        <p:nvSpPr>
-          <p:cNvPr id="2" name="Slide Image Placeholder 1"/>
-          <p:cNvSpPr>
-            <a:spLocks noChangeAspect="1" noGrp="1" noRot="1"/>
-          </p:cNvSpPr>
-          <p:nvPr>
-            <p:ph type="sldImg"/>
-          </p:nvPr>
-        </p:nvSpPr>
-        <p:spPr bwMode="auto"/>
-      </p:sp>
-      <p:sp>
-        <p:nvSpPr>
-          <p:cNvPr id="3" name="Notes Placeholder 2"/>
-          <p:cNvSpPr>
-            <a:spLocks noGrp="1"/>
-          </p:cNvSpPr>
-          <p:nvPr>
-            <p:ph type="body" idx="1"/>
-          </p:nvPr>
-        </p:nvSpPr>
-        <p:spPr bwMode="auto"/>
-        <p:txBody>
-          <a:bodyPr/>
-          <a:lstStyle/>
-          <a:p>
-            <a:pPr>
-              <a:defRPr/>
-            </a:pPr>
-            <a:endParaRPr/>
-          </a:p>
-        </p:txBody>
-      </p:sp>
-      <p:sp>
-        <p:nvSpPr>
-          <p:cNvPr id="4" name="Slide Number Placeholder 3"/>
-          <p:cNvSpPr>
-            <a:spLocks noGrp="1"/>
-          </p:cNvSpPr>
-          <p:nvPr>
-            <p:ph type="sldNum" sz="quarter" idx="10"/>
-          </p:nvPr>
-        </p:nvSpPr>
-        <p:spPr bwMode="auto"/>
-        <p:txBody>
-          <a:bodyPr/>
-          <a:lstStyle/>
-          <a:p>
-            <a:pPr>
-              <a:defRPr/>
-            </a:pPr>
-            <a:fld id="{EBD37DB2-CBD8-82EF-D5C3-688CC42C6079}" type="slidenum">
-              <a:rPr/>
-              <a:t/>
-            </a:fld>
-            <a:endParaRPr/>
-          </a:p>
-        </p:txBody>
-      </p:sp>
-    </p:spTree>
-  </p:cSld>
-  <p:clrMapOvr>
-    <a:masterClrMapping/>
-  </p:clrMapOvr>
-</p:notes>
-</file>
-
-<file path=ppt/slideLayouts/slideLayout1.xml><?xml version="1.0" encoding="utf-8"?>
-<p:sldLayout xmlns:a="http://schemas.openxmlformats.org/drawingml/2006/main" xmlns:r="http://schemas.openxmlformats.org/officeDocument/2006/relationships" xmlns:p="http://schemas.openxmlformats.org/presentationml/2006/main" xmlns:m="http://schemas.openxmlformats.org/officeDocument/2006/math" xmlns:w="http://schemas.openxmlformats.org/wordprocessingml/2006/main" matchingName="" preserve="1" showMasterPhAnim="0" showMasterSp="1" type="title" userDrawn="1">
-  <p:cSld name="Title Slide">
-    <p:spTree>
-      <p:nvGrpSpPr>
-        <p:cNvPr id="1" name=""/>
-        <p:cNvGrpSpPr/>
-        <p:nvPr/>
-      </p:nvGrpSpPr>
-      <p:grpSpPr bwMode="auto">
-        <a:xfrm>
-          <a:off x="0" y="0"/>
-          <a:ext cx="0" cy="0"/>
-          <a:chOff x="0" y="0"/>
-          <a:chExt cx="0" cy="0"/>
-        </a:xfrm>
-      </p:grpSpPr>
-      <p:sp>
-        <p:nvSpPr>
-          <p:cNvPr id="776828866" name="Title 1"/>
+          <p:cNvPr id="2" name="Title 1"/>
           <p:cNvSpPr>
             <a:spLocks noGrp="1"/>
           </p:cNvSpPr>
@@ -1574,7 +146,7 @@
             <p:ph type="ctrTitle"/>
           </p:nvPr>
         </p:nvSpPr>
-        <p:spPr bwMode="auto">
+        <p:spPr>
           <a:xfrm>
             <a:off x="685800" y="2130425"/>
             <a:ext cx="7772400" cy="1470025"/>
@@ -1584,11 +156,8 @@
           <a:bodyPr/>
           <a:lstStyle/>
           <a:p>
-            <a:pPr>
-              <a:defRPr/>
-            </a:pPr>
-            <a:r>
-              <a:rPr lang="en-US"/>
+            <a:r>
+              <a:rPr lang="en-US" smtClean="0"/>
               <a:t>Click to edit Master title style</a:t>
             </a:r>
             <a:endParaRPr lang="en-US"/>
@@ -1597,7 +166,7 @@
       </p:sp>
       <p:sp>
         <p:nvSpPr>
-          <p:cNvPr id="632140693" name="Subtitle 2"/>
+          <p:cNvPr id="3" name="Subtitle 2"/>
           <p:cNvSpPr>
             <a:spLocks noGrp="1"/>
           </p:cNvSpPr>
@@ -1605,10 +174,10 @@
             <p:ph type="subTitle" idx="1"/>
           </p:nvPr>
         </p:nvSpPr>
-        <p:spPr bwMode="auto">
+        <p:spPr>
           <a:xfrm>
             <a:off x="1371600" y="3886200"/>
-            <a:ext cx="6400800" cy="1752599"/>
+            <a:ext cx="6400800" cy="1752600"/>
           </a:xfrm>
         </p:spPr>
         <p:txBody>
@@ -1706,11 +275,8 @@
             </a:lvl9pPr>
           </a:lstStyle>
           <a:p>
-            <a:pPr>
-              <a:defRPr/>
-            </a:pPr>
-            <a:r>
-              <a:rPr lang="en-US"/>
+            <a:r>
+              <a:rPr lang="en-US" smtClean="0"/>
               <a:t>Click to edit Master subtitle style</a:t>
             </a:r>
             <a:endParaRPr lang="en-US"/>
@@ -1719,7 +285,7 @@
       </p:sp>
       <p:sp>
         <p:nvSpPr>
-          <p:cNvPr id="1346276493" name="Date Placeholder 3"/>
+          <p:cNvPr id="4" name="Date Placeholder 3"/>
           <p:cNvSpPr>
             <a:spLocks noGrp="1"/>
           </p:cNvSpPr>
@@ -1727,16 +293,13 @@
             <p:ph type="dt" sz="half" idx="10"/>
           </p:nvPr>
         </p:nvSpPr>
-        <p:spPr bwMode="auto"/>
+        <p:spPr/>
         <p:txBody>
           <a:bodyPr/>
           <a:lstStyle/>
           <a:p>
-            <a:pPr>
-              <a:defRPr/>
-            </a:pPr>
             <a:fld id="{5BCAD085-E8A6-8845-BD4E-CB4CCA059FC4}" type="datetimeFigureOut">
-              <a:rPr lang="en-US"/>
+              <a:rPr lang="en-US" smtClean="0"/>
               <a:t>1/27/13</a:t>
             </a:fld>
             <a:endParaRPr lang="en-US"/>
@@ -1745,7 +308,7 @@
       </p:sp>
       <p:sp>
         <p:nvSpPr>
-          <p:cNvPr id="2069307911" name="Footer Placeholder 4"/>
+          <p:cNvPr id="5" name="Footer Placeholder 4"/>
           <p:cNvSpPr>
             <a:spLocks noGrp="1"/>
           </p:cNvSpPr>
@@ -1753,21 +316,18 @@
             <p:ph type="ftr" sz="quarter" idx="11"/>
           </p:nvPr>
         </p:nvSpPr>
-        <p:spPr bwMode="auto"/>
+        <p:spPr/>
         <p:txBody>
           <a:bodyPr/>
           <a:lstStyle/>
           <a:p>
-            <a:pPr>
-              <a:defRPr/>
-            </a:pPr>
             <a:endParaRPr lang="en-US"/>
           </a:p>
         </p:txBody>
       </p:sp>
       <p:sp>
         <p:nvSpPr>
-          <p:cNvPr id="42642737" name="Slide Number Placeholder 5"/>
+          <p:cNvPr id="6" name="Slide Number Placeholder 5"/>
           <p:cNvSpPr>
             <a:spLocks noGrp="1"/>
           </p:cNvSpPr>
@@ -1775,16 +335,13 @@
             <p:ph type="sldNum" sz="quarter" idx="12"/>
           </p:nvPr>
         </p:nvSpPr>
-        <p:spPr bwMode="auto"/>
+        <p:spPr/>
         <p:txBody>
           <a:bodyPr/>
           <a:lstStyle/>
           <a:p>
-            <a:pPr>
-              <a:defRPr/>
-            </a:pPr>
             <a:fld id="{C1FF6DA9-008F-8B48-92A6-B652298478BF}" type="slidenum">
-              <a:rPr lang="en-US"/>
+              <a:rPr lang="en-US" smtClean="0"/>
               <a:t>‹#›</a:t>
             </a:fld>
             <a:endParaRPr lang="en-US"/>
@@ -1792,6 +349,11 @@
         </p:txBody>
       </p:sp>
     </p:spTree>
+    <p:extLst>
+      <p:ext uri="{BB962C8B-B14F-4D97-AF65-F5344CB8AC3E}">
+        <p14:creationId xmlns:p14="http://schemas.microsoft.com/office/powerpoint/2010/main" val="3168075583"/>
+      </p:ext>
+    </p:extLst>
   </p:cSld>
   <p:clrMapOvr>
     <a:masterClrMapping/>
@@ -1800,7 +362,7 @@
 </file>
 
 <file path=ppt/slideLayouts/slideLayout10.xml><?xml version="1.0" encoding="utf-8"?>
-<p:sldLayout xmlns:a="http://schemas.openxmlformats.org/drawingml/2006/main" xmlns:r="http://schemas.openxmlformats.org/officeDocument/2006/relationships" xmlns:p="http://schemas.openxmlformats.org/presentationml/2006/main" xmlns:m="http://schemas.openxmlformats.org/officeDocument/2006/math" xmlns:w="http://schemas.openxmlformats.org/wordprocessingml/2006/main" matchingName="" preserve="1" showMasterPhAnim="0" showMasterSp="1" type="vertTx" userDrawn="1">
+<p:sldLayout xmlns:a="http://schemas.openxmlformats.org/drawingml/2006/main" xmlns:r="http://schemas.openxmlformats.org/officeDocument/2006/relationships" xmlns:p="http://schemas.openxmlformats.org/presentationml/2006/main" type="vertTx" preserve="1">
   <p:cSld name="Title and Vertical Text">
     <p:spTree>
       <p:nvGrpSpPr>
@@ -1808,7 +370,7 @@
         <p:cNvGrpSpPr/>
         <p:nvPr/>
       </p:nvGrpSpPr>
-      <p:grpSpPr bwMode="auto">
+      <p:grpSpPr>
         <a:xfrm>
           <a:off x="0" y="0"/>
           <a:ext cx="0" cy="0"/>
@@ -1818,7 +380,7 @@
       </p:grpSpPr>
       <p:sp>
         <p:nvSpPr>
-          <p:cNvPr id="1882252341" name="Title 1"/>
+          <p:cNvPr id="2" name="Title 1"/>
           <p:cNvSpPr>
             <a:spLocks noGrp="1"/>
           </p:cNvSpPr>
@@ -1826,16 +388,13 @@
             <p:ph type="title"/>
           </p:nvPr>
         </p:nvSpPr>
-        <p:spPr bwMode="auto"/>
+        <p:spPr/>
         <p:txBody>
           <a:bodyPr/>
           <a:lstStyle/>
           <a:p>
-            <a:pPr>
-              <a:defRPr/>
-            </a:pPr>
-            <a:r>
-              <a:rPr lang="en-US"/>
+            <a:r>
+              <a:rPr lang="en-US" smtClean="0"/>
               <a:t>Click to edit Master title style</a:t>
             </a:r>
             <a:endParaRPr lang="en-US"/>
@@ -1844,7 +403,7 @@
       </p:sp>
       <p:sp>
         <p:nvSpPr>
-          <p:cNvPr id="1306941194" name="Vertical Text Placeholder 2"/>
+          <p:cNvPr id="3" name="Vertical Text Placeholder 2"/>
           <p:cNvSpPr>
             <a:spLocks noGrp="1"/>
           </p:cNvSpPr>
@@ -1852,56 +411,42 @@
             <p:ph type="body" orient="vert" idx="1"/>
           </p:nvPr>
         </p:nvSpPr>
-        <p:spPr bwMode="auto"/>
+        <p:spPr/>
         <p:txBody>
           <a:bodyPr vert="eaVert"/>
           <a:lstStyle/>
           <a:p>
-            <a:pPr lvl="0">
-              <a:defRPr/>
-            </a:pPr>
-            <a:r>
-              <a:rPr lang="en-US"/>
+            <a:pPr lvl="0"/>
+            <a:r>
+              <a:rPr lang="en-US" smtClean="0"/>
               <a:t>Click to edit Master text styles</a:t>
             </a:r>
-            <a:endParaRPr/>
-          </a:p>
-          <a:p>
-            <a:pPr lvl="1">
-              <a:defRPr/>
-            </a:pPr>
-            <a:r>
-              <a:rPr lang="en-US"/>
+          </a:p>
+          <a:p>
+            <a:pPr lvl="1"/>
+            <a:r>
+              <a:rPr lang="en-US" smtClean="0"/>
               <a:t>Second level</a:t>
             </a:r>
-            <a:endParaRPr/>
-          </a:p>
-          <a:p>
-            <a:pPr lvl="2">
-              <a:defRPr/>
-            </a:pPr>
-            <a:r>
-              <a:rPr lang="en-US"/>
+          </a:p>
+          <a:p>
+            <a:pPr lvl="2"/>
+            <a:r>
+              <a:rPr lang="en-US" smtClean="0"/>
               <a:t>Third level</a:t>
             </a:r>
-            <a:endParaRPr/>
-          </a:p>
-          <a:p>
-            <a:pPr lvl="3">
-              <a:defRPr/>
-            </a:pPr>
-            <a:r>
-              <a:rPr lang="en-US"/>
+          </a:p>
+          <a:p>
+            <a:pPr lvl="3"/>
+            <a:r>
+              <a:rPr lang="en-US" smtClean="0"/>
               <a:t>Fourth level</a:t>
             </a:r>
-            <a:endParaRPr/>
-          </a:p>
-          <a:p>
-            <a:pPr lvl="4">
-              <a:defRPr/>
-            </a:pPr>
-            <a:r>
-              <a:rPr lang="en-US"/>
+          </a:p>
+          <a:p>
+            <a:pPr lvl="4"/>
+            <a:r>
+              <a:rPr lang="en-US" smtClean="0"/>
               <a:t>Fifth level</a:t>
             </a:r>
             <a:endParaRPr lang="en-US"/>
@@ -1910,7 +455,7 @@
       </p:sp>
       <p:sp>
         <p:nvSpPr>
-          <p:cNvPr id="766015275" name="Date Placeholder 3"/>
+          <p:cNvPr id="4" name="Date Placeholder 3"/>
           <p:cNvSpPr>
             <a:spLocks noGrp="1"/>
           </p:cNvSpPr>
@@ -1918,16 +463,13 @@
             <p:ph type="dt" sz="half" idx="10"/>
           </p:nvPr>
         </p:nvSpPr>
-        <p:spPr bwMode="auto"/>
+        <p:spPr/>
         <p:txBody>
           <a:bodyPr/>
           <a:lstStyle/>
           <a:p>
-            <a:pPr>
-              <a:defRPr/>
-            </a:pPr>
             <a:fld id="{5BCAD085-E8A6-8845-BD4E-CB4CCA059FC4}" type="datetimeFigureOut">
-              <a:rPr lang="en-US"/>
+              <a:rPr lang="en-US" smtClean="0"/>
               <a:t>1/27/13</a:t>
             </a:fld>
             <a:endParaRPr lang="en-US"/>
@@ -1936,7 +478,7 @@
       </p:sp>
       <p:sp>
         <p:nvSpPr>
-          <p:cNvPr id="1517461613" name="Footer Placeholder 4"/>
+          <p:cNvPr id="5" name="Footer Placeholder 4"/>
           <p:cNvSpPr>
             <a:spLocks noGrp="1"/>
           </p:cNvSpPr>
@@ -1944,21 +486,18 @@
             <p:ph type="ftr" sz="quarter" idx="11"/>
           </p:nvPr>
         </p:nvSpPr>
-        <p:spPr bwMode="auto"/>
+        <p:spPr/>
         <p:txBody>
           <a:bodyPr/>
           <a:lstStyle/>
           <a:p>
-            <a:pPr>
-              <a:defRPr/>
-            </a:pPr>
             <a:endParaRPr lang="en-US"/>
           </a:p>
         </p:txBody>
       </p:sp>
       <p:sp>
         <p:nvSpPr>
-          <p:cNvPr id="794135178" name="Slide Number Placeholder 5"/>
+          <p:cNvPr id="6" name="Slide Number Placeholder 5"/>
           <p:cNvSpPr>
             <a:spLocks noGrp="1"/>
           </p:cNvSpPr>
@@ -1966,16 +505,13 @@
             <p:ph type="sldNum" sz="quarter" idx="12"/>
           </p:nvPr>
         </p:nvSpPr>
-        <p:spPr bwMode="auto"/>
+        <p:spPr/>
         <p:txBody>
           <a:bodyPr/>
           <a:lstStyle/>
           <a:p>
-            <a:pPr>
-              <a:defRPr/>
-            </a:pPr>
             <a:fld id="{C1FF6DA9-008F-8B48-92A6-B652298478BF}" type="slidenum">
-              <a:rPr lang="en-US"/>
+              <a:rPr lang="en-US" smtClean="0"/>
               <a:t>‹#›</a:t>
             </a:fld>
             <a:endParaRPr lang="en-US"/>
@@ -1983,6 +519,11 @@
         </p:txBody>
       </p:sp>
     </p:spTree>
+    <p:extLst>
+      <p:ext uri="{BB962C8B-B14F-4D97-AF65-F5344CB8AC3E}">
+        <p14:creationId xmlns:p14="http://schemas.microsoft.com/office/powerpoint/2010/main" val="2910927964"/>
+      </p:ext>
+    </p:extLst>
   </p:cSld>
   <p:clrMapOvr>
     <a:masterClrMapping/>
@@ -1991,7 +532,7 @@
 </file>
 
 <file path=ppt/slideLayouts/slideLayout11.xml><?xml version="1.0" encoding="utf-8"?>
-<p:sldLayout xmlns:a="http://schemas.openxmlformats.org/drawingml/2006/main" xmlns:r="http://schemas.openxmlformats.org/officeDocument/2006/relationships" xmlns:p="http://schemas.openxmlformats.org/presentationml/2006/main" xmlns:m="http://schemas.openxmlformats.org/officeDocument/2006/math" xmlns:w="http://schemas.openxmlformats.org/wordprocessingml/2006/main" matchingName="" preserve="1" showMasterPhAnim="0" showMasterSp="1" type="vertTitleAndTx" userDrawn="1">
+<p:sldLayout xmlns:a="http://schemas.openxmlformats.org/drawingml/2006/main" xmlns:r="http://schemas.openxmlformats.org/officeDocument/2006/relationships" xmlns:p="http://schemas.openxmlformats.org/presentationml/2006/main" type="vertTitleAndTx" preserve="1">
   <p:cSld name="Vertical Title and Text">
     <p:spTree>
       <p:nvGrpSpPr>
@@ -1999,7 +540,7 @@
         <p:cNvGrpSpPr/>
         <p:nvPr/>
       </p:nvGrpSpPr>
-      <p:grpSpPr bwMode="auto">
+      <p:grpSpPr>
         <a:xfrm>
           <a:off x="0" y="0"/>
           <a:ext cx="0" cy="0"/>
@@ -2009,7 +550,7 @@
       </p:grpSpPr>
       <p:sp>
         <p:nvSpPr>
-          <p:cNvPr id="1341075973" name="Vertical Title 1"/>
+          <p:cNvPr id="2" name="Vertical Title 1"/>
           <p:cNvSpPr>
             <a:spLocks noGrp="1"/>
           </p:cNvSpPr>
@@ -2017,7 +558,7 @@
             <p:ph type="title" orient="vert"/>
           </p:nvPr>
         </p:nvSpPr>
-        <p:spPr bwMode="auto">
+        <p:spPr>
           <a:xfrm>
             <a:off x="6629400" y="274638"/>
             <a:ext cx="2057400" cy="5851525"/>
@@ -2027,11 +568,8 @@
           <a:bodyPr vert="eaVert"/>
           <a:lstStyle/>
           <a:p>
-            <a:pPr>
-              <a:defRPr/>
-            </a:pPr>
-            <a:r>
-              <a:rPr lang="en-US"/>
+            <a:r>
+              <a:rPr lang="en-US" smtClean="0"/>
               <a:t>Click to edit Master title style</a:t>
             </a:r>
             <a:endParaRPr lang="en-US"/>
@@ -2040,7 +578,7 @@
       </p:sp>
       <p:sp>
         <p:nvSpPr>
-          <p:cNvPr id="582517385" name="Vertical Text Placeholder 2"/>
+          <p:cNvPr id="3" name="Vertical Text Placeholder 2"/>
           <p:cNvSpPr>
             <a:spLocks noGrp="1"/>
           </p:cNvSpPr>
@@ -2048,7 +586,7 @@
             <p:ph type="body" orient="vert" idx="1"/>
           </p:nvPr>
         </p:nvSpPr>
-        <p:spPr bwMode="auto">
+        <p:spPr>
           <a:xfrm>
             <a:off x="457200" y="274638"/>
             <a:ext cx="6019800" cy="5851525"/>
@@ -2058,51 +596,37 @@
           <a:bodyPr vert="eaVert"/>
           <a:lstStyle/>
           <a:p>
-            <a:pPr lvl="0">
-              <a:defRPr/>
-            </a:pPr>
-            <a:r>
-              <a:rPr lang="en-US"/>
+            <a:pPr lvl="0"/>
+            <a:r>
+              <a:rPr lang="en-US" smtClean="0"/>
               <a:t>Click to edit Master text styles</a:t>
             </a:r>
-            <a:endParaRPr/>
-          </a:p>
-          <a:p>
-            <a:pPr lvl="1">
-              <a:defRPr/>
-            </a:pPr>
-            <a:r>
-              <a:rPr lang="en-US"/>
+          </a:p>
+          <a:p>
+            <a:pPr lvl="1"/>
+            <a:r>
+              <a:rPr lang="en-US" smtClean="0"/>
               <a:t>Second level</a:t>
             </a:r>
-            <a:endParaRPr/>
-          </a:p>
-          <a:p>
-            <a:pPr lvl="2">
-              <a:defRPr/>
-            </a:pPr>
-            <a:r>
-              <a:rPr lang="en-US"/>
+          </a:p>
+          <a:p>
+            <a:pPr lvl="2"/>
+            <a:r>
+              <a:rPr lang="en-US" smtClean="0"/>
               <a:t>Third level</a:t>
             </a:r>
-            <a:endParaRPr/>
-          </a:p>
-          <a:p>
-            <a:pPr lvl="3">
-              <a:defRPr/>
-            </a:pPr>
-            <a:r>
-              <a:rPr lang="en-US"/>
+          </a:p>
+          <a:p>
+            <a:pPr lvl="3"/>
+            <a:r>
+              <a:rPr lang="en-US" smtClean="0"/>
               <a:t>Fourth level</a:t>
             </a:r>
-            <a:endParaRPr/>
-          </a:p>
-          <a:p>
-            <a:pPr lvl="4">
-              <a:defRPr/>
-            </a:pPr>
-            <a:r>
-              <a:rPr lang="en-US"/>
+          </a:p>
+          <a:p>
+            <a:pPr lvl="4"/>
+            <a:r>
+              <a:rPr lang="en-US" smtClean="0"/>
               <a:t>Fifth level</a:t>
             </a:r>
             <a:endParaRPr lang="en-US"/>
@@ -2111,7 +635,7 @@
       </p:sp>
       <p:sp>
         <p:nvSpPr>
-          <p:cNvPr id="1055924696" name="Date Placeholder 3"/>
+          <p:cNvPr id="4" name="Date Placeholder 3"/>
           <p:cNvSpPr>
             <a:spLocks noGrp="1"/>
           </p:cNvSpPr>
@@ -2119,16 +643,13 @@
             <p:ph type="dt" sz="half" idx="10"/>
           </p:nvPr>
         </p:nvSpPr>
-        <p:spPr bwMode="auto"/>
+        <p:spPr/>
         <p:txBody>
           <a:bodyPr/>
           <a:lstStyle/>
           <a:p>
-            <a:pPr>
-              <a:defRPr/>
-            </a:pPr>
             <a:fld id="{5BCAD085-E8A6-8845-BD4E-CB4CCA059FC4}" type="datetimeFigureOut">
-              <a:rPr lang="en-US"/>
+              <a:rPr lang="en-US" smtClean="0"/>
               <a:t>1/27/13</a:t>
             </a:fld>
             <a:endParaRPr lang="en-US"/>
@@ -2137,7 +658,7 @@
       </p:sp>
       <p:sp>
         <p:nvSpPr>
-          <p:cNvPr id="1946305567" name="Footer Placeholder 4"/>
+          <p:cNvPr id="5" name="Footer Placeholder 4"/>
           <p:cNvSpPr>
             <a:spLocks noGrp="1"/>
           </p:cNvSpPr>
@@ -2145,21 +666,18 @@
             <p:ph type="ftr" sz="quarter" idx="11"/>
           </p:nvPr>
         </p:nvSpPr>
-        <p:spPr bwMode="auto"/>
+        <p:spPr/>
         <p:txBody>
           <a:bodyPr/>
           <a:lstStyle/>
           <a:p>
-            <a:pPr>
-              <a:defRPr/>
-            </a:pPr>
             <a:endParaRPr lang="en-US"/>
           </a:p>
         </p:txBody>
       </p:sp>
       <p:sp>
         <p:nvSpPr>
-          <p:cNvPr id="218577504" name="Slide Number Placeholder 5"/>
+          <p:cNvPr id="6" name="Slide Number Placeholder 5"/>
           <p:cNvSpPr>
             <a:spLocks noGrp="1"/>
           </p:cNvSpPr>
@@ -2167,16 +685,13 @@
             <p:ph type="sldNum" sz="quarter" idx="12"/>
           </p:nvPr>
         </p:nvSpPr>
-        <p:spPr bwMode="auto"/>
+        <p:spPr/>
         <p:txBody>
           <a:bodyPr/>
           <a:lstStyle/>
           <a:p>
-            <a:pPr>
-              <a:defRPr/>
-            </a:pPr>
             <a:fld id="{C1FF6DA9-008F-8B48-92A6-B652298478BF}" type="slidenum">
-              <a:rPr lang="en-US"/>
+              <a:rPr lang="en-US" smtClean="0"/>
               <a:t>‹#›</a:t>
             </a:fld>
             <a:endParaRPr lang="en-US"/>
@@ -2184,6 +699,11 @@
         </p:txBody>
       </p:sp>
     </p:spTree>
+    <p:extLst>
+      <p:ext uri="{BB962C8B-B14F-4D97-AF65-F5344CB8AC3E}">
+        <p14:creationId xmlns:p14="http://schemas.microsoft.com/office/powerpoint/2010/main" val="3612223792"/>
+      </p:ext>
+    </p:extLst>
   </p:cSld>
   <p:clrMapOvr>
     <a:masterClrMapping/>
@@ -2192,7 +712,7 @@
 </file>
 
 <file path=ppt/slideLayouts/slideLayout2.xml><?xml version="1.0" encoding="utf-8"?>
-<p:sldLayout xmlns:a="http://schemas.openxmlformats.org/drawingml/2006/main" xmlns:r="http://schemas.openxmlformats.org/officeDocument/2006/relationships" xmlns:p="http://schemas.openxmlformats.org/presentationml/2006/main" xmlns:m="http://schemas.openxmlformats.org/officeDocument/2006/math" xmlns:w="http://schemas.openxmlformats.org/wordprocessingml/2006/main" matchingName="" preserve="1" showMasterPhAnim="0" showMasterSp="1" type="obj" userDrawn="1">
+<p:sldLayout xmlns:a="http://schemas.openxmlformats.org/drawingml/2006/main" xmlns:r="http://schemas.openxmlformats.org/officeDocument/2006/relationships" xmlns:p="http://schemas.openxmlformats.org/presentationml/2006/main" type="obj" preserve="1">
   <p:cSld name="Title and Content">
     <p:spTree>
       <p:nvGrpSpPr>
@@ -2200,7 +720,7 @@
         <p:cNvGrpSpPr/>
         <p:nvPr/>
       </p:nvGrpSpPr>
-      <p:grpSpPr bwMode="auto">
+      <p:grpSpPr>
         <a:xfrm>
           <a:off x="0" y="0"/>
           <a:ext cx="0" cy="0"/>
@@ -2210,7 +730,7 @@
       </p:grpSpPr>
       <p:sp>
         <p:nvSpPr>
-          <p:cNvPr id="795520211" name="Title 1"/>
+          <p:cNvPr id="2" name="Title 1"/>
           <p:cNvSpPr>
             <a:spLocks noGrp="1"/>
           </p:cNvSpPr>
@@ -2218,16 +738,13 @@
             <p:ph type="title"/>
           </p:nvPr>
         </p:nvSpPr>
-        <p:spPr bwMode="auto"/>
+        <p:spPr/>
         <p:txBody>
           <a:bodyPr/>
           <a:lstStyle/>
           <a:p>
-            <a:pPr>
-              <a:defRPr/>
-            </a:pPr>
-            <a:r>
-              <a:rPr lang="en-US"/>
+            <a:r>
+              <a:rPr lang="en-US" smtClean="0"/>
               <a:t>Click to edit Master title style</a:t>
             </a:r>
             <a:endParaRPr lang="en-US"/>
@@ -2236,7 +753,7 @@
       </p:sp>
       <p:sp>
         <p:nvSpPr>
-          <p:cNvPr id="1250581600" name="Content Placeholder 2"/>
+          <p:cNvPr id="3" name="Content Placeholder 2"/>
           <p:cNvSpPr>
             <a:spLocks noGrp="1"/>
           </p:cNvSpPr>
@@ -2244,56 +761,42 @@
             <p:ph idx="1"/>
           </p:nvPr>
         </p:nvSpPr>
-        <p:spPr bwMode="auto"/>
+        <p:spPr/>
         <p:txBody>
           <a:bodyPr/>
           <a:lstStyle/>
           <a:p>
-            <a:pPr lvl="0">
-              <a:defRPr/>
-            </a:pPr>
-            <a:r>
-              <a:rPr lang="en-US"/>
+            <a:pPr lvl="0"/>
+            <a:r>
+              <a:rPr lang="en-US" smtClean="0"/>
               <a:t>Click to edit Master text styles</a:t>
             </a:r>
-            <a:endParaRPr/>
-          </a:p>
-          <a:p>
-            <a:pPr lvl="1">
-              <a:defRPr/>
-            </a:pPr>
-            <a:r>
-              <a:rPr lang="en-US"/>
+          </a:p>
+          <a:p>
+            <a:pPr lvl="1"/>
+            <a:r>
+              <a:rPr lang="en-US" smtClean="0"/>
               <a:t>Second level</a:t>
             </a:r>
-            <a:endParaRPr/>
-          </a:p>
-          <a:p>
-            <a:pPr lvl="2">
-              <a:defRPr/>
-            </a:pPr>
-            <a:r>
-              <a:rPr lang="en-US"/>
+          </a:p>
+          <a:p>
+            <a:pPr lvl="2"/>
+            <a:r>
+              <a:rPr lang="en-US" smtClean="0"/>
               <a:t>Third level</a:t>
             </a:r>
-            <a:endParaRPr/>
-          </a:p>
-          <a:p>
-            <a:pPr lvl="3">
-              <a:defRPr/>
-            </a:pPr>
-            <a:r>
-              <a:rPr lang="en-US"/>
+          </a:p>
+          <a:p>
+            <a:pPr lvl="3"/>
+            <a:r>
+              <a:rPr lang="en-US" smtClean="0"/>
               <a:t>Fourth level</a:t>
             </a:r>
-            <a:endParaRPr/>
-          </a:p>
-          <a:p>
-            <a:pPr lvl="4">
-              <a:defRPr/>
-            </a:pPr>
-            <a:r>
-              <a:rPr lang="en-US"/>
+          </a:p>
+          <a:p>
+            <a:pPr lvl="4"/>
+            <a:r>
+              <a:rPr lang="en-US" smtClean="0"/>
               <a:t>Fifth level</a:t>
             </a:r>
             <a:endParaRPr lang="en-US"/>
@@ -2302,7 +805,7 @@
       </p:sp>
       <p:sp>
         <p:nvSpPr>
-          <p:cNvPr id="863534942" name="Date Placeholder 3"/>
+          <p:cNvPr id="4" name="Date Placeholder 3"/>
           <p:cNvSpPr>
             <a:spLocks noGrp="1"/>
           </p:cNvSpPr>
@@ -2310,16 +813,13 @@
             <p:ph type="dt" sz="half" idx="10"/>
           </p:nvPr>
         </p:nvSpPr>
-        <p:spPr bwMode="auto"/>
+        <p:spPr/>
         <p:txBody>
           <a:bodyPr/>
           <a:lstStyle/>
           <a:p>
-            <a:pPr>
-              <a:defRPr/>
-            </a:pPr>
             <a:fld id="{5BCAD085-E8A6-8845-BD4E-CB4CCA059FC4}" type="datetimeFigureOut">
-              <a:rPr lang="en-US"/>
+              <a:rPr lang="en-US" smtClean="0"/>
               <a:t>1/27/13</a:t>
             </a:fld>
             <a:endParaRPr lang="en-US"/>
@@ -2328,7 +828,7 @@
       </p:sp>
       <p:sp>
         <p:nvSpPr>
-          <p:cNvPr id="2061234764" name="Footer Placeholder 4"/>
+          <p:cNvPr id="5" name="Footer Placeholder 4"/>
           <p:cNvSpPr>
             <a:spLocks noGrp="1"/>
           </p:cNvSpPr>
@@ -2336,21 +836,18 @@
             <p:ph type="ftr" sz="quarter" idx="11"/>
           </p:nvPr>
         </p:nvSpPr>
-        <p:spPr bwMode="auto"/>
+        <p:spPr/>
         <p:txBody>
           <a:bodyPr/>
           <a:lstStyle/>
           <a:p>
-            <a:pPr>
-              <a:defRPr/>
-            </a:pPr>
             <a:endParaRPr lang="en-US"/>
           </a:p>
         </p:txBody>
       </p:sp>
       <p:sp>
         <p:nvSpPr>
-          <p:cNvPr id="1271492061" name="Slide Number Placeholder 5"/>
+          <p:cNvPr id="6" name="Slide Number Placeholder 5"/>
           <p:cNvSpPr>
             <a:spLocks noGrp="1"/>
           </p:cNvSpPr>
@@ -2358,16 +855,13 @@
             <p:ph type="sldNum" sz="quarter" idx="12"/>
           </p:nvPr>
         </p:nvSpPr>
-        <p:spPr bwMode="auto"/>
+        <p:spPr/>
         <p:txBody>
           <a:bodyPr/>
           <a:lstStyle/>
           <a:p>
-            <a:pPr>
-              <a:defRPr/>
-            </a:pPr>
             <a:fld id="{C1FF6DA9-008F-8B48-92A6-B652298478BF}" type="slidenum">
-              <a:rPr lang="en-US"/>
+              <a:rPr lang="en-US" smtClean="0"/>
               <a:t>‹#›</a:t>
             </a:fld>
             <a:endParaRPr lang="en-US"/>
@@ -2375,6 +869,11 @@
         </p:txBody>
       </p:sp>
     </p:spTree>
+    <p:extLst>
+      <p:ext uri="{BB962C8B-B14F-4D97-AF65-F5344CB8AC3E}">
+        <p14:creationId xmlns:p14="http://schemas.microsoft.com/office/powerpoint/2010/main" val="2614314258"/>
+      </p:ext>
+    </p:extLst>
   </p:cSld>
   <p:clrMapOvr>
     <a:masterClrMapping/>
@@ -2383,7 +882,7 @@
 </file>
 
 <file path=ppt/slideLayouts/slideLayout3.xml><?xml version="1.0" encoding="utf-8"?>
-<p:sldLayout xmlns:a="http://schemas.openxmlformats.org/drawingml/2006/main" xmlns:r="http://schemas.openxmlformats.org/officeDocument/2006/relationships" xmlns:p="http://schemas.openxmlformats.org/presentationml/2006/main" xmlns:m="http://schemas.openxmlformats.org/officeDocument/2006/math" xmlns:w="http://schemas.openxmlformats.org/wordprocessingml/2006/main" matchingName="" preserve="1" showMasterPhAnim="0" showMasterSp="1" type="secHead" userDrawn="1">
+<p:sldLayout xmlns:a="http://schemas.openxmlformats.org/drawingml/2006/main" xmlns:r="http://schemas.openxmlformats.org/officeDocument/2006/relationships" xmlns:p="http://schemas.openxmlformats.org/presentationml/2006/main" type="secHead" preserve="1">
   <p:cSld name="Section Header">
     <p:spTree>
       <p:nvGrpSpPr>
@@ -2391,7 +890,7 @@
         <p:cNvGrpSpPr/>
         <p:nvPr/>
       </p:nvGrpSpPr>
-      <p:grpSpPr bwMode="auto">
+      <p:grpSpPr>
         <a:xfrm>
           <a:off x="0" y="0"/>
           <a:ext cx="0" cy="0"/>
@@ -2401,7 +900,7 @@
       </p:grpSpPr>
       <p:sp>
         <p:nvSpPr>
-          <p:cNvPr id="2113510170" name="Title 1"/>
+          <p:cNvPr id="2" name="Title 1"/>
           <p:cNvSpPr>
             <a:spLocks noGrp="1"/>
           </p:cNvSpPr>
@@ -2409,7 +908,7 @@
             <p:ph type="title"/>
           </p:nvPr>
         </p:nvSpPr>
-        <p:spPr bwMode="auto">
+        <p:spPr>
           <a:xfrm>
             <a:off x="722313" y="4406900"/>
             <a:ext cx="7772400" cy="1362075"/>
@@ -2423,11 +922,8 @@
             </a:lvl1pPr>
           </a:lstStyle>
           <a:p>
-            <a:pPr>
-              <a:defRPr/>
-            </a:pPr>
-            <a:r>
-              <a:rPr lang="en-US"/>
+            <a:r>
+              <a:rPr lang="en-US" smtClean="0"/>
               <a:t>Click to edit Master title style</a:t>
             </a:r>
             <a:endParaRPr lang="en-US"/>
@@ -2436,7 +932,7 @@
       </p:sp>
       <p:sp>
         <p:nvSpPr>
-          <p:cNvPr id="150984351" name="Text Placeholder 2"/>
+          <p:cNvPr id="3" name="Text Placeholder 2"/>
           <p:cNvSpPr>
             <a:spLocks noGrp="1"/>
           </p:cNvSpPr>
@@ -2444,7 +940,7 @@
             <p:ph type="body" idx="1"/>
           </p:nvPr>
         </p:nvSpPr>
-        <p:spPr bwMode="auto">
+        <p:spPr>
           <a:xfrm>
             <a:off x="722313" y="2906713"/>
             <a:ext cx="7772400" cy="1500187"/>
@@ -2545,20 +1041,17 @@
             </a:lvl9pPr>
           </a:lstStyle>
           <a:p>
-            <a:pPr lvl="0">
-              <a:defRPr/>
-            </a:pPr>
-            <a:r>
-              <a:rPr lang="en-US"/>
+            <a:pPr lvl="0"/>
+            <a:r>
+              <a:rPr lang="en-US" smtClean="0"/>
               <a:t>Click to edit Master text styles</a:t>
             </a:r>
-            <a:endParaRPr/>
-          </a:p>
-        </p:txBody>
-      </p:sp>
-      <p:sp>
-        <p:nvSpPr>
-          <p:cNvPr id="231154047" name="Date Placeholder 3"/>
+          </a:p>
+        </p:txBody>
+      </p:sp>
+      <p:sp>
+        <p:nvSpPr>
+          <p:cNvPr id="4" name="Date Placeholder 3"/>
           <p:cNvSpPr>
             <a:spLocks noGrp="1"/>
           </p:cNvSpPr>
@@ -2566,16 +1059,13 @@
             <p:ph type="dt" sz="half" idx="10"/>
           </p:nvPr>
         </p:nvSpPr>
-        <p:spPr bwMode="auto"/>
+        <p:spPr/>
         <p:txBody>
           <a:bodyPr/>
           <a:lstStyle/>
           <a:p>
-            <a:pPr>
-              <a:defRPr/>
-            </a:pPr>
             <a:fld id="{5BCAD085-E8A6-8845-BD4E-CB4CCA059FC4}" type="datetimeFigureOut">
-              <a:rPr lang="en-US"/>
+              <a:rPr lang="en-US" smtClean="0"/>
               <a:t>1/27/13</a:t>
             </a:fld>
             <a:endParaRPr lang="en-US"/>
@@ -2584,7 +1074,7 @@
       </p:sp>
       <p:sp>
         <p:nvSpPr>
-          <p:cNvPr id="2056528311" name="Footer Placeholder 4"/>
+          <p:cNvPr id="5" name="Footer Placeholder 4"/>
           <p:cNvSpPr>
             <a:spLocks noGrp="1"/>
           </p:cNvSpPr>
@@ -2592,21 +1082,18 @@
             <p:ph type="ftr" sz="quarter" idx="11"/>
           </p:nvPr>
         </p:nvSpPr>
-        <p:spPr bwMode="auto"/>
+        <p:spPr/>
         <p:txBody>
           <a:bodyPr/>
           <a:lstStyle/>
           <a:p>
-            <a:pPr>
-              <a:defRPr/>
-            </a:pPr>
             <a:endParaRPr lang="en-US"/>
           </a:p>
         </p:txBody>
       </p:sp>
       <p:sp>
         <p:nvSpPr>
-          <p:cNvPr id="161309617" name="Slide Number Placeholder 5"/>
+          <p:cNvPr id="6" name="Slide Number Placeholder 5"/>
           <p:cNvSpPr>
             <a:spLocks noGrp="1"/>
           </p:cNvSpPr>
@@ -2614,16 +1101,13 @@
             <p:ph type="sldNum" sz="quarter" idx="12"/>
           </p:nvPr>
         </p:nvSpPr>
-        <p:spPr bwMode="auto"/>
+        <p:spPr/>
         <p:txBody>
           <a:bodyPr/>
           <a:lstStyle/>
           <a:p>
-            <a:pPr>
-              <a:defRPr/>
-            </a:pPr>
             <a:fld id="{C1FF6DA9-008F-8B48-92A6-B652298478BF}" type="slidenum">
-              <a:rPr lang="en-US"/>
+              <a:rPr lang="en-US" smtClean="0"/>
               <a:t>‹#›</a:t>
             </a:fld>
             <a:endParaRPr lang="en-US"/>
@@ -2631,6 +1115,11 @@
         </p:txBody>
       </p:sp>
     </p:spTree>
+    <p:extLst>
+      <p:ext uri="{BB962C8B-B14F-4D97-AF65-F5344CB8AC3E}">
+        <p14:creationId xmlns:p14="http://schemas.microsoft.com/office/powerpoint/2010/main" val="960648375"/>
+      </p:ext>
+    </p:extLst>
   </p:cSld>
   <p:clrMapOvr>
     <a:masterClrMapping/>
@@ -2639,7 +1128,7 @@
 </file>
 
 <file path=ppt/slideLayouts/slideLayout4.xml><?xml version="1.0" encoding="utf-8"?>
-<p:sldLayout xmlns:a="http://schemas.openxmlformats.org/drawingml/2006/main" xmlns:r="http://schemas.openxmlformats.org/officeDocument/2006/relationships" xmlns:p="http://schemas.openxmlformats.org/presentationml/2006/main" xmlns:m="http://schemas.openxmlformats.org/officeDocument/2006/math" xmlns:w="http://schemas.openxmlformats.org/wordprocessingml/2006/main" matchingName="" preserve="1" showMasterPhAnim="0" showMasterSp="1" type="twoObj" userDrawn="1">
+<p:sldLayout xmlns:a="http://schemas.openxmlformats.org/drawingml/2006/main" xmlns:r="http://schemas.openxmlformats.org/officeDocument/2006/relationships" xmlns:p="http://schemas.openxmlformats.org/presentationml/2006/main" type="twoObj" preserve="1">
   <p:cSld name="Two Content">
     <p:spTree>
       <p:nvGrpSpPr>
@@ -2647,7 +1136,7 @@
         <p:cNvGrpSpPr/>
         <p:nvPr/>
       </p:nvGrpSpPr>
-      <p:grpSpPr bwMode="auto">
+      <p:grpSpPr>
         <a:xfrm>
           <a:off x="0" y="0"/>
           <a:ext cx="0" cy="0"/>
@@ -2657,7 +1146,7 @@
       </p:grpSpPr>
       <p:sp>
         <p:nvSpPr>
-          <p:cNvPr id="1387791048" name="Title 1"/>
+          <p:cNvPr id="2" name="Title 1"/>
           <p:cNvSpPr>
             <a:spLocks noGrp="1"/>
           </p:cNvSpPr>
@@ -2665,16 +1154,13 @@
             <p:ph type="title"/>
           </p:nvPr>
         </p:nvSpPr>
-        <p:spPr bwMode="auto"/>
+        <p:spPr/>
         <p:txBody>
           <a:bodyPr/>
           <a:lstStyle/>
           <a:p>
-            <a:pPr>
-              <a:defRPr/>
-            </a:pPr>
-            <a:r>
-              <a:rPr lang="en-US"/>
+            <a:r>
+              <a:rPr lang="en-US" smtClean="0"/>
               <a:t>Click to edit Master title style</a:t>
             </a:r>
             <a:endParaRPr lang="en-US"/>
@@ -2683,7 +1169,7 @@
       </p:sp>
       <p:sp>
         <p:nvSpPr>
-          <p:cNvPr id="1275674907" name="Content Placeholder 2"/>
+          <p:cNvPr id="3" name="Content Placeholder 2"/>
           <p:cNvSpPr>
             <a:spLocks noGrp="1"/>
           </p:cNvSpPr>
@@ -2691,7 +1177,7 @@
             <p:ph sz="half" idx="1"/>
           </p:nvPr>
         </p:nvSpPr>
-        <p:spPr bwMode="auto">
+        <p:spPr>
           <a:xfrm>
             <a:off x="457200" y="1600200"/>
             <a:ext cx="4038600" cy="4525963"/>
@@ -2729,51 +1215,37 @@
             </a:lvl9pPr>
           </a:lstStyle>
           <a:p>
-            <a:pPr lvl="0">
-              <a:defRPr/>
-            </a:pPr>
-            <a:r>
-              <a:rPr lang="en-US"/>
+            <a:pPr lvl="0"/>
+            <a:r>
+              <a:rPr lang="en-US" smtClean="0"/>
               <a:t>Click to edit Master text styles</a:t>
             </a:r>
-            <a:endParaRPr/>
-          </a:p>
-          <a:p>
-            <a:pPr lvl="1">
-              <a:defRPr/>
-            </a:pPr>
-            <a:r>
-              <a:rPr lang="en-US"/>
+          </a:p>
+          <a:p>
+            <a:pPr lvl="1"/>
+            <a:r>
+              <a:rPr lang="en-US" smtClean="0"/>
               <a:t>Second level</a:t>
             </a:r>
-            <a:endParaRPr/>
-          </a:p>
-          <a:p>
-            <a:pPr lvl="2">
-              <a:defRPr/>
-            </a:pPr>
-            <a:r>
-              <a:rPr lang="en-US"/>
+          </a:p>
+          <a:p>
+            <a:pPr lvl="2"/>
+            <a:r>
+              <a:rPr lang="en-US" smtClean="0"/>
               <a:t>Third level</a:t>
             </a:r>
-            <a:endParaRPr/>
-          </a:p>
-          <a:p>
-            <a:pPr lvl="3">
-              <a:defRPr/>
-            </a:pPr>
-            <a:r>
-              <a:rPr lang="en-US"/>
+          </a:p>
+          <a:p>
+            <a:pPr lvl="3"/>
+            <a:r>
+              <a:rPr lang="en-US" smtClean="0"/>
               <a:t>Fourth level</a:t>
             </a:r>
-            <a:endParaRPr/>
-          </a:p>
-          <a:p>
-            <a:pPr lvl="4">
-              <a:defRPr/>
-            </a:pPr>
-            <a:r>
-              <a:rPr lang="en-US"/>
+          </a:p>
+          <a:p>
+            <a:pPr lvl="4"/>
+            <a:r>
+              <a:rPr lang="en-US" smtClean="0"/>
               <a:t>Fifth level</a:t>
             </a:r>
             <a:endParaRPr lang="en-US"/>
@@ -2782,7 +1254,7 @@
       </p:sp>
       <p:sp>
         <p:nvSpPr>
-          <p:cNvPr id="305608510" name="Content Placeholder 3"/>
+          <p:cNvPr id="4" name="Content Placeholder 3"/>
           <p:cNvSpPr>
             <a:spLocks noGrp="1"/>
           </p:cNvSpPr>
@@ -2790,7 +1262,7 @@
             <p:ph sz="half" idx="2"/>
           </p:nvPr>
         </p:nvSpPr>
-        <p:spPr bwMode="auto">
+        <p:spPr>
           <a:xfrm>
             <a:off x="4648200" y="1600200"/>
             <a:ext cx="4038600" cy="4525963"/>
@@ -2828,51 +1300,37 @@
             </a:lvl9pPr>
           </a:lstStyle>
           <a:p>
-            <a:pPr lvl="0">
-              <a:defRPr/>
-            </a:pPr>
-            <a:r>
-              <a:rPr lang="en-US"/>
+            <a:pPr lvl="0"/>
+            <a:r>
+              <a:rPr lang="en-US" smtClean="0"/>
               <a:t>Click to edit Master text styles</a:t>
             </a:r>
-            <a:endParaRPr/>
-          </a:p>
-          <a:p>
-            <a:pPr lvl="1">
-              <a:defRPr/>
-            </a:pPr>
-            <a:r>
-              <a:rPr lang="en-US"/>
+          </a:p>
+          <a:p>
+            <a:pPr lvl="1"/>
+            <a:r>
+              <a:rPr lang="en-US" smtClean="0"/>
               <a:t>Second level</a:t>
             </a:r>
-            <a:endParaRPr/>
-          </a:p>
-          <a:p>
-            <a:pPr lvl="2">
-              <a:defRPr/>
-            </a:pPr>
-            <a:r>
-              <a:rPr lang="en-US"/>
+          </a:p>
+          <a:p>
+            <a:pPr lvl="2"/>
+            <a:r>
+              <a:rPr lang="en-US" smtClean="0"/>
               <a:t>Third level</a:t>
             </a:r>
-            <a:endParaRPr/>
-          </a:p>
-          <a:p>
-            <a:pPr lvl="3">
-              <a:defRPr/>
-            </a:pPr>
-            <a:r>
-              <a:rPr lang="en-US"/>
+          </a:p>
+          <a:p>
+            <a:pPr lvl="3"/>
+            <a:r>
+              <a:rPr lang="en-US" smtClean="0"/>
               <a:t>Fourth level</a:t>
             </a:r>
-            <a:endParaRPr/>
-          </a:p>
-          <a:p>
-            <a:pPr lvl="4">
-              <a:defRPr/>
-            </a:pPr>
-            <a:r>
-              <a:rPr lang="en-US"/>
+          </a:p>
+          <a:p>
+            <a:pPr lvl="4"/>
+            <a:r>
+              <a:rPr lang="en-US" smtClean="0"/>
               <a:t>Fifth level</a:t>
             </a:r>
             <a:endParaRPr lang="en-US"/>
@@ -2881,7 +1339,7 @@
       </p:sp>
       <p:sp>
         <p:nvSpPr>
-          <p:cNvPr id="1530185259" name="Date Placeholder 4"/>
+          <p:cNvPr id="5" name="Date Placeholder 4"/>
           <p:cNvSpPr>
             <a:spLocks noGrp="1"/>
           </p:cNvSpPr>
@@ -2889,16 +1347,13 @@
             <p:ph type="dt" sz="half" idx="10"/>
           </p:nvPr>
         </p:nvSpPr>
-        <p:spPr bwMode="auto"/>
+        <p:spPr/>
         <p:txBody>
           <a:bodyPr/>
           <a:lstStyle/>
           <a:p>
-            <a:pPr>
-              <a:defRPr/>
-            </a:pPr>
             <a:fld id="{5BCAD085-E8A6-8845-BD4E-CB4CCA059FC4}" type="datetimeFigureOut">
-              <a:rPr lang="en-US"/>
+              <a:rPr lang="en-US" smtClean="0"/>
               <a:t>1/27/13</a:t>
             </a:fld>
             <a:endParaRPr lang="en-US"/>
@@ -2907,7 +1362,7 @@
       </p:sp>
       <p:sp>
         <p:nvSpPr>
-          <p:cNvPr id="1226228554" name="Footer Placeholder 5"/>
+          <p:cNvPr id="6" name="Footer Placeholder 5"/>
           <p:cNvSpPr>
             <a:spLocks noGrp="1"/>
           </p:cNvSpPr>
@@ -2915,21 +1370,18 @@
             <p:ph type="ftr" sz="quarter" idx="11"/>
           </p:nvPr>
         </p:nvSpPr>
-        <p:spPr bwMode="auto"/>
+        <p:spPr/>
         <p:txBody>
           <a:bodyPr/>
           <a:lstStyle/>
           <a:p>
-            <a:pPr>
-              <a:defRPr/>
-            </a:pPr>
             <a:endParaRPr lang="en-US"/>
           </a:p>
         </p:txBody>
       </p:sp>
       <p:sp>
         <p:nvSpPr>
-          <p:cNvPr id="309730057" name="Slide Number Placeholder 6"/>
+          <p:cNvPr id="7" name="Slide Number Placeholder 6"/>
           <p:cNvSpPr>
             <a:spLocks noGrp="1"/>
           </p:cNvSpPr>
@@ -2937,16 +1389,13 @@
             <p:ph type="sldNum" sz="quarter" idx="12"/>
           </p:nvPr>
         </p:nvSpPr>
-        <p:spPr bwMode="auto"/>
+        <p:spPr/>
         <p:txBody>
           <a:bodyPr/>
           <a:lstStyle/>
           <a:p>
-            <a:pPr>
-              <a:defRPr/>
-            </a:pPr>
             <a:fld id="{C1FF6DA9-008F-8B48-92A6-B652298478BF}" type="slidenum">
-              <a:rPr lang="en-US"/>
+              <a:rPr lang="en-US" smtClean="0"/>
               <a:t>‹#›</a:t>
             </a:fld>
             <a:endParaRPr lang="en-US"/>
@@ -2954,6 +1403,11 @@
         </p:txBody>
       </p:sp>
     </p:spTree>
+    <p:extLst>
+      <p:ext uri="{BB962C8B-B14F-4D97-AF65-F5344CB8AC3E}">
+        <p14:creationId xmlns:p14="http://schemas.microsoft.com/office/powerpoint/2010/main" val="2782244947"/>
+      </p:ext>
+    </p:extLst>
   </p:cSld>
   <p:clrMapOvr>
     <a:masterClrMapping/>
@@ -2962,7 +1416,7 @@
 </file>
 
 <file path=ppt/slideLayouts/slideLayout5.xml><?xml version="1.0" encoding="utf-8"?>
-<p:sldLayout xmlns:a="http://schemas.openxmlformats.org/drawingml/2006/main" xmlns:r="http://schemas.openxmlformats.org/officeDocument/2006/relationships" xmlns:p="http://schemas.openxmlformats.org/presentationml/2006/main" xmlns:m="http://schemas.openxmlformats.org/officeDocument/2006/math" xmlns:w="http://schemas.openxmlformats.org/wordprocessingml/2006/main" matchingName="" preserve="1" showMasterPhAnim="0" showMasterSp="1" type="twoTxTwoObj" userDrawn="1">
+<p:sldLayout xmlns:a="http://schemas.openxmlformats.org/drawingml/2006/main" xmlns:r="http://schemas.openxmlformats.org/officeDocument/2006/relationships" xmlns:p="http://schemas.openxmlformats.org/presentationml/2006/main" type="twoTxTwoObj" preserve="1">
   <p:cSld name="Comparison">
     <p:spTree>
       <p:nvGrpSpPr>
@@ -2970,7 +1424,7 @@
         <p:cNvGrpSpPr/>
         <p:nvPr/>
       </p:nvGrpSpPr>
-      <p:grpSpPr bwMode="auto">
+      <p:grpSpPr>
         <a:xfrm>
           <a:off x="0" y="0"/>
           <a:ext cx="0" cy="0"/>
@@ -2980,7 +1434,7 @@
       </p:grpSpPr>
       <p:sp>
         <p:nvSpPr>
-          <p:cNvPr id="176503073" name="Title 1"/>
+          <p:cNvPr id="2" name="Title 1"/>
           <p:cNvSpPr>
             <a:spLocks noGrp="1"/>
           </p:cNvSpPr>
@@ -2988,7 +1442,7 @@
             <p:ph type="title"/>
           </p:nvPr>
         </p:nvSpPr>
-        <p:spPr bwMode="auto"/>
+        <p:spPr/>
         <p:txBody>
           <a:bodyPr/>
           <a:lstStyle>
@@ -2997,11 +1451,8 @@
             </a:lvl1pPr>
           </a:lstStyle>
           <a:p>
-            <a:pPr>
-              <a:defRPr/>
-            </a:pPr>
-            <a:r>
-              <a:rPr lang="en-US"/>
+            <a:r>
+              <a:rPr lang="en-US" smtClean="0"/>
               <a:t>Click to edit Master title style</a:t>
             </a:r>
             <a:endParaRPr lang="en-US"/>
@@ -3010,7 +1461,7 @@
       </p:sp>
       <p:sp>
         <p:nvSpPr>
-          <p:cNvPr id="1595045388" name="Text Placeholder 2"/>
+          <p:cNvPr id="3" name="Text Placeholder 2"/>
           <p:cNvSpPr>
             <a:spLocks noGrp="1"/>
           </p:cNvSpPr>
@@ -3018,7 +1469,7 @@
             <p:ph type="body" idx="1"/>
           </p:nvPr>
         </p:nvSpPr>
-        <p:spPr bwMode="auto">
+        <p:spPr>
           <a:xfrm>
             <a:off x="457200" y="1535113"/>
             <a:ext cx="4040188" cy="639762"/>
@@ -3065,20 +1516,17 @@
             </a:lvl9pPr>
           </a:lstStyle>
           <a:p>
-            <a:pPr lvl="0">
-              <a:defRPr/>
-            </a:pPr>
-            <a:r>
-              <a:rPr lang="en-US"/>
+            <a:pPr lvl="0"/>
+            <a:r>
+              <a:rPr lang="en-US" smtClean="0"/>
               <a:t>Click to edit Master text styles</a:t>
             </a:r>
-            <a:endParaRPr/>
-          </a:p>
-        </p:txBody>
-      </p:sp>
-      <p:sp>
-        <p:nvSpPr>
-          <p:cNvPr id="682538907" name="Content Placeholder 3"/>
+          </a:p>
+        </p:txBody>
+      </p:sp>
+      <p:sp>
+        <p:nvSpPr>
+          <p:cNvPr id="4" name="Content Placeholder 3"/>
           <p:cNvSpPr>
             <a:spLocks noGrp="1"/>
           </p:cNvSpPr>
@@ -3086,7 +1534,7 @@
             <p:ph sz="half" idx="2"/>
           </p:nvPr>
         </p:nvSpPr>
-        <p:spPr bwMode="auto">
+        <p:spPr>
           <a:xfrm>
             <a:off x="457200" y="2174875"/>
             <a:ext cx="4040188" cy="3951288"/>
@@ -3124,51 +1572,37 @@
             </a:lvl9pPr>
           </a:lstStyle>
           <a:p>
-            <a:pPr lvl="0">
-              <a:defRPr/>
-            </a:pPr>
-            <a:r>
-              <a:rPr lang="en-US"/>
+            <a:pPr lvl="0"/>
+            <a:r>
+              <a:rPr lang="en-US" smtClean="0"/>
               <a:t>Click to edit Master text styles</a:t>
             </a:r>
-            <a:endParaRPr/>
-          </a:p>
-          <a:p>
-            <a:pPr lvl="1">
-              <a:defRPr/>
-            </a:pPr>
-            <a:r>
-              <a:rPr lang="en-US"/>
+          </a:p>
+          <a:p>
+            <a:pPr lvl="1"/>
+            <a:r>
+              <a:rPr lang="en-US" smtClean="0"/>
               <a:t>Second level</a:t>
             </a:r>
-            <a:endParaRPr/>
-          </a:p>
-          <a:p>
-            <a:pPr lvl="2">
-              <a:defRPr/>
-            </a:pPr>
-            <a:r>
-              <a:rPr lang="en-US"/>
+          </a:p>
+          <a:p>
+            <a:pPr lvl="2"/>
+            <a:r>
+              <a:rPr lang="en-US" smtClean="0"/>
               <a:t>Third level</a:t>
             </a:r>
-            <a:endParaRPr/>
-          </a:p>
-          <a:p>
-            <a:pPr lvl="3">
-              <a:defRPr/>
-            </a:pPr>
-            <a:r>
-              <a:rPr lang="en-US"/>
+          </a:p>
+          <a:p>
+            <a:pPr lvl="3"/>
+            <a:r>
+              <a:rPr lang="en-US" smtClean="0"/>
               <a:t>Fourth level</a:t>
             </a:r>
-            <a:endParaRPr/>
-          </a:p>
-          <a:p>
-            <a:pPr lvl="4">
-              <a:defRPr/>
-            </a:pPr>
-            <a:r>
-              <a:rPr lang="en-US"/>
+          </a:p>
+          <a:p>
+            <a:pPr lvl="4"/>
+            <a:r>
+              <a:rPr lang="en-US" smtClean="0"/>
               <a:t>Fifth level</a:t>
             </a:r>
             <a:endParaRPr lang="en-US"/>
@@ -3177,7 +1611,7 @@
       </p:sp>
       <p:sp>
         <p:nvSpPr>
-          <p:cNvPr id="1477227330" name="Text Placeholder 4"/>
+          <p:cNvPr id="5" name="Text Placeholder 4"/>
           <p:cNvSpPr>
             <a:spLocks noGrp="1"/>
           </p:cNvSpPr>
@@ -3185,7 +1619,7 @@
             <p:ph type="body" sz="quarter" idx="3"/>
           </p:nvPr>
         </p:nvSpPr>
-        <p:spPr bwMode="auto">
+        <p:spPr>
           <a:xfrm>
             <a:off x="4645025" y="1535113"/>
             <a:ext cx="4041775" cy="639762"/>
@@ -3232,20 +1666,17 @@
             </a:lvl9pPr>
           </a:lstStyle>
           <a:p>
-            <a:pPr lvl="0">
-              <a:defRPr/>
-            </a:pPr>
-            <a:r>
-              <a:rPr lang="en-US"/>
+            <a:pPr lvl="0"/>
+            <a:r>
+              <a:rPr lang="en-US" smtClean="0"/>
               <a:t>Click to edit Master text styles</a:t>
             </a:r>
-            <a:endParaRPr/>
-          </a:p>
-        </p:txBody>
-      </p:sp>
-      <p:sp>
-        <p:nvSpPr>
-          <p:cNvPr id="938061543" name="Content Placeholder 5"/>
+          </a:p>
+        </p:txBody>
+      </p:sp>
+      <p:sp>
+        <p:nvSpPr>
+          <p:cNvPr id="6" name="Content Placeholder 5"/>
           <p:cNvSpPr>
             <a:spLocks noGrp="1"/>
           </p:cNvSpPr>
@@ -3253,7 +1684,7 @@
             <p:ph sz="quarter" idx="4"/>
           </p:nvPr>
         </p:nvSpPr>
-        <p:spPr bwMode="auto">
+        <p:spPr>
           <a:xfrm>
             <a:off x="4645025" y="2174875"/>
             <a:ext cx="4041775" cy="3951288"/>
@@ -3291,51 +1722,37 @@
             </a:lvl9pPr>
           </a:lstStyle>
           <a:p>
-            <a:pPr lvl="0">
-              <a:defRPr/>
-            </a:pPr>
-            <a:r>
-              <a:rPr lang="en-US"/>
+            <a:pPr lvl="0"/>
+            <a:r>
+              <a:rPr lang="en-US" smtClean="0"/>
               <a:t>Click to edit Master text styles</a:t>
             </a:r>
-            <a:endParaRPr/>
-          </a:p>
-          <a:p>
-            <a:pPr lvl="1">
-              <a:defRPr/>
-            </a:pPr>
-            <a:r>
-              <a:rPr lang="en-US"/>
+          </a:p>
+          <a:p>
+            <a:pPr lvl="1"/>
+            <a:r>
+              <a:rPr lang="en-US" smtClean="0"/>
               <a:t>Second level</a:t>
             </a:r>
-            <a:endParaRPr/>
-          </a:p>
-          <a:p>
-            <a:pPr lvl="2">
-              <a:defRPr/>
-            </a:pPr>
-            <a:r>
-              <a:rPr lang="en-US"/>
+          </a:p>
+          <a:p>
+            <a:pPr lvl="2"/>
+            <a:r>
+              <a:rPr lang="en-US" smtClean="0"/>
               <a:t>Third level</a:t>
             </a:r>
-            <a:endParaRPr/>
-          </a:p>
-          <a:p>
-            <a:pPr lvl="3">
-              <a:defRPr/>
-            </a:pPr>
-            <a:r>
-              <a:rPr lang="en-US"/>
+          </a:p>
+          <a:p>
+            <a:pPr lvl="3"/>
+            <a:r>
+              <a:rPr lang="en-US" smtClean="0"/>
               <a:t>Fourth level</a:t>
             </a:r>
-            <a:endParaRPr/>
-          </a:p>
-          <a:p>
-            <a:pPr lvl="4">
-              <a:defRPr/>
-            </a:pPr>
-            <a:r>
-              <a:rPr lang="en-US"/>
+          </a:p>
+          <a:p>
+            <a:pPr lvl="4"/>
+            <a:r>
+              <a:rPr lang="en-US" smtClean="0"/>
               <a:t>Fifth level</a:t>
             </a:r>
             <a:endParaRPr lang="en-US"/>
@@ -3344,7 +1761,7 @@
       </p:sp>
       <p:sp>
         <p:nvSpPr>
-          <p:cNvPr id="1425939219" name="Date Placeholder 6"/>
+          <p:cNvPr id="7" name="Date Placeholder 6"/>
           <p:cNvSpPr>
             <a:spLocks noGrp="1"/>
           </p:cNvSpPr>
@@ -3352,16 +1769,13 @@
             <p:ph type="dt" sz="half" idx="10"/>
           </p:nvPr>
         </p:nvSpPr>
-        <p:spPr bwMode="auto"/>
+        <p:spPr/>
         <p:txBody>
           <a:bodyPr/>
           <a:lstStyle/>
           <a:p>
-            <a:pPr>
-              <a:defRPr/>
-            </a:pPr>
             <a:fld id="{5BCAD085-E8A6-8845-BD4E-CB4CCA059FC4}" type="datetimeFigureOut">
-              <a:rPr lang="en-US"/>
+              <a:rPr lang="en-US" smtClean="0"/>
               <a:t>1/27/13</a:t>
             </a:fld>
             <a:endParaRPr lang="en-US"/>
@@ -3370,7 +1784,7 @@
       </p:sp>
       <p:sp>
         <p:nvSpPr>
-          <p:cNvPr id="650845588" name="Footer Placeholder 7"/>
+          <p:cNvPr id="8" name="Footer Placeholder 7"/>
           <p:cNvSpPr>
             <a:spLocks noGrp="1"/>
           </p:cNvSpPr>
@@ -3378,21 +1792,18 @@
             <p:ph type="ftr" sz="quarter" idx="11"/>
           </p:nvPr>
         </p:nvSpPr>
-        <p:spPr bwMode="auto"/>
+        <p:spPr/>
         <p:txBody>
           <a:bodyPr/>
           <a:lstStyle/>
           <a:p>
-            <a:pPr>
-              <a:defRPr/>
-            </a:pPr>
             <a:endParaRPr lang="en-US"/>
           </a:p>
         </p:txBody>
       </p:sp>
       <p:sp>
         <p:nvSpPr>
-          <p:cNvPr id="2098839697" name="Slide Number Placeholder 8"/>
+          <p:cNvPr id="9" name="Slide Number Placeholder 8"/>
           <p:cNvSpPr>
             <a:spLocks noGrp="1"/>
           </p:cNvSpPr>
@@ -3400,16 +1811,13 @@
             <p:ph type="sldNum" sz="quarter" idx="12"/>
           </p:nvPr>
         </p:nvSpPr>
-        <p:spPr bwMode="auto"/>
+        <p:spPr/>
         <p:txBody>
           <a:bodyPr/>
           <a:lstStyle/>
           <a:p>
-            <a:pPr>
-              <a:defRPr/>
-            </a:pPr>
             <a:fld id="{C1FF6DA9-008F-8B48-92A6-B652298478BF}" type="slidenum">
-              <a:rPr lang="en-US"/>
+              <a:rPr lang="en-US" smtClean="0"/>
               <a:t>‹#›</a:t>
             </a:fld>
             <a:endParaRPr lang="en-US"/>
@@ -3417,6 +1825,11 @@
         </p:txBody>
       </p:sp>
     </p:spTree>
+    <p:extLst>
+      <p:ext uri="{BB962C8B-B14F-4D97-AF65-F5344CB8AC3E}">
+        <p14:creationId xmlns:p14="http://schemas.microsoft.com/office/powerpoint/2010/main" val="990158736"/>
+      </p:ext>
+    </p:extLst>
   </p:cSld>
   <p:clrMapOvr>
     <a:masterClrMapping/>
@@ -3425,7 +1838,7 @@
 </file>
 
 <file path=ppt/slideLayouts/slideLayout6.xml><?xml version="1.0" encoding="utf-8"?>
-<p:sldLayout xmlns:a="http://schemas.openxmlformats.org/drawingml/2006/main" xmlns:r="http://schemas.openxmlformats.org/officeDocument/2006/relationships" xmlns:p="http://schemas.openxmlformats.org/presentationml/2006/main" xmlns:m="http://schemas.openxmlformats.org/officeDocument/2006/math" xmlns:w="http://schemas.openxmlformats.org/wordprocessingml/2006/main" matchingName="" preserve="1" showMasterPhAnim="0" showMasterSp="1" type="titleOnly" userDrawn="1">
+<p:sldLayout xmlns:a="http://schemas.openxmlformats.org/drawingml/2006/main" xmlns:r="http://schemas.openxmlformats.org/officeDocument/2006/relationships" xmlns:p="http://schemas.openxmlformats.org/presentationml/2006/main" type="titleOnly" preserve="1">
   <p:cSld name="Title Only">
     <p:spTree>
       <p:nvGrpSpPr>
@@ -3433,7 +1846,7 @@
         <p:cNvGrpSpPr/>
         <p:nvPr/>
       </p:nvGrpSpPr>
-      <p:grpSpPr bwMode="auto">
+      <p:grpSpPr>
         <a:xfrm>
           <a:off x="0" y="0"/>
           <a:ext cx="0" cy="0"/>
@@ -3443,7 +1856,7 @@
       </p:grpSpPr>
       <p:sp>
         <p:nvSpPr>
-          <p:cNvPr id="617169022" name="Title 1"/>
+          <p:cNvPr id="2" name="Title 1"/>
           <p:cNvSpPr>
             <a:spLocks noGrp="1"/>
           </p:cNvSpPr>
@@ -3451,16 +1864,13 @@
             <p:ph type="title"/>
           </p:nvPr>
         </p:nvSpPr>
-        <p:spPr bwMode="auto"/>
+        <p:spPr/>
         <p:txBody>
           <a:bodyPr/>
           <a:lstStyle/>
           <a:p>
-            <a:pPr>
-              <a:defRPr/>
-            </a:pPr>
-            <a:r>
-              <a:rPr lang="en-US"/>
+            <a:r>
+              <a:rPr lang="en-US" smtClean="0"/>
               <a:t>Click to edit Master title style</a:t>
             </a:r>
             <a:endParaRPr lang="en-US"/>
@@ -3469,7 +1879,7 @@
       </p:sp>
       <p:sp>
         <p:nvSpPr>
-          <p:cNvPr id="886056247" name="Date Placeholder 2"/>
+          <p:cNvPr id="3" name="Date Placeholder 2"/>
           <p:cNvSpPr>
             <a:spLocks noGrp="1"/>
           </p:cNvSpPr>
@@ -3477,16 +1887,13 @@
             <p:ph type="dt" sz="half" idx="10"/>
           </p:nvPr>
         </p:nvSpPr>
-        <p:spPr bwMode="auto"/>
+        <p:spPr/>
         <p:txBody>
           <a:bodyPr/>
           <a:lstStyle/>
           <a:p>
-            <a:pPr>
-              <a:defRPr/>
-            </a:pPr>
             <a:fld id="{5BCAD085-E8A6-8845-BD4E-CB4CCA059FC4}" type="datetimeFigureOut">
-              <a:rPr lang="en-US"/>
+              <a:rPr lang="en-US" smtClean="0"/>
               <a:t>1/27/13</a:t>
             </a:fld>
             <a:endParaRPr lang="en-US"/>
@@ -3495,7 +1902,7 @@
       </p:sp>
       <p:sp>
         <p:nvSpPr>
-          <p:cNvPr id="1174484507" name="Footer Placeholder 3"/>
+          <p:cNvPr id="4" name="Footer Placeholder 3"/>
           <p:cNvSpPr>
             <a:spLocks noGrp="1"/>
           </p:cNvSpPr>
@@ -3503,21 +1910,18 @@
             <p:ph type="ftr" sz="quarter" idx="11"/>
           </p:nvPr>
         </p:nvSpPr>
-        <p:spPr bwMode="auto"/>
+        <p:spPr/>
         <p:txBody>
           <a:bodyPr/>
           <a:lstStyle/>
           <a:p>
-            <a:pPr>
-              <a:defRPr/>
-            </a:pPr>
             <a:endParaRPr lang="en-US"/>
           </a:p>
         </p:txBody>
       </p:sp>
       <p:sp>
         <p:nvSpPr>
-          <p:cNvPr id="2070796528" name="Slide Number Placeholder 4"/>
+          <p:cNvPr id="5" name="Slide Number Placeholder 4"/>
           <p:cNvSpPr>
             <a:spLocks noGrp="1"/>
           </p:cNvSpPr>
@@ -3525,16 +1929,13 @@
             <p:ph type="sldNum" sz="quarter" idx="12"/>
           </p:nvPr>
         </p:nvSpPr>
-        <p:spPr bwMode="auto"/>
+        <p:spPr/>
         <p:txBody>
           <a:bodyPr/>
           <a:lstStyle/>
           <a:p>
-            <a:pPr>
-              <a:defRPr/>
-            </a:pPr>
             <a:fld id="{C1FF6DA9-008F-8B48-92A6-B652298478BF}" type="slidenum">
-              <a:rPr lang="en-US"/>
+              <a:rPr lang="en-US" smtClean="0"/>
               <a:t>‹#›</a:t>
             </a:fld>
             <a:endParaRPr lang="en-US"/>
@@ -3542,6 +1943,11 @@
         </p:txBody>
       </p:sp>
     </p:spTree>
+    <p:extLst>
+      <p:ext uri="{BB962C8B-B14F-4D97-AF65-F5344CB8AC3E}">
+        <p14:creationId xmlns:p14="http://schemas.microsoft.com/office/powerpoint/2010/main" val="727027711"/>
+      </p:ext>
+    </p:extLst>
   </p:cSld>
   <p:clrMapOvr>
     <a:masterClrMapping/>
@@ -3550,7 +1956,7 @@
 </file>
 
 <file path=ppt/slideLayouts/slideLayout7.xml><?xml version="1.0" encoding="utf-8"?>
-<p:sldLayout xmlns:a="http://schemas.openxmlformats.org/drawingml/2006/main" xmlns:r="http://schemas.openxmlformats.org/officeDocument/2006/relationships" xmlns:p="http://schemas.openxmlformats.org/presentationml/2006/main" xmlns:m="http://schemas.openxmlformats.org/officeDocument/2006/math" xmlns:w="http://schemas.openxmlformats.org/wordprocessingml/2006/main" matchingName="" preserve="1" showMasterPhAnim="0" showMasterSp="1" type="blank" userDrawn="1">
+<p:sldLayout xmlns:a="http://schemas.openxmlformats.org/drawingml/2006/main" xmlns:r="http://schemas.openxmlformats.org/officeDocument/2006/relationships" xmlns:p="http://schemas.openxmlformats.org/presentationml/2006/main" type="blank" preserve="1">
   <p:cSld name="Blank">
     <p:spTree>
       <p:nvGrpSpPr>
@@ -3558,7 +1964,7 @@
         <p:cNvGrpSpPr/>
         <p:nvPr/>
       </p:nvGrpSpPr>
-      <p:grpSpPr bwMode="auto">
+      <p:grpSpPr>
         <a:xfrm>
           <a:off x="0" y="0"/>
           <a:ext cx="0" cy="0"/>
@@ -3568,7 +1974,7 @@
       </p:grpSpPr>
       <p:sp>
         <p:nvSpPr>
-          <p:cNvPr id="1876799877" name="Date Placeholder 1"/>
+          <p:cNvPr id="2" name="Date Placeholder 1"/>
           <p:cNvSpPr>
             <a:spLocks noGrp="1"/>
           </p:cNvSpPr>
@@ -3576,16 +1982,13 @@
             <p:ph type="dt" sz="half" idx="10"/>
           </p:nvPr>
         </p:nvSpPr>
-        <p:spPr bwMode="auto"/>
+        <p:spPr/>
         <p:txBody>
           <a:bodyPr/>
           <a:lstStyle/>
           <a:p>
-            <a:pPr>
-              <a:defRPr/>
-            </a:pPr>
             <a:fld id="{5BCAD085-E8A6-8845-BD4E-CB4CCA059FC4}" type="datetimeFigureOut">
-              <a:rPr lang="en-US"/>
+              <a:rPr lang="en-US" smtClean="0"/>
               <a:t>1/27/13</a:t>
             </a:fld>
             <a:endParaRPr lang="en-US"/>
@@ -3594,7 +1997,7 @@
       </p:sp>
       <p:sp>
         <p:nvSpPr>
-          <p:cNvPr id="1198965821" name="Footer Placeholder 2"/>
+          <p:cNvPr id="3" name="Footer Placeholder 2"/>
           <p:cNvSpPr>
             <a:spLocks noGrp="1"/>
           </p:cNvSpPr>
@@ -3602,21 +2005,18 @@
             <p:ph type="ftr" sz="quarter" idx="11"/>
           </p:nvPr>
         </p:nvSpPr>
-        <p:spPr bwMode="auto"/>
+        <p:spPr/>
         <p:txBody>
           <a:bodyPr/>
           <a:lstStyle/>
           <a:p>
-            <a:pPr>
-              <a:defRPr/>
-            </a:pPr>
             <a:endParaRPr lang="en-US"/>
           </a:p>
         </p:txBody>
       </p:sp>
       <p:sp>
         <p:nvSpPr>
-          <p:cNvPr id="1249613062" name="Slide Number Placeholder 3"/>
+          <p:cNvPr id="4" name="Slide Number Placeholder 3"/>
           <p:cNvSpPr>
             <a:spLocks noGrp="1"/>
           </p:cNvSpPr>
@@ -3624,16 +2024,13 @@
             <p:ph type="sldNum" sz="quarter" idx="12"/>
           </p:nvPr>
         </p:nvSpPr>
-        <p:spPr bwMode="auto"/>
+        <p:spPr/>
         <p:txBody>
           <a:bodyPr/>
           <a:lstStyle/>
           <a:p>
-            <a:pPr>
-              <a:defRPr/>
-            </a:pPr>
             <a:fld id="{C1FF6DA9-008F-8B48-92A6-B652298478BF}" type="slidenum">
-              <a:rPr lang="en-US"/>
+              <a:rPr lang="en-US" smtClean="0"/>
               <a:t>‹#›</a:t>
             </a:fld>
             <a:endParaRPr lang="en-US"/>
@@ -3641,6 +2038,11 @@
         </p:txBody>
       </p:sp>
     </p:spTree>
+    <p:extLst>
+      <p:ext uri="{BB962C8B-B14F-4D97-AF65-F5344CB8AC3E}">
+        <p14:creationId xmlns:p14="http://schemas.microsoft.com/office/powerpoint/2010/main" val="1212999818"/>
+      </p:ext>
+    </p:extLst>
   </p:cSld>
   <p:clrMapOvr>
     <a:masterClrMapping/>
@@ -3649,7 +2051,7 @@
 </file>
 
 <file path=ppt/slideLayouts/slideLayout8.xml><?xml version="1.0" encoding="utf-8"?>
-<p:sldLayout xmlns:a="http://schemas.openxmlformats.org/drawingml/2006/main" xmlns:r="http://schemas.openxmlformats.org/officeDocument/2006/relationships" xmlns:p="http://schemas.openxmlformats.org/presentationml/2006/main" xmlns:m="http://schemas.openxmlformats.org/officeDocument/2006/math" xmlns:w="http://schemas.openxmlformats.org/wordprocessingml/2006/main" matchingName="" preserve="1" showMasterPhAnim="0" showMasterSp="1" type="objTx" userDrawn="1">
+<p:sldLayout xmlns:a="http://schemas.openxmlformats.org/drawingml/2006/main" xmlns:r="http://schemas.openxmlformats.org/officeDocument/2006/relationships" xmlns:p="http://schemas.openxmlformats.org/presentationml/2006/main" type="objTx" preserve="1">
   <p:cSld name="Content with Caption">
     <p:spTree>
       <p:nvGrpSpPr>
@@ -3657,7 +2059,7 @@
         <p:cNvGrpSpPr/>
         <p:nvPr/>
       </p:nvGrpSpPr>
-      <p:grpSpPr bwMode="auto">
+      <p:grpSpPr>
         <a:xfrm>
           <a:off x="0" y="0"/>
           <a:ext cx="0" cy="0"/>
@@ -3667,7 +2069,7 @@
       </p:grpSpPr>
       <p:sp>
         <p:nvSpPr>
-          <p:cNvPr id="1780940409" name="Title 1"/>
+          <p:cNvPr id="2" name="Title 1"/>
           <p:cNvSpPr>
             <a:spLocks noGrp="1"/>
           </p:cNvSpPr>
@@ -3675,7 +2077,7 @@
             <p:ph type="title"/>
           </p:nvPr>
         </p:nvSpPr>
-        <p:spPr bwMode="auto">
+        <p:spPr>
           <a:xfrm>
             <a:off x="457200" y="273050"/>
             <a:ext cx="3008313" cy="1162050"/>
@@ -3689,11 +2091,8 @@
             </a:lvl1pPr>
           </a:lstStyle>
           <a:p>
-            <a:pPr>
-              <a:defRPr/>
-            </a:pPr>
-            <a:r>
-              <a:rPr lang="en-US"/>
+            <a:r>
+              <a:rPr lang="en-US" smtClean="0"/>
               <a:t>Click to edit Master title style</a:t>
             </a:r>
             <a:endParaRPr lang="en-US"/>
@@ -3702,7 +2101,7 @@
       </p:sp>
       <p:sp>
         <p:nvSpPr>
-          <p:cNvPr id="700346793" name="Content Placeholder 2"/>
+          <p:cNvPr id="3" name="Content Placeholder 2"/>
           <p:cNvSpPr>
             <a:spLocks noGrp="1"/>
           </p:cNvSpPr>
@@ -3710,7 +2109,7 @@
             <p:ph idx="1"/>
           </p:nvPr>
         </p:nvSpPr>
-        <p:spPr bwMode="auto">
+        <p:spPr>
           <a:xfrm>
             <a:off x="3575050" y="273050"/>
             <a:ext cx="5111750" cy="5853113"/>
@@ -3748,51 +2147,37 @@
             </a:lvl9pPr>
           </a:lstStyle>
           <a:p>
-            <a:pPr lvl="0">
-              <a:defRPr/>
-            </a:pPr>
-            <a:r>
-              <a:rPr lang="en-US"/>
+            <a:pPr lvl="0"/>
+            <a:r>
+              <a:rPr lang="en-US" smtClean="0"/>
               <a:t>Click to edit Master text styles</a:t>
             </a:r>
-            <a:endParaRPr/>
-          </a:p>
-          <a:p>
-            <a:pPr lvl="1">
-              <a:defRPr/>
-            </a:pPr>
-            <a:r>
-              <a:rPr lang="en-US"/>
+          </a:p>
+          <a:p>
+            <a:pPr lvl="1"/>
+            <a:r>
+              <a:rPr lang="en-US" smtClean="0"/>
               <a:t>Second level</a:t>
             </a:r>
-            <a:endParaRPr/>
-          </a:p>
-          <a:p>
-            <a:pPr lvl="2">
-              <a:defRPr/>
-            </a:pPr>
-            <a:r>
-              <a:rPr lang="en-US"/>
+          </a:p>
+          <a:p>
+            <a:pPr lvl="2"/>
+            <a:r>
+              <a:rPr lang="en-US" smtClean="0"/>
               <a:t>Third level</a:t>
             </a:r>
-            <a:endParaRPr/>
-          </a:p>
-          <a:p>
-            <a:pPr lvl="3">
-              <a:defRPr/>
-            </a:pPr>
-            <a:r>
-              <a:rPr lang="en-US"/>
+          </a:p>
+          <a:p>
+            <a:pPr lvl="3"/>
+            <a:r>
+              <a:rPr lang="en-US" smtClean="0"/>
               <a:t>Fourth level</a:t>
             </a:r>
-            <a:endParaRPr/>
-          </a:p>
-          <a:p>
-            <a:pPr lvl="4">
-              <a:defRPr/>
-            </a:pPr>
-            <a:r>
-              <a:rPr lang="en-US"/>
+          </a:p>
+          <a:p>
+            <a:pPr lvl="4"/>
+            <a:r>
+              <a:rPr lang="en-US" smtClean="0"/>
               <a:t>Fifth level</a:t>
             </a:r>
             <a:endParaRPr lang="en-US"/>
@@ -3801,7 +2186,7 @@
       </p:sp>
       <p:sp>
         <p:nvSpPr>
-          <p:cNvPr id="601379387" name="Text Placeholder 3"/>
+          <p:cNvPr id="4" name="Text Placeholder 3"/>
           <p:cNvSpPr>
             <a:spLocks noGrp="1"/>
           </p:cNvSpPr>
@@ -3809,7 +2194,7 @@
             <p:ph type="body" sz="half" idx="2"/>
           </p:nvPr>
         </p:nvSpPr>
-        <p:spPr bwMode="auto">
+        <p:spPr>
           <a:xfrm>
             <a:off x="457200" y="1435100"/>
             <a:ext cx="3008313" cy="4691063"/>
@@ -3856,20 +2241,17 @@
             </a:lvl9pPr>
           </a:lstStyle>
           <a:p>
-            <a:pPr lvl="0">
-              <a:defRPr/>
-            </a:pPr>
-            <a:r>
-              <a:rPr lang="en-US"/>
+            <a:pPr lvl="0"/>
+            <a:r>
+              <a:rPr lang="en-US" smtClean="0"/>
               <a:t>Click to edit Master text styles</a:t>
             </a:r>
-            <a:endParaRPr/>
-          </a:p>
-        </p:txBody>
-      </p:sp>
-      <p:sp>
-        <p:nvSpPr>
-          <p:cNvPr id="1642535643" name="Date Placeholder 4"/>
+          </a:p>
+        </p:txBody>
+      </p:sp>
+      <p:sp>
+        <p:nvSpPr>
+          <p:cNvPr id="5" name="Date Placeholder 4"/>
           <p:cNvSpPr>
             <a:spLocks noGrp="1"/>
           </p:cNvSpPr>
@@ -3877,16 +2259,13 @@
             <p:ph type="dt" sz="half" idx="10"/>
           </p:nvPr>
         </p:nvSpPr>
-        <p:spPr bwMode="auto"/>
+        <p:spPr/>
         <p:txBody>
           <a:bodyPr/>
           <a:lstStyle/>
           <a:p>
-            <a:pPr>
-              <a:defRPr/>
-            </a:pPr>
             <a:fld id="{5BCAD085-E8A6-8845-BD4E-CB4CCA059FC4}" type="datetimeFigureOut">
-              <a:rPr lang="en-US"/>
+              <a:rPr lang="en-US" smtClean="0"/>
               <a:t>1/27/13</a:t>
             </a:fld>
             <a:endParaRPr lang="en-US"/>
@@ -3895,7 +2274,7 @@
       </p:sp>
       <p:sp>
         <p:nvSpPr>
-          <p:cNvPr id="538490046" name="Footer Placeholder 5"/>
+          <p:cNvPr id="6" name="Footer Placeholder 5"/>
           <p:cNvSpPr>
             <a:spLocks noGrp="1"/>
           </p:cNvSpPr>
@@ -3903,21 +2282,18 @@
             <p:ph type="ftr" sz="quarter" idx="11"/>
           </p:nvPr>
         </p:nvSpPr>
-        <p:spPr bwMode="auto"/>
+        <p:spPr/>
         <p:txBody>
           <a:bodyPr/>
           <a:lstStyle/>
           <a:p>
-            <a:pPr>
-              <a:defRPr/>
-            </a:pPr>
             <a:endParaRPr lang="en-US"/>
           </a:p>
         </p:txBody>
       </p:sp>
       <p:sp>
         <p:nvSpPr>
-          <p:cNvPr id="2040703063" name="Slide Number Placeholder 6"/>
+          <p:cNvPr id="7" name="Slide Number Placeholder 6"/>
           <p:cNvSpPr>
             <a:spLocks noGrp="1"/>
           </p:cNvSpPr>
@@ -3925,16 +2301,13 @@
             <p:ph type="sldNum" sz="quarter" idx="12"/>
           </p:nvPr>
         </p:nvSpPr>
-        <p:spPr bwMode="auto"/>
+        <p:spPr/>
         <p:txBody>
           <a:bodyPr/>
           <a:lstStyle/>
           <a:p>
-            <a:pPr>
-              <a:defRPr/>
-            </a:pPr>
             <a:fld id="{C1FF6DA9-008F-8B48-92A6-B652298478BF}" type="slidenum">
-              <a:rPr lang="en-US"/>
+              <a:rPr lang="en-US" smtClean="0"/>
               <a:t>‹#›</a:t>
             </a:fld>
             <a:endParaRPr lang="en-US"/>
@@ -3942,6 +2315,11 @@
         </p:txBody>
       </p:sp>
     </p:spTree>
+    <p:extLst>
+      <p:ext uri="{BB962C8B-B14F-4D97-AF65-F5344CB8AC3E}">
+        <p14:creationId xmlns:p14="http://schemas.microsoft.com/office/powerpoint/2010/main" val="1840726560"/>
+      </p:ext>
+    </p:extLst>
   </p:cSld>
   <p:clrMapOvr>
     <a:masterClrMapping/>
@@ -3950,7 +2328,7 @@
 </file>
 
 <file path=ppt/slideLayouts/slideLayout9.xml><?xml version="1.0" encoding="utf-8"?>
-<p:sldLayout xmlns:a="http://schemas.openxmlformats.org/drawingml/2006/main" xmlns:r="http://schemas.openxmlformats.org/officeDocument/2006/relationships" xmlns:p="http://schemas.openxmlformats.org/presentationml/2006/main" xmlns:m="http://schemas.openxmlformats.org/officeDocument/2006/math" xmlns:w="http://schemas.openxmlformats.org/wordprocessingml/2006/main" matchingName="" preserve="1" showMasterPhAnim="0" showMasterSp="1" type="picTx" userDrawn="1">
+<p:sldLayout xmlns:a="http://schemas.openxmlformats.org/drawingml/2006/main" xmlns:r="http://schemas.openxmlformats.org/officeDocument/2006/relationships" xmlns:p="http://schemas.openxmlformats.org/presentationml/2006/main" type="picTx" preserve="1">
   <p:cSld name="Picture with Caption">
     <p:spTree>
       <p:nvGrpSpPr>
@@ -3958,7 +2336,7 @@
         <p:cNvGrpSpPr/>
         <p:nvPr/>
       </p:nvGrpSpPr>
-      <p:grpSpPr bwMode="auto">
+      <p:grpSpPr>
         <a:xfrm>
           <a:off x="0" y="0"/>
           <a:ext cx="0" cy="0"/>
@@ -3968,7 +2346,7 @@
       </p:grpSpPr>
       <p:sp>
         <p:nvSpPr>
-          <p:cNvPr id="860579066" name="Title 1"/>
+          <p:cNvPr id="2" name="Title 1"/>
           <p:cNvSpPr>
             <a:spLocks noGrp="1"/>
           </p:cNvSpPr>
@@ -3976,7 +2354,7 @@
             <p:ph type="title"/>
           </p:nvPr>
         </p:nvSpPr>
-        <p:spPr bwMode="auto">
+        <p:spPr>
           <a:xfrm>
             <a:off x="1792288" y="4800600"/>
             <a:ext cx="5486400" cy="566738"/>
@@ -3990,11 +2368,8 @@
             </a:lvl1pPr>
           </a:lstStyle>
           <a:p>
-            <a:pPr>
-              <a:defRPr/>
-            </a:pPr>
-            <a:r>
-              <a:rPr lang="en-US"/>
+            <a:r>
+              <a:rPr lang="en-US" smtClean="0"/>
               <a:t>Click to edit Master title style</a:t>
             </a:r>
             <a:endParaRPr lang="en-US"/>
@@ -4003,7 +2378,7 @@
       </p:sp>
       <p:sp>
         <p:nvSpPr>
-          <p:cNvPr id="616240422" name="Picture Placeholder 2"/>
+          <p:cNvPr id="3" name="Picture Placeholder 2"/>
           <p:cNvSpPr>
             <a:spLocks noGrp="1"/>
           </p:cNvSpPr>
@@ -4011,7 +2386,7 @@
             <p:ph type="pic" idx="1"/>
           </p:nvPr>
         </p:nvSpPr>
-        <p:spPr bwMode="auto">
+        <p:spPr>
           <a:xfrm>
             <a:off x="1792288" y="612775"/>
             <a:ext cx="5486400" cy="4114800"/>
@@ -4058,16 +2433,13 @@
             </a:lvl9pPr>
           </a:lstStyle>
           <a:p>
-            <a:pPr>
-              <a:defRPr/>
-            </a:pPr>
             <a:endParaRPr lang="en-US"/>
           </a:p>
         </p:txBody>
       </p:sp>
       <p:sp>
         <p:nvSpPr>
-          <p:cNvPr id="1478720074" name="Text Placeholder 3"/>
+          <p:cNvPr id="4" name="Text Placeholder 3"/>
           <p:cNvSpPr>
             <a:spLocks noGrp="1"/>
           </p:cNvSpPr>
@@ -4075,7 +2447,7 @@
             <p:ph type="body" sz="half" idx="2"/>
           </p:nvPr>
         </p:nvSpPr>
-        <p:spPr bwMode="auto">
+        <p:spPr>
           <a:xfrm>
             <a:off x="1792288" y="5367338"/>
             <a:ext cx="5486400" cy="804862"/>
@@ -4122,20 +2494,17 @@
             </a:lvl9pPr>
           </a:lstStyle>
           <a:p>
-            <a:pPr lvl="0">
-              <a:defRPr/>
-            </a:pPr>
-            <a:r>
-              <a:rPr lang="en-US"/>
+            <a:pPr lvl="0"/>
+            <a:r>
+              <a:rPr lang="en-US" smtClean="0"/>
               <a:t>Click to edit Master text styles</a:t>
             </a:r>
-            <a:endParaRPr/>
-          </a:p>
-        </p:txBody>
-      </p:sp>
-      <p:sp>
-        <p:nvSpPr>
-          <p:cNvPr id="506860276" name="Date Placeholder 4"/>
+          </a:p>
+        </p:txBody>
+      </p:sp>
+      <p:sp>
+        <p:nvSpPr>
+          <p:cNvPr id="5" name="Date Placeholder 4"/>
           <p:cNvSpPr>
             <a:spLocks noGrp="1"/>
           </p:cNvSpPr>
@@ -4143,16 +2512,13 @@
             <p:ph type="dt" sz="half" idx="10"/>
           </p:nvPr>
         </p:nvSpPr>
-        <p:spPr bwMode="auto"/>
+        <p:spPr/>
         <p:txBody>
           <a:bodyPr/>
           <a:lstStyle/>
           <a:p>
-            <a:pPr>
-              <a:defRPr/>
-            </a:pPr>
             <a:fld id="{5BCAD085-E8A6-8845-BD4E-CB4CCA059FC4}" type="datetimeFigureOut">
-              <a:rPr lang="en-US"/>
+              <a:rPr lang="en-US" smtClean="0"/>
               <a:t>1/27/13</a:t>
             </a:fld>
             <a:endParaRPr lang="en-US"/>
@@ -4161,7 +2527,7 @@
       </p:sp>
       <p:sp>
         <p:nvSpPr>
-          <p:cNvPr id="887150661" name="Footer Placeholder 5"/>
+          <p:cNvPr id="6" name="Footer Placeholder 5"/>
           <p:cNvSpPr>
             <a:spLocks noGrp="1"/>
           </p:cNvSpPr>
@@ -4169,21 +2535,18 @@
             <p:ph type="ftr" sz="quarter" idx="11"/>
           </p:nvPr>
         </p:nvSpPr>
-        <p:spPr bwMode="auto"/>
+        <p:spPr/>
         <p:txBody>
           <a:bodyPr/>
           <a:lstStyle/>
           <a:p>
-            <a:pPr>
-              <a:defRPr/>
-            </a:pPr>
             <a:endParaRPr lang="en-US"/>
           </a:p>
         </p:txBody>
       </p:sp>
       <p:sp>
         <p:nvSpPr>
-          <p:cNvPr id="310833462" name="Slide Number Placeholder 6"/>
+          <p:cNvPr id="7" name="Slide Number Placeholder 6"/>
           <p:cNvSpPr>
             <a:spLocks noGrp="1"/>
           </p:cNvSpPr>
@@ -4191,16 +2554,13 @@
             <p:ph type="sldNum" sz="quarter" idx="12"/>
           </p:nvPr>
         </p:nvSpPr>
-        <p:spPr bwMode="auto"/>
+        <p:spPr/>
         <p:txBody>
           <a:bodyPr/>
           <a:lstStyle/>
           <a:p>
-            <a:pPr>
-              <a:defRPr/>
-            </a:pPr>
             <a:fld id="{C1FF6DA9-008F-8B48-92A6-B652298478BF}" type="slidenum">
-              <a:rPr lang="en-US"/>
+              <a:rPr lang="en-US" smtClean="0"/>
               <a:t>‹#›</a:t>
             </a:fld>
             <a:endParaRPr lang="en-US"/>
@@ -4208,6 +2568,11 @@
         </p:txBody>
       </p:sp>
     </p:spTree>
+    <p:extLst>
+      <p:ext uri="{BB962C8B-B14F-4D97-AF65-F5344CB8AC3E}">
+        <p14:creationId xmlns:p14="http://schemas.microsoft.com/office/powerpoint/2010/main" val="3889236939"/>
+      </p:ext>
+    </p:extLst>
   </p:cSld>
   <p:clrMapOvr>
     <a:masterClrMapping/>
@@ -4216,8 +2581,8 @@
 </file>
 
 <file path=ppt/slideMasters/slideMaster1.xml><?xml version="1.0" encoding="utf-8"?>
-<p:sldMaster xmlns:a="http://schemas.openxmlformats.org/drawingml/2006/main" xmlns:r="http://schemas.openxmlformats.org/officeDocument/2006/relationships" xmlns:p="http://schemas.openxmlformats.org/presentationml/2006/main" xmlns:m="http://schemas.openxmlformats.org/officeDocument/2006/math" xmlns:w="http://schemas.openxmlformats.org/wordprocessingml/2006/main" preserve="0">
-  <p:cSld name="">
+<p:sldMaster xmlns:a="http://schemas.openxmlformats.org/drawingml/2006/main" xmlns:r="http://schemas.openxmlformats.org/officeDocument/2006/relationships" xmlns:p="http://schemas.openxmlformats.org/presentationml/2006/main">
+  <p:cSld>
     <p:bg>
       <p:bgRef idx="1001">
         <a:schemeClr val="bg1"/>
@@ -4229,7 +2594,7 @@
         <p:cNvGrpSpPr/>
         <p:nvPr/>
       </p:nvGrpSpPr>
-      <p:grpSpPr bwMode="auto">
+      <p:grpSpPr>
         <a:xfrm>
           <a:off x="0" y="0"/>
           <a:ext cx="0" cy="0"/>
@@ -4239,7 +2604,7 @@
       </p:grpSpPr>
       <p:sp>
         <p:nvSpPr>
-          <p:cNvPr id="357167046" name="Title Placeholder 1"/>
+          <p:cNvPr id="2" name="Title Placeholder 1"/>
           <p:cNvSpPr>
             <a:spLocks noGrp="1"/>
           </p:cNvSpPr>
@@ -4247,7 +2612,7 @@
             <p:ph type="title"/>
           </p:nvPr>
         </p:nvSpPr>
-        <p:spPr bwMode="auto">
+        <p:spPr>
           <a:xfrm>
             <a:off x="457200" y="274638"/>
             <a:ext cx="8229600" cy="1143000"/>
@@ -4262,11 +2627,8 @@
           </a:bodyPr>
           <a:lstStyle/>
           <a:p>
-            <a:pPr>
-              <a:defRPr/>
-            </a:pPr>
-            <a:r>
-              <a:rPr lang="en-US"/>
+            <a:r>
+              <a:rPr lang="en-US" smtClean="0"/>
               <a:t>Click to edit Master title style</a:t>
             </a:r>
             <a:endParaRPr lang="en-US"/>
@@ -4275,7 +2637,7 @@
       </p:sp>
       <p:sp>
         <p:nvSpPr>
-          <p:cNvPr id="2127485249" name="Text Placeholder 2"/>
+          <p:cNvPr id="3" name="Text Placeholder 2"/>
           <p:cNvSpPr>
             <a:spLocks noGrp="1"/>
           </p:cNvSpPr>
@@ -4283,7 +2645,7 @@
             <p:ph type="body" idx="1"/>
           </p:nvPr>
         </p:nvSpPr>
-        <p:spPr bwMode="auto">
+        <p:spPr>
           <a:xfrm>
             <a:off x="457200" y="1600200"/>
             <a:ext cx="8229600" cy="4525963"/>
@@ -4298,51 +2660,37 @@
           </a:bodyPr>
           <a:lstStyle/>
           <a:p>
-            <a:pPr lvl="0">
-              <a:defRPr/>
-            </a:pPr>
-            <a:r>
-              <a:rPr lang="en-US"/>
+            <a:pPr lvl="0"/>
+            <a:r>
+              <a:rPr lang="en-US" smtClean="0"/>
               <a:t>Click to edit Master text styles</a:t>
             </a:r>
-            <a:endParaRPr/>
-          </a:p>
-          <a:p>
-            <a:pPr lvl="1">
-              <a:defRPr/>
-            </a:pPr>
-            <a:r>
-              <a:rPr lang="en-US"/>
+          </a:p>
+          <a:p>
+            <a:pPr lvl="1"/>
+            <a:r>
+              <a:rPr lang="en-US" smtClean="0"/>
               <a:t>Second level</a:t>
             </a:r>
-            <a:endParaRPr/>
-          </a:p>
-          <a:p>
-            <a:pPr lvl="2">
-              <a:defRPr/>
-            </a:pPr>
-            <a:r>
-              <a:rPr lang="en-US"/>
+          </a:p>
+          <a:p>
+            <a:pPr lvl="2"/>
+            <a:r>
+              <a:rPr lang="en-US" smtClean="0"/>
               <a:t>Third level</a:t>
             </a:r>
-            <a:endParaRPr/>
-          </a:p>
-          <a:p>
-            <a:pPr lvl="3">
-              <a:defRPr/>
-            </a:pPr>
-            <a:r>
-              <a:rPr lang="en-US"/>
+          </a:p>
+          <a:p>
+            <a:pPr lvl="3"/>
+            <a:r>
+              <a:rPr lang="en-US" smtClean="0"/>
               <a:t>Fourth level</a:t>
             </a:r>
-            <a:endParaRPr/>
-          </a:p>
-          <a:p>
-            <a:pPr lvl="4">
-              <a:defRPr/>
-            </a:pPr>
-            <a:r>
-              <a:rPr lang="en-US"/>
+          </a:p>
+          <a:p>
+            <a:pPr lvl="4"/>
+            <a:r>
+              <a:rPr lang="en-US" smtClean="0"/>
               <a:t>Fifth level</a:t>
             </a:r>
             <a:endParaRPr lang="en-US"/>
@@ -4351,7 +2699,7 @@
       </p:sp>
       <p:sp>
         <p:nvSpPr>
-          <p:cNvPr id="678611734" name="Date Placeholder 3"/>
+          <p:cNvPr id="4" name="Date Placeholder 3"/>
           <p:cNvSpPr>
             <a:spLocks noGrp="1"/>
           </p:cNvSpPr>
@@ -4359,7 +2707,7 @@
             <p:ph type="dt" sz="half" idx="2"/>
           </p:nvPr>
         </p:nvSpPr>
-        <p:spPr bwMode="auto">
+        <p:spPr>
           <a:xfrm>
             <a:off x="457200" y="6356350"/>
             <a:ext cx="2133600" cy="365125"/>
@@ -4382,11 +2730,8 @@
             </a:lvl1pPr>
           </a:lstStyle>
           <a:p>
-            <a:pPr>
-              <a:defRPr/>
-            </a:pPr>
             <a:fld id="{5BCAD085-E8A6-8845-BD4E-CB4CCA059FC4}" type="datetimeFigureOut">
-              <a:rPr lang="en-US"/>
+              <a:rPr lang="en-US" smtClean="0"/>
               <a:t>1/27/13</a:t>
             </a:fld>
             <a:endParaRPr lang="en-US"/>
@@ -4395,7 +2740,7 @@
       </p:sp>
       <p:sp>
         <p:nvSpPr>
-          <p:cNvPr id="408753658" name="Footer Placeholder 4"/>
+          <p:cNvPr id="5" name="Footer Placeholder 4"/>
           <p:cNvSpPr>
             <a:spLocks noGrp="1"/>
           </p:cNvSpPr>
@@ -4403,7 +2748,7 @@
             <p:ph type="ftr" sz="quarter" idx="3"/>
           </p:nvPr>
         </p:nvSpPr>
-        <p:spPr bwMode="auto">
+        <p:spPr>
           <a:xfrm>
             <a:off x="3124200" y="6356350"/>
             <a:ext cx="2895600" cy="365125"/>
@@ -4426,16 +2771,13 @@
             </a:lvl1pPr>
           </a:lstStyle>
           <a:p>
-            <a:pPr>
-              <a:defRPr/>
-            </a:pPr>
             <a:endParaRPr lang="en-US"/>
           </a:p>
         </p:txBody>
       </p:sp>
       <p:sp>
         <p:nvSpPr>
-          <p:cNvPr id="1007700609" name="Slide Number Placeholder 5"/>
+          <p:cNvPr id="6" name="Slide Number Placeholder 5"/>
           <p:cNvSpPr>
             <a:spLocks noGrp="1"/>
           </p:cNvSpPr>
@@ -4443,7 +2785,7 @@
             <p:ph type="sldNum" sz="quarter" idx="4"/>
           </p:nvPr>
         </p:nvSpPr>
-        <p:spPr bwMode="auto">
+        <p:spPr>
           <a:xfrm>
             <a:off x="6553200" y="6356350"/>
             <a:ext cx="2133600" cy="365125"/>
@@ -4466,11 +2808,8 @@
             </a:lvl1pPr>
           </a:lstStyle>
           <a:p>
-            <a:pPr>
-              <a:defRPr/>
-            </a:pPr>
             <a:fld id="{C1FF6DA9-008F-8B48-92A6-B652298478BF}" type="slidenum">
-              <a:rPr lang="en-US"/>
+              <a:rPr lang="en-US" smtClean="0"/>
               <a:t>‹#›</a:t>
             </a:fld>
             <a:endParaRPr lang="en-US"/>
@@ -4478,6 +2817,11 @@
         </p:txBody>
       </p:sp>
     </p:spTree>
+    <p:extLst>
+      <p:ext uri="{BB962C8B-B14F-4D97-AF65-F5344CB8AC3E}">
+        <p14:creationId xmlns:p14="http://schemas.microsoft.com/office/powerpoint/2010/main" val="2209977519"/>
+      </p:ext>
+    </p:extLst>
   </p:cSld>
   <p:clrMap bg1="lt1" tx1="dk1" bg2="lt2" tx2="dk2" accent1="accent1" accent2="accent2" accent3="accent3" accent4="accent4" accent5="accent5" accent6="accent6" hlink="hlink" folHlink="folHlink"/>
   <p:sldLayoutIdLst>
@@ -4495,12 +2839,12 @@
   </p:sldLayoutIdLst>
   <p:txStyles>
     <p:titleStyle>
-      <a:lvl1pPr algn="ctr" defTabSz="457200" rtl="0">
+      <a:lvl1pPr algn="ctr" defTabSz="457200" rtl="0" eaLnBrk="1" latinLnBrk="0" hangingPunct="1">
         <a:spcBef>
-          <a:spcPts val="0"/>
+          <a:spcPct val="0"/>
         </a:spcBef>
         <a:buNone/>
-        <a:defRPr sz="4400">
+        <a:defRPr sz="4400" kern="1200">
           <a:solidFill>
             <a:schemeClr val="tx1"/>
           </a:solidFill>
@@ -4511,13 +2855,13 @@
       </a:lvl1pPr>
     </p:titleStyle>
     <p:bodyStyle>
-      <a:lvl1pPr marL="342900" indent="-342900" algn="l" defTabSz="457200" rtl="0">
+      <a:lvl1pPr marL="342900" indent="-342900" algn="l" defTabSz="457200" rtl="0" eaLnBrk="1" latinLnBrk="0" hangingPunct="1">
         <a:spcBef>
-          <a:spcPts val="0"/>
+          <a:spcPct val="20000"/>
         </a:spcBef>
         <a:buFont typeface="Arial"/>
         <a:buChar char="•"/>
-        <a:defRPr sz="3200">
+        <a:defRPr sz="3200" kern="1200">
           <a:solidFill>
             <a:schemeClr val="tx1"/>
           </a:solidFill>
@@ -4526,13 +2870,13 @@
           <a:cs typeface="+mn-cs"/>
         </a:defRPr>
       </a:lvl1pPr>
-      <a:lvl2pPr marL="742950" indent="-285750" algn="l" defTabSz="457200" rtl="0">
+      <a:lvl2pPr marL="742950" indent="-285750" algn="l" defTabSz="457200" rtl="0" eaLnBrk="1" latinLnBrk="0" hangingPunct="1">
         <a:spcBef>
-          <a:spcPts val="0"/>
+          <a:spcPct val="20000"/>
         </a:spcBef>
         <a:buFont typeface="Arial"/>
         <a:buChar char="–"/>
-        <a:defRPr sz="2800">
+        <a:defRPr sz="2800" kern="1200">
           <a:solidFill>
             <a:schemeClr val="tx1"/>
           </a:solidFill>
@@ -4541,13 +2885,13 @@
           <a:cs typeface="+mn-cs"/>
         </a:defRPr>
       </a:lvl2pPr>
-      <a:lvl3pPr marL="1143000" indent="-228600" algn="l" defTabSz="457200" rtl="0">
+      <a:lvl3pPr marL="1143000" indent="-228600" algn="l" defTabSz="457200" rtl="0" eaLnBrk="1" latinLnBrk="0" hangingPunct="1">
         <a:spcBef>
-          <a:spcPts val="0"/>
+          <a:spcPct val="20000"/>
         </a:spcBef>
         <a:buFont typeface="Arial"/>
         <a:buChar char="•"/>
-        <a:defRPr sz="2400">
+        <a:defRPr sz="2400" kern="1200">
           <a:solidFill>
             <a:schemeClr val="tx1"/>
           </a:solidFill>
@@ -4556,13 +2900,13 @@
           <a:cs typeface="+mn-cs"/>
         </a:defRPr>
       </a:lvl3pPr>
-      <a:lvl4pPr marL="1600200" indent="-228600" algn="l" defTabSz="457200" rtl="0">
+      <a:lvl4pPr marL="1600200" indent="-228600" algn="l" defTabSz="457200" rtl="0" eaLnBrk="1" latinLnBrk="0" hangingPunct="1">
         <a:spcBef>
-          <a:spcPts val="0"/>
+          <a:spcPct val="20000"/>
         </a:spcBef>
         <a:buFont typeface="Arial"/>
         <a:buChar char="–"/>
-        <a:defRPr sz="2000">
+        <a:defRPr sz="2000" kern="1200">
           <a:solidFill>
             <a:schemeClr val="tx1"/>
           </a:solidFill>
@@ -4571,13 +2915,13 @@
           <a:cs typeface="+mn-cs"/>
         </a:defRPr>
       </a:lvl4pPr>
-      <a:lvl5pPr marL="2057400" indent="-228600" algn="l" defTabSz="457200" rtl="0">
+      <a:lvl5pPr marL="2057400" indent="-228600" algn="l" defTabSz="457200" rtl="0" eaLnBrk="1" latinLnBrk="0" hangingPunct="1">
         <a:spcBef>
-          <a:spcPts val="0"/>
+          <a:spcPct val="20000"/>
         </a:spcBef>
         <a:buFont typeface="Arial"/>
         <a:buChar char="»"/>
-        <a:defRPr sz="2000">
+        <a:defRPr sz="2000" kern="1200">
           <a:solidFill>
             <a:schemeClr val="tx1"/>
           </a:solidFill>
@@ -4586,13 +2930,13 @@
           <a:cs typeface="+mn-cs"/>
         </a:defRPr>
       </a:lvl5pPr>
-      <a:lvl6pPr marL="2514600" indent="-228600" algn="l" defTabSz="457200" rtl="0">
+      <a:lvl6pPr marL="2514600" indent="-228600" algn="l" defTabSz="457200" rtl="0" eaLnBrk="1" latinLnBrk="0" hangingPunct="1">
         <a:spcBef>
-          <a:spcPts val="0"/>
+          <a:spcPct val="20000"/>
         </a:spcBef>
         <a:buFont typeface="Arial"/>
         <a:buChar char="•"/>
-        <a:defRPr sz="2000">
+        <a:defRPr sz="2000" kern="1200">
           <a:solidFill>
             <a:schemeClr val="tx1"/>
           </a:solidFill>
@@ -4601,13 +2945,13 @@
           <a:cs typeface="+mn-cs"/>
         </a:defRPr>
       </a:lvl6pPr>
-      <a:lvl7pPr marL="2971800" indent="-228600" algn="l" defTabSz="457200" rtl="0">
+      <a:lvl7pPr marL="2971800" indent="-228600" algn="l" defTabSz="457200" rtl="0" eaLnBrk="1" latinLnBrk="0" hangingPunct="1">
         <a:spcBef>
-          <a:spcPts val="0"/>
+          <a:spcPct val="20000"/>
         </a:spcBef>
         <a:buFont typeface="Arial"/>
         <a:buChar char="•"/>
-        <a:defRPr sz="2000">
+        <a:defRPr sz="2000" kern="1200">
           <a:solidFill>
             <a:schemeClr val="tx1"/>
           </a:solidFill>
@@ -4616,13 +2960,13 @@
           <a:cs typeface="+mn-cs"/>
         </a:defRPr>
       </a:lvl7pPr>
-      <a:lvl8pPr marL="3429000" indent="-228600" algn="l" defTabSz="457200" rtl="0">
+      <a:lvl8pPr marL="3429000" indent="-228600" algn="l" defTabSz="457200" rtl="0" eaLnBrk="1" latinLnBrk="0" hangingPunct="1">
         <a:spcBef>
-          <a:spcPts val="0"/>
+          <a:spcPct val="20000"/>
         </a:spcBef>
         <a:buFont typeface="Arial"/>
         <a:buChar char="•"/>
-        <a:defRPr sz="2000">
+        <a:defRPr sz="2000" kern="1200">
           <a:solidFill>
             <a:schemeClr val="tx1"/>
           </a:solidFill>
@@ -4631,13 +2975,13 @@
           <a:cs typeface="+mn-cs"/>
         </a:defRPr>
       </a:lvl8pPr>
-      <a:lvl9pPr marL="3886200" indent="-228600" algn="l" defTabSz="457200" rtl="0">
+      <a:lvl9pPr marL="3886200" indent="-228600" algn="l" defTabSz="457200" rtl="0" eaLnBrk="1" latinLnBrk="0" hangingPunct="1">
         <a:spcBef>
-          <a:spcPts val="0"/>
+          <a:spcPct val="20000"/>
         </a:spcBef>
         <a:buFont typeface="Arial"/>
         <a:buChar char="•"/>
-        <a:defRPr sz="2000">
+        <a:defRPr sz="2000" kern="1200">
           <a:solidFill>
             <a:schemeClr val="tx1"/>
           </a:solidFill>
@@ -4651,8 +2995,8 @@
       <a:defPPr>
         <a:defRPr lang="en-US"/>
       </a:defPPr>
-      <a:lvl1pPr marL="0" algn="l" defTabSz="457200" rtl="0">
-        <a:defRPr sz="1800">
+      <a:lvl1pPr marL="0" algn="l" defTabSz="457200" rtl="0" eaLnBrk="1" latinLnBrk="0" hangingPunct="1">
+        <a:defRPr sz="1800" kern="1200">
           <a:solidFill>
             <a:schemeClr val="tx1"/>
           </a:solidFill>
@@ -4661,8 +3005,8 @@
           <a:cs typeface="+mn-cs"/>
         </a:defRPr>
       </a:lvl1pPr>
-      <a:lvl2pPr marL="457200" algn="l" defTabSz="457200" rtl="0">
-        <a:defRPr sz="1800">
+      <a:lvl2pPr marL="457200" algn="l" defTabSz="457200" rtl="0" eaLnBrk="1" latinLnBrk="0" hangingPunct="1">
+        <a:defRPr sz="1800" kern="1200">
           <a:solidFill>
             <a:schemeClr val="tx1"/>
           </a:solidFill>
@@ -4671,8 +3015,8 @@
           <a:cs typeface="+mn-cs"/>
         </a:defRPr>
       </a:lvl2pPr>
-      <a:lvl3pPr marL="914400" algn="l" defTabSz="457200" rtl="0">
-        <a:defRPr sz="1800">
+      <a:lvl3pPr marL="914400" algn="l" defTabSz="457200" rtl="0" eaLnBrk="1" latinLnBrk="0" hangingPunct="1">
+        <a:defRPr sz="1800" kern="1200">
           <a:solidFill>
             <a:schemeClr val="tx1"/>
           </a:solidFill>
@@ -4681,8 +3025,8 @@
           <a:cs typeface="+mn-cs"/>
         </a:defRPr>
       </a:lvl3pPr>
-      <a:lvl4pPr marL="1371600" algn="l" defTabSz="457200" rtl="0">
-        <a:defRPr sz="1800">
+      <a:lvl4pPr marL="1371600" algn="l" defTabSz="457200" rtl="0" eaLnBrk="1" latinLnBrk="0" hangingPunct="1">
+        <a:defRPr sz="1800" kern="1200">
           <a:solidFill>
             <a:schemeClr val="tx1"/>
           </a:solidFill>
@@ -4691,8 +3035,8 @@
           <a:cs typeface="+mn-cs"/>
         </a:defRPr>
       </a:lvl4pPr>
-      <a:lvl5pPr marL="1828800" algn="l" defTabSz="457200" rtl="0">
-        <a:defRPr sz="1800">
+      <a:lvl5pPr marL="1828800" algn="l" defTabSz="457200" rtl="0" eaLnBrk="1" latinLnBrk="0" hangingPunct="1">
+        <a:defRPr sz="1800" kern="1200">
           <a:solidFill>
             <a:schemeClr val="tx1"/>
           </a:solidFill>
@@ -4701,8 +3045,8 @@
           <a:cs typeface="+mn-cs"/>
         </a:defRPr>
       </a:lvl5pPr>
-      <a:lvl6pPr marL="2286000" algn="l" defTabSz="457200" rtl="0">
-        <a:defRPr sz="1800">
+      <a:lvl6pPr marL="2286000" algn="l" defTabSz="457200" rtl="0" eaLnBrk="1" latinLnBrk="0" hangingPunct="1">
+        <a:defRPr sz="1800" kern="1200">
           <a:solidFill>
             <a:schemeClr val="tx1"/>
           </a:solidFill>
@@ -4711,8 +3055,8 @@
           <a:cs typeface="+mn-cs"/>
         </a:defRPr>
       </a:lvl6pPr>
-      <a:lvl7pPr marL="2743200" algn="l" defTabSz="457200" rtl="0">
-        <a:defRPr sz="1800">
+      <a:lvl7pPr marL="2743200" algn="l" defTabSz="457200" rtl="0" eaLnBrk="1" latinLnBrk="0" hangingPunct="1">
+        <a:defRPr sz="1800" kern="1200">
           <a:solidFill>
             <a:schemeClr val="tx1"/>
           </a:solidFill>
@@ -4721,8 +3065,8 @@
           <a:cs typeface="+mn-cs"/>
         </a:defRPr>
       </a:lvl7pPr>
-      <a:lvl8pPr marL="3200400" algn="l" defTabSz="457200" rtl="0">
-        <a:defRPr sz="1800">
+      <a:lvl8pPr marL="3200400" algn="l" defTabSz="457200" rtl="0" eaLnBrk="1" latinLnBrk="0" hangingPunct="1">
+        <a:defRPr sz="1800" kern="1200">
           <a:solidFill>
             <a:schemeClr val="tx1"/>
           </a:solidFill>
@@ -4731,8 +3075,8 @@
           <a:cs typeface="+mn-cs"/>
         </a:defRPr>
       </a:lvl8pPr>
-      <a:lvl9pPr marL="3657600" algn="l" defTabSz="457200" rtl="0">
-        <a:defRPr sz="1800">
+      <a:lvl9pPr marL="3657600" algn="l" defTabSz="457200" rtl="0" eaLnBrk="1" latinLnBrk="0" hangingPunct="1">
+        <a:defRPr sz="1800" kern="1200">
           <a:solidFill>
             <a:schemeClr val="tx1"/>
           </a:solidFill>
@@ -4747,29 +3091,22 @@
 </file>
 
 <file path=ppt/slides/slide1.xml><?xml version="1.0" encoding="utf-8"?>
-<p:sld xmlns:a="http://schemas.openxmlformats.org/drawingml/2006/main" xmlns:r="http://schemas.openxmlformats.org/officeDocument/2006/relationships" xmlns:p="http://schemas.openxmlformats.org/presentationml/2006/main" xmlns:m="http://schemas.openxmlformats.org/officeDocument/2006/math" xmlns:w="http://schemas.openxmlformats.org/wordprocessingml/2006/main" xmlns:mc="http://schemas.openxmlformats.org/markup-compatibility/2006" showMasterPhAnim="0" showMasterSp="1" show="1">
-  <p:cSld name="">
+<p:sld xmlns:a="http://schemas.openxmlformats.org/drawingml/2006/main" xmlns:p="http://schemas.openxmlformats.org/presentationml/2006/main" xmlns:r="http://schemas.openxmlformats.org/officeDocument/2006/relationships">
+  <p:cSld>
     <p:spTree>
       <p:nvGrpSpPr>
         <p:cNvPr id="1" name=""/>
         <p:cNvGrpSpPr/>
         <p:nvPr/>
       </p:nvGrpSpPr>
-      <p:grpSpPr bwMode="auto">
-        <a:xfrm>
-          <a:off x="0" y="0"/>
-          <a:ext cx="0" cy="0"/>
-          <a:chOff x="0" y="0"/>
-          <a:chExt cx="0" cy="0"/>
-        </a:xfrm>
-      </p:grpSpPr>
-      <p:sp>
-        <p:nvSpPr>
-          <p:cNvPr id="941848007" name="TextBox 1"/>
+      <p:grpSpPr/>
+      <p:sp>
+        <p:nvSpPr>
+          <p:cNvPr id="2" name="TextBox 1"/>
           <p:cNvSpPr txBox="1"/>
           <p:nvPr/>
         </p:nvSpPr>
-        <p:spPr bwMode="auto">
+        <p:spPr>
           <a:xfrm>
             <a:off x="822960" y="2286000"/>
             <a:ext cx="10607040" cy="2194560"/>
@@ -4789,7 +3126,6 @@
               <a:spcAft>
                 <a:spcPts val="200"/>
               </a:spcAft>
-              <a:defRPr/>
             </a:pPr>
             <a:r>
               <a:rPr sz="3100" b="1">
@@ -4799,14 +3135,12 @@
               </a:rPr>
               <a:t>What five QUIC implementations actually do</a:t>
             </a:r>
-            <a:endParaRPr/>
           </a:p>
           <a:p>
             <a:pPr algn="l">
               <a:spcAft>
                 <a:spcPts val="1600"/>
               </a:spcAft>
-              <a:defRPr/>
             </a:pPr>
             <a:r>
               <a:rPr sz="3100" b="1">
@@ -4816,14 +3150,12 @@
               </a:rPr>
               <a:t>when your phone changes network</a:t>
             </a:r>
-            <a:endParaRPr/>
           </a:p>
           <a:p>
             <a:pPr algn="l">
               <a:spcAft>
                 <a:spcPts val="1000"/>
               </a:spcAft>
-              <a:defRPr/>
             </a:pPr>
             <a:r>
               <a:rPr sz="1700" b="0">
@@ -4833,17 +3165,16 @@
               </a:rPr>
               <a:t>Phase 2 review — the cross-implementation survey</a:t>
             </a:r>
-            <a:endParaRPr/>
-          </a:p>
-        </p:txBody>
-      </p:sp>
-      <p:sp>
-        <p:nvSpPr>
-          <p:cNvPr id="1634722292" name="TextBox 2"/>
+          </a:p>
+        </p:txBody>
+      </p:sp>
+      <p:sp>
+        <p:nvSpPr>
+          <p:cNvPr id="3" name="TextBox 2"/>
           <p:cNvSpPr txBox="1"/>
           <p:nvPr/>
         </p:nvSpPr>
-        <p:spPr bwMode="auto">
+        <p:spPr>
           <a:xfrm>
             <a:off x="822960" y="5120640"/>
             <a:ext cx="10607040" cy="914400"/>
@@ -4863,7 +3194,6 @@
               <a:spcAft>
                 <a:spcPts val="1000"/>
               </a:spcAft>
-              <a:defRPr/>
             </a:pPr>
             <a:r>
               <a:rPr sz="1300" b="0">
@@ -4873,14 +3203,12 @@
               </a:rPr>
               <a:t>Capstone research · Computer Networks</a:t>
             </a:r>
-            <a:endParaRPr/>
           </a:p>
           <a:p>
             <a:pPr algn="l">
               <a:spcAft>
                 <a:spcPts val="1000"/>
               </a:spcAft>
-              <a:defRPr/>
             </a:pPr>
             <a:r>
               <a:rPr sz="1300" b="0">
@@ -4890,7 +3218,6 @@
               </a:rPr>
               <a:t>sivaahari · cb.sc.u4cys24055@cb.students.amrita.edu</a:t>
             </a:r>
-            <a:endParaRPr/>
           </a:p>
         </p:txBody>
       </p:sp>
@@ -4899,41 +3226,26 @@
   <p:clrMapOvr>
     <a:masterClrMapping/>
   </p:clrMapOvr>
-  <mc:AlternateContent xmlns:mc="http://schemas.openxmlformats.org/markup-compatibility/2006">
-    <mc:Choice xmlns:p159="http://schemas.microsoft.com/office/powerpoint/2015/09/main" xmlns:p14="http://schemas.microsoft.com/office/powerpoint/2010/main" Requires="p159">
-      <p:transition p14:dur="500" advClick="1"/>
-    </mc:Choice>
-    <mc:Fallback>
-      <p:transition advClick="1"/>
-    </mc:Fallback>
-  </mc:AlternateContent>
 </p:sld>
 </file>
 
 <file path=ppt/slides/slide10.xml><?xml version="1.0" encoding="utf-8"?>
-<p:sld xmlns:a="http://schemas.openxmlformats.org/drawingml/2006/main" xmlns:r="http://schemas.openxmlformats.org/officeDocument/2006/relationships" xmlns:p="http://schemas.openxmlformats.org/presentationml/2006/main" xmlns:m="http://schemas.openxmlformats.org/officeDocument/2006/math" xmlns:w="http://schemas.openxmlformats.org/wordprocessingml/2006/main" xmlns:mc="http://schemas.openxmlformats.org/markup-compatibility/2006" showMasterPhAnim="0" showMasterSp="1" show="1">
-  <p:cSld name="">
+<p:sld xmlns:a="http://schemas.openxmlformats.org/drawingml/2006/main" xmlns:p="http://schemas.openxmlformats.org/presentationml/2006/main" xmlns:r="http://schemas.openxmlformats.org/officeDocument/2006/relationships">
+  <p:cSld>
     <p:spTree>
       <p:nvGrpSpPr>
         <p:cNvPr id="1" name=""/>
         <p:cNvGrpSpPr/>
         <p:nvPr/>
       </p:nvGrpSpPr>
-      <p:grpSpPr bwMode="auto">
-        <a:xfrm>
-          <a:off x="0" y="0"/>
-          <a:ext cx="0" cy="0"/>
-          <a:chOff x="0" y="0"/>
-          <a:chExt cx="0" cy="0"/>
-        </a:xfrm>
-      </p:grpSpPr>
-      <p:sp>
-        <p:nvSpPr>
-          <p:cNvPr id="21482576" name="TextBox 1"/>
+      <p:grpSpPr/>
+      <p:sp>
+        <p:nvSpPr>
+          <p:cNvPr id="2" name="TextBox 1"/>
           <p:cNvSpPr txBox="1"/>
           <p:nvPr/>
         </p:nvSpPr>
-        <p:spPr bwMode="auto">
+        <p:spPr>
           <a:xfrm>
             <a:off x="685800" y="365760"/>
             <a:ext cx="10972800" cy="329184"/>
@@ -4953,7 +3265,6 @@
               <a:spcAft>
                 <a:spcPts val="1000"/>
               </a:spcAft>
-              <a:defRPr/>
             </a:pPr>
             <a:r>
               <a:rPr sz="1250" b="1">
@@ -4963,20 +3274,19 @@
               </a:rPr>
               <a:t>THE EVIDENCE</a:t>
             </a:r>
-            <a:endParaRPr/>
-          </a:p>
-        </p:txBody>
-      </p:sp>
-      <p:sp>
-        <p:nvSpPr>
-          <p:cNvPr id="496070168" name="TextBox 2"/>
+          </a:p>
+        </p:txBody>
+      </p:sp>
+      <p:sp>
+        <p:nvSpPr>
+          <p:cNvPr id="3" name="TextBox 2"/>
           <p:cNvSpPr txBox="1"/>
           <p:nvPr/>
         </p:nvSpPr>
-        <p:spPr bwMode="auto">
-          <a:xfrm flipH="0" flipV="0">
-            <a:off x="685800" y="822959"/>
-            <a:ext cx="6119651" cy="488039"/>
+        <p:spPr>
+          <a:xfrm>
+            <a:off x="685800" y="713232"/>
+            <a:ext cx="10972800" cy="960120"/>
           </a:xfrm>
           <a:prstGeom prst="rect">
             <a:avLst/>
@@ -4993,7 +3303,6 @@
               <a:spcAft>
                 <a:spcPts val="1000"/>
               </a:spcAft>
-              <a:defRPr/>
             </a:pPr>
             <a:r>
               <a:rPr sz="2600" b="1">
@@ -5003,26 +3312,27 @@
               </a:rPr>
               <a:t>What the measurements actually look like.</a:t>
             </a:r>
-            <a:endParaRPr/>
           </a:p>
         </p:txBody>
       </p:sp>
       <p:pic>
         <p:nvPicPr>
-          <p:cNvPr id="1494556619" name="Picture 3" descr="p2_fig4_cwnd_evidence.png"/>
+          <p:cNvPr id="4" name="Picture 3" descr="p2_fig4_cwnd_evidence.png"/>
           <p:cNvPicPr>
             <a:picLocks noChangeAspect="1"/>
           </p:cNvPicPr>
           <p:nvPr/>
         </p:nvPicPr>
-        <p:blipFill rotWithShape="1">
-          <a:blip r:embed="rId3"/>
-          <a:stretch/>
+        <p:blipFill>
+          <a:blip r:embed="rId2"/>
+          <a:stretch>
+            <a:fillRect/>
+          </a:stretch>
         </p:blipFill>
-        <p:spPr bwMode="auto">
-          <a:xfrm>
-            <a:off x="1829860" y="1783080"/>
-            <a:ext cx="8501798" cy="4398264"/>
+        <p:spPr>
+          <a:xfrm>
+            <a:off x="1641687" y="1783080"/>
+            <a:ext cx="8878145" cy="4398264"/>
           </a:xfrm>
           <a:prstGeom prst="rect">
             <a:avLst/>
@@ -5031,11 +3341,11 @@
       </p:pic>
       <p:sp>
         <p:nvSpPr>
-          <p:cNvPr id="1074554025" name="TextBox 4"/>
+          <p:cNvPr id="5" name="TextBox 4"/>
           <p:cNvSpPr txBox="1"/>
           <p:nvPr/>
         </p:nvSpPr>
-        <p:spPr bwMode="auto">
+        <p:spPr>
           <a:xfrm>
             <a:off x="685800" y="6291072"/>
             <a:ext cx="10972800" cy="411480"/>
@@ -5055,7 +3365,6 @@
               <a:spcAft>
                 <a:spcPts val="1000"/>
               </a:spcAft>
-              <a:defRPr/>
             </a:pPr>
             <a:r>
               <a:rPr sz="1050" b="0">
@@ -5065,7 +3374,6 @@
               </a:rPr>
               <a:t>Each implementation's own initial window is the dashed line. A drop to exactly that value can only be a reset — we checked each one's loss arithmetic to be sure an ordinary loss event could not produce the same number.</a:t>
             </a:r>
-            <a:endParaRPr/>
           </a:p>
         </p:txBody>
       </p:sp>
@@ -5074,41 +3382,26 @@
   <p:clrMapOvr>
     <a:masterClrMapping/>
   </p:clrMapOvr>
-  <mc:AlternateContent xmlns:mc="http://schemas.openxmlformats.org/markup-compatibility/2006">
-    <mc:Choice xmlns:p159="http://schemas.microsoft.com/office/powerpoint/2015/09/main" xmlns:p14="http://schemas.microsoft.com/office/powerpoint/2010/main" Requires="p159">
-      <p:transition p14:dur="500" advClick="1"/>
-    </mc:Choice>
-    <mc:Fallback>
-      <p:transition advClick="1"/>
-    </mc:Fallback>
-  </mc:AlternateContent>
 </p:sld>
 </file>
 
 <file path=ppt/slides/slide11.xml><?xml version="1.0" encoding="utf-8"?>
-<p:sld xmlns:a="http://schemas.openxmlformats.org/drawingml/2006/main" xmlns:r="http://schemas.openxmlformats.org/officeDocument/2006/relationships" xmlns:p="http://schemas.openxmlformats.org/presentationml/2006/main" xmlns:m="http://schemas.openxmlformats.org/officeDocument/2006/math" xmlns:w="http://schemas.openxmlformats.org/wordprocessingml/2006/main" xmlns:mc="http://schemas.openxmlformats.org/markup-compatibility/2006" showMasterPhAnim="0" showMasterSp="1" show="1">
-  <p:cSld name="">
+<p:sld xmlns:a="http://schemas.openxmlformats.org/drawingml/2006/main" xmlns:p="http://schemas.openxmlformats.org/presentationml/2006/main" xmlns:r="http://schemas.openxmlformats.org/officeDocument/2006/relationships">
+  <p:cSld>
     <p:spTree>
       <p:nvGrpSpPr>
         <p:cNvPr id="1" name=""/>
         <p:cNvGrpSpPr/>
         <p:nvPr/>
       </p:nvGrpSpPr>
-      <p:grpSpPr bwMode="auto">
-        <a:xfrm>
-          <a:off x="0" y="0"/>
-          <a:ext cx="0" cy="0"/>
-          <a:chOff x="0" y="0"/>
-          <a:chExt cx="0" cy="0"/>
-        </a:xfrm>
-      </p:grpSpPr>
-      <p:sp>
-        <p:nvSpPr>
-          <p:cNvPr id="452866583" name="TextBox 1"/>
+      <p:grpSpPr/>
+      <p:sp>
+        <p:nvSpPr>
+          <p:cNvPr id="2" name="TextBox 1"/>
           <p:cNvSpPr txBox="1"/>
           <p:nvPr/>
         </p:nvSpPr>
-        <p:spPr bwMode="auto">
+        <p:spPr>
           <a:xfrm>
             <a:off x="685800" y="365760"/>
             <a:ext cx="10972800" cy="329184"/>
@@ -5128,7 +3421,6 @@
               <a:spcAft>
                 <a:spcPts val="1000"/>
               </a:spcAft>
-              <a:defRPr/>
             </a:pPr>
             <a:r>
               <a:rPr sz="1250" b="1">
@@ -5138,20 +3430,19 @@
               </a:rPr>
               <a:t>METHOD</a:t>
             </a:r>
-            <a:endParaRPr/>
-          </a:p>
-        </p:txBody>
-      </p:sp>
-      <p:sp>
-        <p:nvSpPr>
-          <p:cNvPr id="2080638208" name="TextBox 2"/>
+          </a:p>
+        </p:txBody>
+      </p:sp>
+      <p:sp>
+        <p:nvSpPr>
+          <p:cNvPr id="3" name="TextBox 2"/>
           <p:cNvSpPr txBox="1"/>
           <p:nvPr/>
         </p:nvSpPr>
-        <p:spPr bwMode="auto">
-          <a:xfrm flipH="0" flipV="0">
-            <a:off x="685800" y="938963"/>
-            <a:ext cx="6652598" cy="488039"/>
+        <p:spPr>
+          <a:xfrm>
+            <a:off x="685800" y="713232"/>
+            <a:ext cx="10972800" cy="960120"/>
           </a:xfrm>
           <a:prstGeom prst="rect">
             <a:avLst/>
@@ -5168,7 +3459,6 @@
               <a:spcAft>
                 <a:spcPts val="1000"/>
               </a:spcAft>
-              <a:defRPr/>
             </a:pPr>
             <a:r>
               <a:rPr sz="2600" b="1">
@@ -5178,17 +3468,16 @@
               </a:rPr>
               <a:t>How we know we are not fooling ourselves.</a:t>
             </a:r>
-            <a:endParaRPr/>
-          </a:p>
-        </p:txBody>
-      </p:sp>
-      <p:sp>
-        <p:nvSpPr>
-          <p:cNvPr id="1203466620" name="TextBox 3"/>
+          </a:p>
+        </p:txBody>
+      </p:sp>
+      <p:sp>
+        <p:nvSpPr>
+          <p:cNvPr id="4" name="TextBox 3"/>
           <p:cNvSpPr txBox="1"/>
           <p:nvPr/>
         </p:nvSpPr>
-        <p:spPr bwMode="auto">
+        <p:spPr>
           <a:xfrm>
             <a:off x="777240" y="1965960"/>
             <a:ext cx="10789920" cy="4023360"/>
@@ -5208,7 +3497,6 @@
               <a:spcAft>
                 <a:spcPts val="1400"/>
               </a:spcAft>
-              <a:defRPr/>
             </a:pPr>
             <a:r>
               <a:rPr sz="1800" b="0">
@@ -5218,14 +3506,12 @@
               </a:rPr>
               <a:t>Every claim was answered twice — from source and from measurement — and they had to agree.</a:t>
             </a:r>
-            <a:endParaRPr/>
           </a:p>
           <a:p>
             <a:pPr algn="l">
               <a:spcAft>
                 <a:spcPts val="1400"/>
               </a:spcAft>
-              <a:defRPr/>
             </a:pPr>
             <a:r>
               <a:rPr sz="1700" b="0">
@@ -5233,16 +3519,14 @@
                   <a:srgbClr val="1A1A1A"/>
                 </a:solidFill>
               </a:rPr>
-              <a:t>Before trusting any drop in the send rate, we looked up each implementation's initial window, its loss floor, and its loss reduction factor, and confirmed the number we saw could only be a reset. In one case that revealed a loss event and a reset happening 0.4 milliseconds apart, where we would otherwise have reported one.</a:t>
-            </a:r>
-            <a:endParaRPr/>
+              <a:t>Before trusting any drop in the send rate, we looked up each implementation's initial window, its loss floor, and its loss reduction factor, and confirmed the number we saw could only be a reset. In quic-go that revealed TWO events where we would have reported one — in 5/5 runs an ordinary loss backoff to exactly 0.7× the peak, then the real reset 0.44–1.96 milliseconds later.</a:t>
+            </a:r>
           </a:p>
           <a:p>
             <a:pPr algn="l">
               <a:spcAft>
                 <a:spcPts val="1400"/>
               </a:spcAft>
-              <a:defRPr/>
             </a:pPr>
             <a:r>
               <a:rPr sz="1700" b="0">
@@ -5250,16 +3534,14 @@
                   <a:srgbClr val="1A1A1A"/>
                 </a:solidFill>
               </a:rPr>
-              <a:t>Then we wrote a second validator from scratch, sharing no code with the first, which re-derives every claim from git object storage and raw traces. 27 checks, 27 pass.</a:t>
-            </a:r>
-            <a:endParaRPr/>
+              <a:t>Then we wrote a second validator from scratch, sharing no code with the first, which re-derives every claim from git object storage and raw traces. 30 checks, 30 pass.</a:t>
+            </a:r>
           </a:p>
           <a:p>
             <a:pPr algn="l">
               <a:spcAft>
                 <a:spcPts val="1000"/>
               </a:spcAft>
-              <a:defRPr/>
             </a:pPr>
             <a:r>
               <a:rPr sz="1700" b="1">
@@ -5267,9 +3549,8 @@
                   <a:srgbClr val="4C72B0"/>
                 </a:solidFill>
               </a:rPr>
-              <a:t>It found four things we had got wrong along the way — a window described as flat when it had declined, a repetition count of four that was really three, a piece of live evidence too weak to carry its claim, and a cause we had asserted without proof. All four are corrected and recorded.</a:t>
-            </a:r>
-            <a:endParaRPr/>
+              <a:t>It found seven things we had got wrong along the way — a window described as flat when it had declined, a repetition count of four that was really three, a path delay recorded as sixty milliseconds that was really forty, and — the one that stings — a verdict line in our own parser that would have called a loss event a reset. All seven are corrected and recorded.</a:t>
+            </a:r>
           </a:p>
         </p:txBody>
       </p:sp>
@@ -5278,41 +3559,26 @@
   <p:clrMapOvr>
     <a:masterClrMapping/>
   </p:clrMapOvr>
-  <mc:AlternateContent xmlns:mc="http://schemas.openxmlformats.org/markup-compatibility/2006">
-    <mc:Choice xmlns:p159="http://schemas.microsoft.com/office/powerpoint/2015/09/main" xmlns:p14="http://schemas.microsoft.com/office/powerpoint/2010/main" Requires="p159">
-      <p:transition p14:dur="500" advClick="1"/>
-    </mc:Choice>
-    <mc:Fallback>
-      <p:transition advClick="1"/>
-    </mc:Fallback>
-  </mc:AlternateContent>
 </p:sld>
 </file>
 
 <file path=ppt/slides/slide12.xml><?xml version="1.0" encoding="utf-8"?>
-<p:sld xmlns:a="http://schemas.openxmlformats.org/drawingml/2006/main" xmlns:r="http://schemas.openxmlformats.org/officeDocument/2006/relationships" xmlns:p="http://schemas.openxmlformats.org/presentationml/2006/main" xmlns:m="http://schemas.openxmlformats.org/officeDocument/2006/math" xmlns:w="http://schemas.openxmlformats.org/wordprocessingml/2006/main" xmlns:mc="http://schemas.openxmlformats.org/markup-compatibility/2006" showMasterPhAnim="0" showMasterSp="1" show="1">
-  <p:cSld name="">
+<p:sld xmlns:a="http://schemas.openxmlformats.org/drawingml/2006/main" xmlns:p="http://schemas.openxmlformats.org/presentationml/2006/main" xmlns:r="http://schemas.openxmlformats.org/officeDocument/2006/relationships">
+  <p:cSld>
     <p:spTree>
       <p:nvGrpSpPr>
         <p:cNvPr id="1" name=""/>
         <p:cNvGrpSpPr/>
         <p:nvPr/>
       </p:nvGrpSpPr>
-      <p:grpSpPr bwMode="auto">
-        <a:xfrm>
-          <a:off x="0" y="0"/>
-          <a:ext cx="0" cy="0"/>
-          <a:chOff x="0" y="0"/>
-          <a:chExt cx="0" cy="0"/>
-        </a:xfrm>
-      </p:grpSpPr>
-      <p:sp>
-        <p:nvSpPr>
-          <p:cNvPr id="1619293130" name="TextBox 1"/>
+      <p:grpSpPr/>
+      <p:sp>
+        <p:nvSpPr>
+          <p:cNvPr id="2" name="TextBox 1"/>
           <p:cNvSpPr txBox="1"/>
           <p:nvPr/>
         </p:nvSpPr>
-        <p:spPr bwMode="auto">
+        <p:spPr>
           <a:xfrm>
             <a:off x="685800" y="365760"/>
             <a:ext cx="10972800" cy="329184"/>
@@ -5332,7 +3598,6 @@
               <a:spcAft>
                 <a:spcPts val="1000"/>
               </a:spcAft>
-              <a:defRPr/>
             </a:pPr>
             <a:r>
               <a:rPr sz="1250" b="1">
@@ -5342,19 +3607,18 @@
               </a:rPr>
               <a:t>HONESTY</a:t>
             </a:r>
-            <a:endParaRPr/>
-          </a:p>
-        </p:txBody>
-      </p:sp>
-      <p:sp>
-        <p:nvSpPr>
-          <p:cNvPr id="1175161350" name="TextBox 2"/>
+          </a:p>
+        </p:txBody>
+      </p:sp>
+      <p:sp>
+        <p:nvSpPr>
+          <p:cNvPr id="3" name="TextBox 2"/>
           <p:cNvSpPr txBox="1"/>
           <p:nvPr/>
         </p:nvSpPr>
-        <p:spPr bwMode="auto">
-          <a:xfrm>
-            <a:off x="685800" y="951356"/>
+        <p:spPr>
+          <a:xfrm>
+            <a:off x="685800" y="713232"/>
             <a:ext cx="10972800" cy="960120"/>
           </a:xfrm>
           <a:prstGeom prst="rect">
@@ -5372,7 +3636,6 @@
               <a:spcAft>
                 <a:spcPts val="1000"/>
               </a:spcAft>
-              <a:defRPr/>
             </a:pPr>
             <a:r>
               <a:rPr sz="2600" b="1">
@@ -5382,17 +3645,16 @@
               </a:rPr>
               <a:t>What we are deliberately not claiming.</a:t>
             </a:r>
-            <a:endParaRPr/>
-          </a:p>
-        </p:txBody>
-      </p:sp>
-      <p:sp>
-        <p:nvSpPr>
-          <p:cNvPr id="1588175109" name="TextBox 3"/>
+          </a:p>
+        </p:txBody>
+      </p:sp>
+      <p:sp>
+        <p:nvSpPr>
+          <p:cNvPr id="4" name="TextBox 3"/>
           <p:cNvSpPr txBox="1"/>
           <p:nvPr/>
         </p:nvSpPr>
-        <p:spPr bwMode="auto">
+        <p:spPr>
           <a:xfrm>
             <a:off x="777240" y="1965960"/>
             <a:ext cx="10789920" cy="4023360"/>
@@ -5408,13 +3670,12 @@
           </a:bodyPr>
           <a:lstStyle/>
           <a:p>
-            <a:pPr marL="274320" indent="-274320" algn="l">
+            <a:pPr algn="l" marL="274320" indent="-274320">
               <a:spcAft>
                 <a:spcPts val="1400"/>
               </a:spcAft>
               <a:buFont typeface="Arial"/>
               <a:buChar char="•"/>
-              <a:defRPr/>
             </a:pPr>
             <a:r>
               <a:rPr sz="1700" b="0">
@@ -5424,16 +3685,14 @@
               </a:rPr>
               <a:t>We have not shown that any of this harms real users. We measured what implementations do, and what it costs in our testbed.</a:t>
             </a:r>
-            <a:endParaRPr/>
-          </a:p>
-          <a:p>
-            <a:pPr marL="274320" indent="-274320" algn="l">
+          </a:p>
+          <a:p>
+            <a:pPr algn="l" marL="274320" indent="-274320">
               <a:spcAft>
                 <a:spcPts val="1400"/>
               </a:spcAft>
               <a:buFont typeface="Arial"/>
               <a:buChar char="•"/>
-              <a:defRPr/>
             </a:pPr>
             <a:r>
               <a:rPr sz="1700" b="0">
@@ -5443,16 +3702,14 @@
               </a:rPr>
               <a:t>Everything is emulation. No real phones, no real cellular networks.</a:t>
             </a:r>
-            <a:endParaRPr/>
-          </a:p>
-          <a:p>
-            <a:pPr marL="274320" indent="-274320" algn="l">
+          </a:p>
+          <a:p>
+            <a:pPr algn="l" marL="274320" indent="-274320">
               <a:spcAft>
                 <a:spcPts val="1400"/>
               </a:spcAft>
               <a:buFont typeface="Arial"/>
               <a:buChar char="•"/>
-              <a:defRPr/>
             </a:pPr>
             <a:r>
               <a:rPr sz="1700" b="0">
@@ -5462,16 +3719,14 @@
               </a:rPr>
               <a:t>Each implementation was tested at one commit, in one configuration, in one direction of transfer.</a:t>
             </a:r>
-            <a:endParaRPr/>
-          </a:p>
-          <a:p>
-            <a:pPr marL="274320" indent="-274320" algn="l">
+          </a:p>
+          <a:p>
+            <a:pPr algn="l" marL="274320" indent="-274320">
               <a:spcAft>
                 <a:spcPts val="1400"/>
               </a:spcAft>
               <a:buFont typeface="Arial"/>
               <a:buChar char="•"/>
-              <a:defRPr/>
             </a:pPr>
             <a:r>
               <a:rPr sz="1700" b="0">
@@ -5481,33 +3736,12 @@
               </a:rPr>
               <a:t>The stuck-estimate result is an observation. We have not proven its cause.</a:t>
             </a:r>
-            <a:endParaRPr/>
-          </a:p>
-          <a:p>
-            <a:pPr marL="274320" indent="-274320" algn="l">
-              <a:spcAft>
-                <a:spcPts val="1400"/>
-              </a:spcAft>
-              <a:buFont typeface="Arial"/>
-              <a:buChar char="•"/>
-              <a:defRPr/>
-            </a:pPr>
-            <a:r>
-              <a:rPr sz="1700" b="0">
-                <a:solidFill>
-                  <a:srgbClr val="1A1A1A"/>
-                </a:solidFill>
-              </a:rPr>
-              <a:t>picoquic has one live repetition where the others have five.</a:t>
-            </a:r>
-            <a:endParaRPr/>
           </a:p>
           <a:p>
             <a:pPr algn="l">
               <a:spcAft>
                 <a:spcPts val="1000"/>
               </a:spcAft>
-              <a:defRPr/>
             </a:pPr>
             <a:r>
               <a:rPr sz="1800" b="1">
@@ -5517,7 +3751,6 @@
               </a:rPr>
               <a:t>We would rather state these than have a reviewer find them.</a:t>
             </a:r>
-            <a:endParaRPr/>
           </a:p>
         </p:txBody>
       </p:sp>
@@ -5526,41 +3759,26 @@
   <p:clrMapOvr>
     <a:masterClrMapping/>
   </p:clrMapOvr>
-  <mc:AlternateContent xmlns:mc="http://schemas.openxmlformats.org/markup-compatibility/2006">
-    <mc:Choice xmlns:p159="http://schemas.microsoft.com/office/powerpoint/2015/09/main" xmlns:p14="http://schemas.microsoft.com/office/powerpoint/2010/main" Requires="p159">
-      <p:transition p14:dur="500" advClick="1"/>
-    </mc:Choice>
-    <mc:Fallback>
-      <p:transition advClick="1"/>
-    </mc:Fallback>
-  </mc:AlternateContent>
 </p:sld>
 </file>
 
 <file path=ppt/slides/slide13.xml><?xml version="1.0" encoding="utf-8"?>
-<p:sld xmlns:a="http://schemas.openxmlformats.org/drawingml/2006/main" xmlns:r="http://schemas.openxmlformats.org/officeDocument/2006/relationships" xmlns:p="http://schemas.openxmlformats.org/presentationml/2006/main" xmlns:m="http://schemas.openxmlformats.org/officeDocument/2006/math" xmlns:w="http://schemas.openxmlformats.org/wordprocessingml/2006/main" xmlns:mc="http://schemas.openxmlformats.org/markup-compatibility/2006" showMasterPhAnim="0" showMasterSp="1" show="1">
-  <p:cSld name="">
+<p:sld xmlns:a="http://schemas.openxmlformats.org/drawingml/2006/main" xmlns:p="http://schemas.openxmlformats.org/presentationml/2006/main" xmlns:r="http://schemas.openxmlformats.org/officeDocument/2006/relationships">
+  <p:cSld>
     <p:spTree>
       <p:nvGrpSpPr>
         <p:cNvPr id="1" name=""/>
         <p:cNvGrpSpPr/>
         <p:nvPr/>
       </p:nvGrpSpPr>
-      <p:grpSpPr bwMode="auto">
-        <a:xfrm>
-          <a:off x="0" y="0"/>
-          <a:ext cx="0" cy="0"/>
-          <a:chOff x="0" y="0"/>
-          <a:chExt cx="0" cy="0"/>
-        </a:xfrm>
-      </p:grpSpPr>
-      <p:sp>
-        <p:nvSpPr>
-          <p:cNvPr id="1963814831" name="TextBox 1"/>
+      <p:grpSpPr/>
+      <p:sp>
+        <p:nvSpPr>
+          <p:cNvPr id="2" name="TextBox 1"/>
           <p:cNvSpPr txBox="1"/>
           <p:nvPr/>
         </p:nvSpPr>
-        <p:spPr bwMode="auto">
+        <p:spPr>
           <a:xfrm>
             <a:off x="685800" y="365760"/>
             <a:ext cx="10972800" cy="329184"/>
@@ -5580,7 +3798,6 @@
               <a:spcAft>
                 <a:spcPts val="1000"/>
               </a:spcAft>
-              <a:defRPr/>
             </a:pPr>
             <a:r>
               <a:rPr sz="1250" b="1">
@@ -5590,19 +3807,18 @@
               </a:rPr>
               <a:t>NEXT</a:t>
             </a:r>
-            <a:endParaRPr/>
-          </a:p>
-        </p:txBody>
-      </p:sp>
-      <p:sp>
-        <p:nvSpPr>
-          <p:cNvPr id="1082185815" name="TextBox 2"/>
+          </a:p>
+        </p:txBody>
+      </p:sp>
+      <p:sp>
+        <p:nvSpPr>
+          <p:cNvPr id="3" name="TextBox 2"/>
           <p:cNvSpPr txBox="1"/>
           <p:nvPr/>
         </p:nvSpPr>
-        <p:spPr bwMode="auto">
-          <a:xfrm>
-            <a:off x="685800" y="1005840"/>
+        <p:spPr>
+          <a:xfrm>
+            <a:off x="685800" y="713232"/>
             <a:ext cx="10972800" cy="960120"/>
           </a:xfrm>
           <a:prstGeom prst="rect">
@@ -5620,7 +3836,6 @@
               <a:spcAft>
                 <a:spcPts val="1000"/>
               </a:spcAft>
-              <a:defRPr/>
             </a:pPr>
             <a:r>
               <a:rPr sz="2600" b="1">
@@ -5630,17 +3845,16 @@
               </a:rPr>
               <a:t>Where this goes.</a:t>
             </a:r>
-            <a:endParaRPr/>
-          </a:p>
-        </p:txBody>
-      </p:sp>
-      <p:sp>
-        <p:nvSpPr>
-          <p:cNvPr id="188296917" name="TextBox 3"/>
+          </a:p>
+        </p:txBody>
+      </p:sp>
+      <p:sp>
+        <p:nvSpPr>
+          <p:cNvPr id="4" name="TextBox 3"/>
           <p:cNvSpPr txBox="1"/>
           <p:nvPr/>
         </p:nvSpPr>
-        <p:spPr bwMode="auto">
+        <p:spPr>
           <a:xfrm>
             <a:off x="777240" y="1965960"/>
             <a:ext cx="10789920" cy="4023360"/>
@@ -5660,7 +3874,6 @@
               <a:spcAft>
                 <a:spcPts val="1800"/>
               </a:spcAft>
-              <a:defRPr/>
             </a:pPr>
             <a:r>
               <a:rPr sz="1900" b="0">
@@ -5670,14 +3883,12 @@
               </a:rPr>
               <a:t>The survey is complete: five implementations, three questions, source and measurement for every cell.</a:t>
             </a:r>
-            <a:endParaRPr/>
           </a:p>
           <a:p>
             <a:pPr algn="l">
               <a:spcAft>
                 <a:spcPts val="1800"/>
               </a:spcAft>
-              <a:defRPr/>
             </a:pPr>
             <a:r>
               <a:rPr sz="1800" b="0">
@@ -5687,14 +3898,12 @@
               </a:rPr>
               <a:t>Next is the cost — how much each of these behaviours actually loses, across a range of network conditions rather than the single pair we used here.</a:t>
             </a:r>
-            <a:endParaRPr/>
           </a:p>
           <a:p>
             <a:pPr algn="l">
               <a:spcAft>
                 <a:spcPts val="2000"/>
               </a:spcAft>
-              <a:defRPr/>
             </a:pPr>
             <a:r>
               <a:rPr sz="1800" b="0">
@@ -5704,14 +3913,12 @@
               </a:rPr>
               <a:t>Then the paper. And the findings go back to the projects: two of them ship a reset that never runs, and one has a comment in its own source asking whether the line we identified is correct.</a:t>
             </a:r>
-            <a:endParaRPr/>
           </a:p>
           <a:p>
             <a:pPr algn="l">
               <a:spcAft>
                 <a:spcPts val="1000"/>
               </a:spcAft>
-              <a:defRPr/>
             </a:pPr>
             <a:r>
               <a:rPr sz="2000" b="1">
@@ -5721,7 +3928,6 @@
               </a:rPr>
               <a:t>Nobody had measured this. Now it is measured.</a:t>
             </a:r>
-            <a:endParaRPr/>
           </a:p>
         </p:txBody>
       </p:sp>
@@ -5730,41 +3936,26 @@
   <p:clrMapOvr>
     <a:masterClrMapping/>
   </p:clrMapOvr>
-  <mc:AlternateContent xmlns:mc="http://schemas.openxmlformats.org/markup-compatibility/2006">
-    <mc:Choice xmlns:p159="http://schemas.microsoft.com/office/powerpoint/2015/09/main" xmlns:p14="http://schemas.microsoft.com/office/powerpoint/2010/main" Requires="p159">
-      <p:transition p14:dur="500" advClick="1"/>
-    </mc:Choice>
-    <mc:Fallback>
-      <p:transition advClick="1"/>
-    </mc:Fallback>
-  </mc:AlternateContent>
 </p:sld>
 </file>
 
 <file path=ppt/slides/slide2.xml><?xml version="1.0" encoding="utf-8"?>
-<p:sld xmlns:a="http://schemas.openxmlformats.org/drawingml/2006/main" xmlns:r="http://schemas.openxmlformats.org/officeDocument/2006/relationships" xmlns:p="http://schemas.openxmlformats.org/presentationml/2006/main" xmlns:m="http://schemas.openxmlformats.org/officeDocument/2006/math" xmlns:w="http://schemas.openxmlformats.org/wordprocessingml/2006/main" xmlns:mc="http://schemas.openxmlformats.org/markup-compatibility/2006" showMasterPhAnim="0" showMasterSp="1" show="1">
-  <p:cSld name="">
+<p:sld xmlns:a="http://schemas.openxmlformats.org/drawingml/2006/main" xmlns:p="http://schemas.openxmlformats.org/presentationml/2006/main" xmlns:r="http://schemas.openxmlformats.org/officeDocument/2006/relationships">
+  <p:cSld>
     <p:spTree>
       <p:nvGrpSpPr>
         <p:cNvPr id="1" name=""/>
         <p:cNvGrpSpPr/>
         <p:nvPr/>
       </p:nvGrpSpPr>
-      <p:grpSpPr bwMode="auto">
-        <a:xfrm>
-          <a:off x="0" y="0"/>
-          <a:ext cx="0" cy="0"/>
-          <a:chOff x="0" y="0"/>
-          <a:chExt cx="0" cy="0"/>
-        </a:xfrm>
-      </p:grpSpPr>
-      <p:sp>
-        <p:nvSpPr>
-          <p:cNvPr id="1131003490" name="TextBox 1"/>
+      <p:grpSpPr/>
+      <p:sp>
+        <p:nvSpPr>
+          <p:cNvPr id="2" name="TextBox 1"/>
           <p:cNvSpPr txBox="1"/>
           <p:nvPr/>
         </p:nvSpPr>
-        <p:spPr bwMode="auto">
+        <p:spPr>
           <a:xfrm>
             <a:off x="685800" y="365760"/>
             <a:ext cx="10972800" cy="329184"/>
@@ -5784,7 +3975,6 @@
               <a:spcAft>
                 <a:spcPts val="1000"/>
               </a:spcAft>
-              <a:defRPr/>
             </a:pPr>
             <a:r>
               <a:rPr sz="1250" b="1">
@@ -5794,17 +3984,16 @@
               </a:rPr>
               <a:t>WHERE WE LEFT OFF</a:t>
             </a:r>
-            <a:endParaRPr/>
-          </a:p>
-        </p:txBody>
-      </p:sp>
-      <p:sp>
-        <p:nvSpPr>
-          <p:cNvPr id="195414430" name="TextBox 2"/>
+          </a:p>
+        </p:txBody>
+      </p:sp>
+      <p:sp>
+        <p:nvSpPr>
+          <p:cNvPr id="3" name="TextBox 2"/>
           <p:cNvSpPr txBox="1"/>
           <p:nvPr/>
         </p:nvSpPr>
-        <p:spPr bwMode="auto">
+        <p:spPr>
           <a:xfrm>
             <a:off x="685800" y="713232"/>
             <a:ext cx="10972800" cy="960120"/>
@@ -5824,7 +4013,6 @@
               <a:spcAft>
                 <a:spcPts val="1000"/>
               </a:spcAft>
-              <a:defRPr/>
             </a:pPr>
             <a:r>
               <a:rPr sz="2600" b="1">
@@ -5834,17 +4022,16 @@
               </a:rPr>
               <a:t>Last phase we found one implementation ignoring a rule it must follow.</a:t>
             </a:r>
-            <a:endParaRPr/>
-          </a:p>
-        </p:txBody>
-      </p:sp>
-      <p:sp>
-        <p:nvSpPr>
-          <p:cNvPr id="360115920" name="TextBox 3"/>
+          </a:p>
+        </p:txBody>
+      </p:sp>
+      <p:sp>
+        <p:nvSpPr>
+          <p:cNvPr id="4" name="TextBox 3"/>
           <p:cNvSpPr txBox="1"/>
           <p:nvPr/>
         </p:nvSpPr>
-        <p:spPr bwMode="auto">
+        <p:spPr>
           <a:xfrm>
             <a:off x="777240" y="2011680"/>
             <a:ext cx="10789920" cy="3840480"/>
@@ -5864,7 +4051,6 @@
               <a:spcAft>
                 <a:spcPts val="1800"/>
               </a:spcAft>
-              <a:defRPr/>
             </a:pPr>
             <a:r>
               <a:rPr sz="1900" b="0">
@@ -5874,14 +4060,12 @@
               </a:rPr>
               <a:t>The standard says an endpoint MUST reset its speed estimate when a connection moves to a new network. Forget what you learned about the old one; start over.</a:t>
             </a:r>
-            <a:endParaRPr/>
           </a:p>
           <a:p>
             <a:pPr algn="l">
               <a:spcAft>
                 <a:spcPts val="1800"/>
               </a:spcAft>
-              <a:defRPr/>
             </a:pPr>
             <a:r>
               <a:rPr sz="1900" b="0">
@@ -5891,14 +4075,12 @@
               </a:rPr>
               <a:t>We checked picoquic. It doesn't. The function that performs the reset exists, is implemented for all seven of its congestion-control algorithms, and is called by nothing.</a:t>
             </a:r>
-            <a:endParaRPr/>
           </a:p>
           <a:p>
             <a:pPr algn="l">
               <a:spcAft>
                 <a:spcPts val="1800"/>
               </a:spcAft>
-              <a:defRPr/>
             </a:pPr>
             <a:r>
               <a:rPr sz="1900" b="0">
@@ -5908,14 +4090,12 @@
               </a:rPr>
               <a:t>Then we implemented the rule ourselves — and transfers stopped completing entirely, because the rule has a second half that is easy to miss.</a:t>
             </a:r>
-            <a:endParaRPr/>
           </a:p>
           <a:p>
             <a:pPr algn="l">
               <a:spcAft>
                 <a:spcPts val="1000"/>
               </a:spcAft>
-              <a:defRPr/>
             </a:pPr>
             <a:r>
               <a:rPr sz="1900" b="1">
@@ -5925,7 +4105,6 @@
               </a:rPr>
               <a:t>Which left an obvious question.</a:t>
             </a:r>
-            <a:endParaRPr/>
           </a:p>
         </p:txBody>
       </p:sp>
@@ -5934,41 +4113,26 @@
   <p:clrMapOvr>
     <a:masterClrMapping/>
   </p:clrMapOvr>
-  <mc:AlternateContent xmlns:mc="http://schemas.openxmlformats.org/markup-compatibility/2006">
-    <mc:Choice xmlns:p159="http://schemas.microsoft.com/office/powerpoint/2015/09/main" xmlns:p14="http://schemas.microsoft.com/office/powerpoint/2010/main" Requires="p159">
-      <p:transition p14:dur="500" advClick="1"/>
-    </mc:Choice>
-    <mc:Fallback>
-      <p:transition advClick="1"/>
-    </mc:Fallback>
-  </mc:AlternateContent>
 </p:sld>
 </file>
 
 <file path=ppt/slides/slide3.xml><?xml version="1.0" encoding="utf-8"?>
-<p:sld xmlns:a="http://schemas.openxmlformats.org/drawingml/2006/main" xmlns:r="http://schemas.openxmlformats.org/officeDocument/2006/relationships" xmlns:p="http://schemas.openxmlformats.org/presentationml/2006/main" xmlns:m="http://schemas.openxmlformats.org/officeDocument/2006/math" xmlns:w="http://schemas.openxmlformats.org/wordprocessingml/2006/main" xmlns:mc="http://schemas.openxmlformats.org/markup-compatibility/2006" showMasterPhAnim="0" showMasterSp="1" show="1">
-  <p:cSld name="">
+<p:sld xmlns:a="http://schemas.openxmlformats.org/drawingml/2006/main" xmlns:p="http://schemas.openxmlformats.org/presentationml/2006/main" xmlns:r="http://schemas.openxmlformats.org/officeDocument/2006/relationships">
+  <p:cSld>
     <p:spTree>
       <p:nvGrpSpPr>
         <p:cNvPr id="1" name=""/>
         <p:cNvGrpSpPr/>
         <p:nvPr/>
       </p:nvGrpSpPr>
-      <p:grpSpPr bwMode="auto">
-        <a:xfrm>
-          <a:off x="0" y="0"/>
-          <a:ext cx="0" cy="0"/>
-          <a:chOff x="0" y="0"/>
-          <a:chExt cx="0" cy="0"/>
-        </a:xfrm>
-      </p:grpSpPr>
-      <p:sp>
-        <p:nvSpPr>
-          <p:cNvPr id="2045345906" name="TextBox 1"/>
+      <p:grpSpPr/>
+      <p:sp>
+        <p:nvSpPr>
+          <p:cNvPr id="2" name="TextBox 1"/>
           <p:cNvSpPr txBox="1"/>
           <p:nvPr/>
         </p:nvSpPr>
-        <p:spPr bwMode="auto">
+        <p:spPr>
           <a:xfrm>
             <a:off x="685800" y="365760"/>
             <a:ext cx="10972800" cy="329184"/>
@@ -5988,7 +4152,6 @@
               <a:spcAft>
                 <a:spcPts val="1000"/>
               </a:spcAft>
-              <a:defRPr/>
             </a:pPr>
             <a:r>
               <a:rPr sz="1250" b="1">
@@ -5998,17 +4161,16 @@
               </a:rPr>
               <a:t>THE QUESTION</a:t>
             </a:r>
-            <a:endParaRPr/>
-          </a:p>
-        </p:txBody>
-      </p:sp>
-      <p:sp>
-        <p:nvSpPr>
-          <p:cNvPr id="956045138" name="TextBox 2"/>
+          </a:p>
+        </p:txBody>
+      </p:sp>
+      <p:sp>
+        <p:nvSpPr>
+          <p:cNvPr id="3" name="TextBox 2"/>
           <p:cNvSpPr txBox="1"/>
           <p:nvPr/>
         </p:nvSpPr>
-        <p:spPr bwMode="auto">
+        <p:spPr>
           <a:xfrm>
             <a:off x="685800" y="713232"/>
             <a:ext cx="10972800" cy="960120"/>
@@ -6028,7 +4190,6 @@
               <a:spcAft>
                 <a:spcPts val="1000"/>
               </a:spcAft>
-              <a:defRPr/>
             </a:pPr>
             <a:r>
               <a:rPr sz="2600" b="1">
@@ -6038,17 +4199,16 @@
               </a:rPr>
               <a:t>Does anyone else get this right?</a:t>
             </a:r>
-            <a:endParaRPr/>
-          </a:p>
-        </p:txBody>
-      </p:sp>
-      <p:sp>
-        <p:nvSpPr>
-          <p:cNvPr id="2101843078" name="TextBox 3"/>
+          </a:p>
+        </p:txBody>
+      </p:sp>
+      <p:sp>
+        <p:nvSpPr>
+          <p:cNvPr id="4" name="TextBox 3"/>
           <p:cNvSpPr txBox="1"/>
           <p:nvPr/>
         </p:nvSpPr>
-        <p:spPr bwMode="auto">
+        <p:spPr>
           <a:xfrm>
             <a:off x="777240" y="2011680"/>
             <a:ext cx="10789920" cy="3840480"/>
@@ -6068,7 +4228,6 @@
               <a:spcAft>
                 <a:spcPts val="2200"/>
               </a:spcAft>
-              <a:defRPr/>
             </a:pPr>
             <a:r>
               <a:rPr sz="1900" b="0">
@@ -6078,16 +4237,14 @@
               </a:rPr>
               <a:t>We took the five QUIC implementations that carry most of the internet's traffic, in three different languages, and asked each of them the same three questions.</a:t>
             </a:r>
-            <a:endParaRPr/>
-          </a:p>
-          <a:p>
-            <a:pPr marL="365760" indent="-365760" algn="l">
+          </a:p>
+          <a:p>
+            <a:pPr algn="l" marL="365760" indent="-365760">
               <a:spcAft>
                 <a:spcPts val="400"/>
               </a:spcAft>
               <a:buFont typeface="Calibri"/>
               <a:buAutoNum type="arabicPeriod"/>
-              <a:defRPr/>
             </a:pPr>
             <a:r>
               <a:rPr sz="1800" b="1">
@@ -6097,15 +4254,13 @@
               </a:rPr>
               <a:t>Resets congestion control on migration?</a:t>
             </a:r>
-            <a:endParaRPr/>
-          </a:p>
-          <a:p>
-            <a:pPr marL="365760" indent="0" algn="l">
+          </a:p>
+          <a:p>
+            <a:pPr algn="l" marL="365760" indent="0">
               <a:spcAft>
                 <a:spcPts val="1400"/>
               </a:spcAft>
               <a:buNone/>
-              <a:defRPr/>
             </a:pPr>
             <a:r>
               <a:rPr sz="1400" b="0">
@@ -6115,16 +4270,14 @@
               </a:rPr>
               <a:t>MUST — RFC 9000 §9.4 (2nd paragraph)</a:t>
             </a:r>
-            <a:endParaRPr/>
-          </a:p>
-          <a:p>
-            <a:pPr marL="365760" indent="-365760" algn="l">
+          </a:p>
+          <a:p>
+            <a:pPr algn="l" marL="365760" indent="-365760">
               <a:spcAft>
                 <a:spcPts val="400"/>
               </a:spcAft>
               <a:buFont typeface="Calibri"/>
               <a:buAutoNum type="arabicPeriod"/>
-              <a:defRPr/>
             </a:pPr>
             <a:r>
               <a:rPr sz="1800" b="1">
@@ -6134,15 +4287,13 @@
               </a:rPr>
               <a:t>Uses path-validation RTT as the new path's initial RTT?</a:t>
             </a:r>
-            <a:endParaRPr/>
-          </a:p>
-          <a:p>
-            <a:pPr marL="365760" indent="0" algn="l">
+          </a:p>
+          <a:p>
+            <a:pPr algn="l" marL="365760" indent="0">
               <a:spcAft>
                 <a:spcPts val="1400"/>
               </a:spcAft>
               <a:buNone/>
-              <a:defRPr/>
             </a:pPr>
             <a:r>
               <a:rPr sz="1400" b="0">
@@ -6152,16 +4303,14 @@
               </a:rPr>
               <a:t>MAY — RFC 9002 §6.2.2</a:t>
             </a:r>
-            <a:endParaRPr/>
-          </a:p>
-          <a:p>
-            <a:pPr marL="365760" indent="-365760" algn="l">
+          </a:p>
+          <a:p>
+            <a:pPr algn="l" marL="365760" indent="-365760">
               <a:spcAft>
                 <a:spcPts val="400"/>
               </a:spcAft>
               <a:buFont typeface="Calibri"/>
               <a:buAutoNum type="arabicPeriod"/>
-              <a:defRPr/>
             </a:pPr>
             <a:r>
               <a:rPr sz="1800" b="1">
@@ -6171,15 +4320,13 @@
               </a:rPr>
               <a:t>Excludes old-path ACKs from new-path state?</a:t>
             </a:r>
-            <a:endParaRPr/>
-          </a:p>
-          <a:p>
-            <a:pPr marL="365760" indent="0" algn="l">
+          </a:p>
+          <a:p>
+            <a:pPr algn="l" marL="365760" indent="0">
               <a:spcAft>
                 <a:spcPts val="1400"/>
               </a:spcAft>
               <a:buNone/>
-              <a:defRPr/>
             </a:pPr>
             <a:r>
               <a:rPr sz="1400" b="0">
@@ -6189,14 +4336,12 @@
               </a:rPr>
               <a:t>MUST — RFC 9000 §9.4 (1st paragraph)</a:t>
             </a:r>
-            <a:endParaRPr/>
           </a:p>
           <a:p>
             <a:pPr algn="l">
               <a:spcAft>
                 <a:spcPts val="1000"/>
               </a:spcAft>
-              <a:defRPr/>
             </a:pPr>
             <a:r>
               <a:rPr sz="1700" b="1">
@@ -6206,7 +4351,6 @@
               </a:rPr>
               <a:t>Every answer twice: once by reading the source, once by measuring the running program. If they disagreed, we had made a mistake and went to find it.</a:t>
             </a:r>
-            <a:endParaRPr/>
           </a:p>
         </p:txBody>
       </p:sp>
@@ -6215,41 +4359,26 @@
   <p:clrMapOvr>
     <a:masterClrMapping/>
   </p:clrMapOvr>
-  <mc:AlternateContent xmlns:mc="http://schemas.openxmlformats.org/markup-compatibility/2006">
-    <mc:Choice xmlns:p159="http://schemas.microsoft.com/office/powerpoint/2015/09/main" xmlns:p14="http://schemas.microsoft.com/office/powerpoint/2010/main" Requires="p159">
-      <p:transition p14:dur="500" advClick="1"/>
-    </mc:Choice>
-    <mc:Fallback>
-      <p:transition advClick="1"/>
-    </mc:Fallback>
-  </mc:AlternateContent>
 </p:sld>
 </file>
 
 <file path=ppt/slides/slide4.xml><?xml version="1.0" encoding="utf-8"?>
-<p:sld xmlns:a="http://schemas.openxmlformats.org/drawingml/2006/main" xmlns:r="http://schemas.openxmlformats.org/officeDocument/2006/relationships" xmlns:p="http://schemas.openxmlformats.org/presentationml/2006/main" xmlns:m="http://schemas.openxmlformats.org/officeDocument/2006/math" xmlns:w="http://schemas.openxmlformats.org/wordprocessingml/2006/main" xmlns:mc="http://schemas.openxmlformats.org/markup-compatibility/2006" showMasterPhAnim="0" showMasterSp="1" show="1">
-  <p:cSld name="">
+<p:sld xmlns:a="http://schemas.openxmlformats.org/drawingml/2006/main" xmlns:p="http://schemas.openxmlformats.org/presentationml/2006/main" xmlns:r="http://schemas.openxmlformats.org/officeDocument/2006/relationships">
+  <p:cSld>
     <p:spTree>
       <p:nvGrpSpPr>
         <p:cNvPr id="1" name=""/>
         <p:cNvGrpSpPr/>
         <p:nvPr/>
       </p:nvGrpSpPr>
-      <p:grpSpPr bwMode="auto">
-        <a:xfrm>
-          <a:off x="0" y="0"/>
-          <a:ext cx="0" cy="0"/>
-          <a:chOff x="0" y="0"/>
-          <a:chExt cx="0" cy="0"/>
-        </a:xfrm>
-      </p:grpSpPr>
-      <p:sp>
-        <p:nvSpPr>
-          <p:cNvPr id="533962681" name="TextBox 1"/>
+      <p:grpSpPr/>
+      <p:sp>
+        <p:nvSpPr>
+          <p:cNvPr id="2" name="TextBox 1"/>
           <p:cNvSpPr txBox="1"/>
           <p:nvPr/>
         </p:nvSpPr>
-        <p:spPr bwMode="auto">
+        <p:spPr>
           <a:xfrm>
             <a:off x="685800" y="365760"/>
             <a:ext cx="10972800" cy="329184"/>
@@ -6269,7 +4398,6 @@
               <a:spcAft>
                 <a:spcPts val="1000"/>
               </a:spcAft>
-              <a:defRPr/>
             </a:pPr>
             <a:r>
               <a:rPr sz="1250" b="1">
@@ -6279,17 +4407,16 @@
               </a:rPr>
               <a:t>THE RESULT</a:t>
             </a:r>
-            <a:endParaRPr/>
-          </a:p>
-        </p:txBody>
-      </p:sp>
-      <p:sp>
-        <p:nvSpPr>
-          <p:cNvPr id="1602348951" name="TextBox 2"/>
+          </a:p>
+        </p:txBody>
+      </p:sp>
+      <p:sp>
+        <p:nvSpPr>
+          <p:cNvPr id="3" name="TextBox 2"/>
           <p:cNvSpPr txBox="1"/>
           <p:nvPr/>
         </p:nvSpPr>
-        <p:spPr bwMode="auto">
+        <p:spPr>
           <a:xfrm>
             <a:off x="685800" y="713232"/>
             <a:ext cx="10972800" cy="960120"/>
@@ -6309,7 +4436,6 @@
               <a:spcAft>
                 <a:spcPts val="1000"/>
               </a:spcAft>
-              <a:defRPr/>
             </a:pPr>
             <a:r>
               <a:rPr sz="2600" b="1">
@@ -6319,25 +4445,26 @@
               </a:rPr>
               <a:t>No two of them behave the same way.</a:t>
             </a:r>
-            <a:endParaRPr/>
           </a:p>
         </p:txBody>
       </p:sp>
       <p:pic>
         <p:nvPicPr>
-          <p:cNvPr id="153084090" name="Picture 3" descr="p2_fig1_compliance_table.png"/>
+          <p:cNvPr id="4" name="Picture 3" descr="p2_fig1_compliance_table.png"/>
           <p:cNvPicPr>
             <a:picLocks noChangeAspect="1"/>
           </p:cNvPicPr>
           <p:nvPr/>
         </p:nvPicPr>
-        <p:blipFill rotWithShape="1">
-          <a:blip r:embed="rId3"/>
-          <a:stretch/>
+        <p:blipFill>
+          <a:blip r:embed="rId2"/>
+          <a:stretch>
+            <a:fillRect/>
+          </a:stretch>
         </p:blipFill>
-        <p:spPr bwMode="auto">
-          <a:xfrm>
-            <a:off x="1497900" y="1385841"/>
+        <p:spPr>
+          <a:xfrm>
+            <a:off x="1497901" y="1737360"/>
             <a:ext cx="9165716" cy="4443983"/>
           </a:xfrm>
           <a:prstGeom prst="rect">
@@ -6347,11 +4474,11 @@
       </p:pic>
       <p:sp>
         <p:nvSpPr>
-          <p:cNvPr id="1595244222" name="TextBox 4"/>
+          <p:cNvPr id="5" name="TextBox 4"/>
           <p:cNvSpPr txBox="1"/>
           <p:nvPr/>
         </p:nvSpPr>
-        <p:spPr bwMode="auto">
+        <p:spPr>
           <a:xfrm>
             <a:off x="685800" y="6291072"/>
             <a:ext cx="10972800" cy="411480"/>
@@ -6371,7 +4498,6 @@
               <a:spcAft>
                 <a:spcPts val="1000"/>
               </a:spcAft>
-              <a:defRPr/>
             </a:pPr>
             <a:r>
               <a:rPr sz="1050" b="0">
@@ -6381,7 +4507,6 @@
               </a:rPr>
               <a:t>5 implementations audited from source; 5 of them also measured live in our testbed. Every cell is backed by both.</a:t>
             </a:r>
-            <a:endParaRPr/>
           </a:p>
         </p:txBody>
       </p:sp>
@@ -6390,41 +4515,26 @@
   <p:clrMapOvr>
     <a:masterClrMapping/>
   </p:clrMapOvr>
-  <mc:AlternateContent xmlns:mc="http://schemas.openxmlformats.org/markup-compatibility/2006">
-    <mc:Choice xmlns:p159="http://schemas.microsoft.com/office/powerpoint/2015/09/main" xmlns:p14="http://schemas.microsoft.com/office/powerpoint/2010/main" Requires="p159">
-      <p:transition p14:dur="500" advClick="1"/>
-    </mc:Choice>
-    <mc:Fallback>
-      <p:transition advClick="1"/>
-    </mc:Fallback>
-  </mc:AlternateContent>
 </p:sld>
 </file>
 
 <file path=ppt/slides/slide5.xml><?xml version="1.0" encoding="utf-8"?>
-<p:sld xmlns:a="http://schemas.openxmlformats.org/drawingml/2006/main" xmlns:r="http://schemas.openxmlformats.org/officeDocument/2006/relationships" xmlns:p="http://schemas.openxmlformats.org/presentationml/2006/main" xmlns:m="http://schemas.openxmlformats.org/officeDocument/2006/math" xmlns:w="http://schemas.openxmlformats.org/wordprocessingml/2006/main" xmlns:mc="http://schemas.openxmlformats.org/markup-compatibility/2006" showMasterPhAnim="0" showMasterSp="1" show="1">
-  <p:cSld name="">
+<p:sld xmlns:a="http://schemas.openxmlformats.org/drawingml/2006/main" xmlns:p="http://schemas.openxmlformats.org/presentationml/2006/main" xmlns:r="http://schemas.openxmlformats.org/officeDocument/2006/relationships">
+  <p:cSld>
     <p:spTree>
       <p:nvGrpSpPr>
         <p:cNvPr id="1" name=""/>
         <p:cNvGrpSpPr/>
         <p:nvPr/>
       </p:nvGrpSpPr>
-      <p:grpSpPr bwMode="auto">
-        <a:xfrm>
-          <a:off x="0" y="0"/>
-          <a:ext cx="0" cy="0"/>
-          <a:chOff x="0" y="0"/>
-          <a:chExt cx="0" cy="0"/>
-        </a:xfrm>
-      </p:grpSpPr>
-      <p:sp>
-        <p:nvSpPr>
-          <p:cNvPr id="778105801" name="TextBox 1"/>
+      <p:grpSpPr/>
+      <p:sp>
+        <p:nvSpPr>
+          <p:cNvPr id="2" name="TextBox 1"/>
           <p:cNvSpPr txBox="1"/>
           <p:nvPr/>
         </p:nvSpPr>
-        <p:spPr bwMode="auto">
+        <p:spPr>
           <a:xfrm>
             <a:off x="685800" y="365760"/>
             <a:ext cx="10972800" cy="329184"/>
@@ -6444,7 +4554,6 @@
               <a:spcAft>
                 <a:spcPts val="1000"/>
               </a:spcAft>
-              <a:defRPr/>
             </a:pPr>
             <a:r>
               <a:rPr sz="1250" b="1">
@@ -6454,17 +4563,16 @@
               </a:rPr>
               <a:t>FINDING 1</a:t>
             </a:r>
-            <a:endParaRPr/>
-          </a:p>
-        </p:txBody>
-      </p:sp>
-      <p:sp>
-        <p:nvSpPr>
-          <p:cNvPr id="852675412" name="TextBox 2"/>
+          </a:p>
+        </p:txBody>
+      </p:sp>
+      <p:sp>
+        <p:nvSpPr>
+          <p:cNvPr id="3" name="TextBox 2"/>
           <p:cNvSpPr txBox="1"/>
           <p:nvPr/>
         </p:nvSpPr>
-        <p:spPr bwMode="auto">
+        <p:spPr>
           <a:xfrm>
             <a:off x="685800" y="713232"/>
             <a:ext cx="10972800" cy="960120"/>
@@ -6484,7 +4592,6 @@
               <a:spcAft>
                 <a:spcPts val="1000"/>
               </a:spcAft>
-              <a:defRPr/>
             </a:pPr>
             <a:r>
               <a:rPr sz="2600" b="1">
@@ -6494,25 +4601,26 @@
               </a:rPr>
               <a:t>Two of them ship the code to obey the rule — and never call it.</a:t>
             </a:r>
-            <a:endParaRPr/>
           </a:p>
         </p:txBody>
       </p:sp>
       <p:pic>
         <p:nvPicPr>
-          <p:cNvPr id="1744300755" name="Picture 3" descr="p2_fig2_dead_hooks.png"/>
+          <p:cNvPr id="4" name="Picture 3" descr="p2_fig2_dead_hooks.png"/>
           <p:cNvPicPr>
             <a:picLocks noChangeAspect="1"/>
           </p:cNvPicPr>
           <p:nvPr/>
         </p:nvPicPr>
-        <p:blipFill rotWithShape="1">
-          <a:blip r:embed="rId3"/>
-          <a:stretch/>
+        <p:blipFill>
+          <a:blip r:embed="rId2"/>
+          <a:stretch>
+            <a:fillRect/>
+          </a:stretch>
         </p:blipFill>
-        <p:spPr bwMode="auto">
-          <a:xfrm>
-            <a:off x="914400" y="1455751"/>
+        <p:spPr>
+          <a:xfrm>
+            <a:off x="914400" y="1932002"/>
             <a:ext cx="10332720" cy="4100418"/>
           </a:xfrm>
           <a:prstGeom prst="rect">
@@ -6522,11 +4630,11 @@
       </p:pic>
       <p:sp>
         <p:nvSpPr>
-          <p:cNvPr id="960809980" name="TextBox 4"/>
+          <p:cNvPr id="5" name="TextBox 4"/>
           <p:cNvSpPr txBox="1"/>
           <p:nvPr/>
         </p:nvSpPr>
-        <p:spPr bwMode="auto">
+        <p:spPr>
           <a:xfrm>
             <a:off x="685800" y="6291072"/>
             <a:ext cx="10972800" cy="411480"/>
@@ -6546,7 +4654,6 @@
               <a:spcAft>
                 <a:spcPts val="1000"/>
               </a:spcAft>
-              <a:defRPr/>
             </a:pPr>
             <a:r>
               <a:rPr sz="1050" b="0">
@@ -6556,7 +4663,6 @@
               </a:rPr>
               <a:t>quiche's dead function even carries the comment “Called when connection migrates and cwnd needs to be reset”. Independent codebases, different languages, the same dead hook.</a:t>
             </a:r>
-            <a:endParaRPr/>
           </a:p>
         </p:txBody>
       </p:sp>
@@ -6565,41 +4671,26 @@
   <p:clrMapOvr>
     <a:masterClrMapping/>
   </p:clrMapOvr>
-  <mc:AlternateContent xmlns:mc="http://schemas.openxmlformats.org/markup-compatibility/2006">
-    <mc:Choice xmlns:p159="http://schemas.microsoft.com/office/powerpoint/2015/09/main" xmlns:p14="http://schemas.microsoft.com/office/powerpoint/2010/main" Requires="p159">
-      <p:transition p14:dur="500" advClick="1"/>
-    </mc:Choice>
-    <mc:Fallback>
-      <p:transition advClick="1"/>
-    </mc:Fallback>
-  </mc:AlternateContent>
 </p:sld>
 </file>
 
 <file path=ppt/slides/slide6.xml><?xml version="1.0" encoding="utf-8"?>
-<p:sld xmlns:a="http://schemas.openxmlformats.org/drawingml/2006/main" xmlns:r="http://schemas.openxmlformats.org/officeDocument/2006/relationships" xmlns:p="http://schemas.openxmlformats.org/presentationml/2006/main" xmlns:m="http://schemas.openxmlformats.org/officeDocument/2006/math" xmlns:w="http://schemas.openxmlformats.org/wordprocessingml/2006/main" xmlns:mc="http://schemas.openxmlformats.org/markup-compatibility/2006" showMasterPhAnim="0" showMasterSp="1" show="1">
-  <p:cSld name="">
+<p:sld xmlns:a="http://schemas.openxmlformats.org/drawingml/2006/main" xmlns:p="http://schemas.openxmlformats.org/presentationml/2006/main" xmlns:r="http://schemas.openxmlformats.org/officeDocument/2006/relationships">
+  <p:cSld>
     <p:spTree>
       <p:nvGrpSpPr>
         <p:cNvPr id="1" name=""/>
         <p:cNvGrpSpPr/>
         <p:nvPr/>
       </p:nvGrpSpPr>
-      <p:grpSpPr bwMode="auto">
-        <a:xfrm>
-          <a:off x="0" y="0"/>
-          <a:ext cx="0" cy="0"/>
-          <a:chOff x="0" y="0"/>
-          <a:chExt cx="0" cy="0"/>
-        </a:xfrm>
-      </p:grpSpPr>
-      <p:sp>
-        <p:nvSpPr>
-          <p:cNvPr id="1715732302" name="TextBox 1"/>
+      <p:grpSpPr/>
+      <p:sp>
+        <p:nvSpPr>
+          <p:cNvPr id="2" name="TextBox 1"/>
           <p:cNvSpPr txBox="1"/>
           <p:nvPr/>
         </p:nvSpPr>
-        <p:spPr bwMode="auto">
+        <p:spPr>
           <a:xfrm>
             <a:off x="685800" y="365760"/>
             <a:ext cx="10972800" cy="329184"/>
@@ -6619,7 +4710,6 @@
               <a:spcAft>
                 <a:spcPts val="1000"/>
               </a:spcAft>
-              <a:defRPr/>
             </a:pPr>
             <a:r>
               <a:rPr sz="1250" b="1">
@@ -6629,17 +4719,16 @@
               </a:rPr>
               <a:t>FINDING 2</a:t>
             </a:r>
-            <a:endParaRPr/>
-          </a:p>
-        </p:txBody>
-      </p:sp>
-      <p:sp>
-        <p:nvSpPr>
-          <p:cNvPr id="780562868" name="TextBox 2"/>
+          </a:p>
+        </p:txBody>
+      </p:sp>
+      <p:sp>
+        <p:nvSpPr>
+          <p:cNvPr id="3" name="TextBox 2"/>
           <p:cNvSpPr txBox="1"/>
           <p:nvPr/>
         </p:nvSpPr>
-        <p:spPr bwMode="auto">
+        <p:spPr>
           <a:xfrm>
             <a:off x="685800" y="713232"/>
             <a:ext cx="10972800" cy="960120"/>
@@ -6659,7 +4748,6 @@
               <a:spcAft>
                 <a:spcPts val="1000"/>
               </a:spcAft>
-              <a:defRPr/>
             </a:pPr>
             <a:r>
               <a:rPr sz="2600" b="1">
@@ -6669,25 +4757,26 @@
               </a:rPr>
               <a:t>Where they do comply, they get there five different ways.</a:t>
             </a:r>
-            <a:endParaRPr/>
           </a:p>
         </p:txBody>
       </p:sp>
       <p:pic>
         <p:nvPicPr>
-          <p:cNvPr id="19131208" name="Picture 3" descr="p2_fig3_mechanisms.png"/>
+          <p:cNvPr id="4" name="Picture 3" descr="p2_fig3_mechanisms.png"/>
           <p:cNvPicPr>
             <a:picLocks noChangeAspect="1"/>
           </p:cNvPicPr>
           <p:nvPr/>
         </p:nvPicPr>
-        <p:blipFill rotWithShape="1">
-          <a:blip r:embed="rId3"/>
-          <a:stretch/>
+        <p:blipFill>
+          <a:blip r:embed="rId2"/>
+          <a:stretch>
+            <a:fillRect/>
+          </a:stretch>
         </p:blipFill>
-        <p:spPr bwMode="auto">
-          <a:xfrm>
-            <a:off x="548640" y="1673352"/>
+        <p:spPr>
+          <a:xfrm>
+            <a:off x="548640" y="2099725"/>
             <a:ext cx="11064240" cy="3764972"/>
           </a:xfrm>
           <a:prstGeom prst="rect">
@@ -6697,11 +4786,11 @@
       </p:pic>
       <p:sp>
         <p:nvSpPr>
-          <p:cNvPr id="1790495252" name="TextBox 4"/>
+          <p:cNvPr id="5" name="TextBox 4"/>
           <p:cNvSpPr txBox="1"/>
           <p:nvPr/>
         </p:nvSpPr>
-        <p:spPr bwMode="auto">
+        <p:spPr>
           <a:xfrm>
             <a:off x="685800" y="6291072"/>
             <a:ext cx="10972800" cy="411480"/>
@@ -6721,7 +4810,6 @@
               <a:spcAft>
                 <a:spcPts val="1000"/>
               </a:spcAft>
-              <a:defRPr/>
             </a:pPr>
             <a:r>
               <a:rPr sz="1050" b="0">
@@ -6731,7 +4819,6 @@
               </a:rPr>
               <a:t>One replaces its controller outright. One is compliant by accident of architecture. One uses a packet-number watermark. One resets at only one end. One doesn't reset at all.</a:t>
             </a:r>
-            <a:endParaRPr/>
           </a:p>
         </p:txBody>
       </p:sp>
@@ -6740,41 +4827,26 @@
   <p:clrMapOvr>
     <a:masterClrMapping/>
   </p:clrMapOvr>
-  <mc:AlternateContent xmlns:mc="http://schemas.openxmlformats.org/markup-compatibility/2006">
-    <mc:Choice xmlns:p159="http://schemas.microsoft.com/office/powerpoint/2015/09/main" xmlns:p14="http://schemas.microsoft.com/office/powerpoint/2010/main" Requires="p159">
-      <p:transition p14:dur="500" advClick="1"/>
-    </mc:Choice>
-    <mc:Fallback>
-      <p:transition advClick="1"/>
-    </mc:Fallback>
-  </mc:AlternateContent>
 </p:sld>
 </file>
 
 <file path=ppt/slides/slide7.xml><?xml version="1.0" encoding="utf-8"?>
-<p:sld xmlns:a="http://schemas.openxmlformats.org/drawingml/2006/main" xmlns:r="http://schemas.openxmlformats.org/officeDocument/2006/relationships" xmlns:p="http://schemas.openxmlformats.org/presentationml/2006/main" xmlns:m="http://schemas.openxmlformats.org/officeDocument/2006/math" xmlns:w="http://schemas.openxmlformats.org/wordprocessingml/2006/main" xmlns:mc="http://schemas.openxmlformats.org/markup-compatibility/2006" showMasterPhAnim="0" showMasterSp="1" show="1">
-  <p:cSld name="">
+<p:sld xmlns:a="http://schemas.openxmlformats.org/drawingml/2006/main" xmlns:p="http://schemas.openxmlformats.org/presentationml/2006/main" xmlns:r="http://schemas.openxmlformats.org/officeDocument/2006/relationships">
+  <p:cSld>
     <p:spTree>
       <p:nvGrpSpPr>
         <p:cNvPr id="1" name=""/>
         <p:cNvGrpSpPr/>
         <p:nvPr/>
       </p:nvGrpSpPr>
-      <p:grpSpPr bwMode="auto">
-        <a:xfrm>
-          <a:off x="0" y="0"/>
-          <a:ext cx="0" cy="0"/>
-          <a:chOff x="0" y="0"/>
-          <a:chExt cx="0" cy="0"/>
-        </a:xfrm>
-      </p:grpSpPr>
-      <p:sp>
-        <p:nvSpPr>
-          <p:cNvPr id="1343736163" name="TextBox 1"/>
+      <p:grpSpPr/>
+      <p:sp>
+        <p:nvSpPr>
+          <p:cNvPr id="2" name="TextBox 1"/>
           <p:cNvSpPr txBox="1"/>
           <p:nvPr/>
         </p:nvSpPr>
-        <p:spPr bwMode="auto">
+        <p:spPr>
           <a:xfrm>
             <a:off x="685800" y="365760"/>
             <a:ext cx="10972800" cy="329184"/>
@@ -6794,7 +4866,6 @@
               <a:spcAft>
                 <a:spcPts val="1000"/>
               </a:spcAft>
-              <a:defRPr/>
             </a:pPr>
             <a:r>
               <a:rPr sz="1250" b="1">
@@ -6804,17 +4875,16 @@
               </a:rPr>
               <a:t>FINDING 3</a:t>
             </a:r>
-            <a:endParaRPr/>
-          </a:p>
-        </p:txBody>
-      </p:sp>
-      <p:sp>
-        <p:nvSpPr>
-          <p:cNvPr id="2023870934" name="TextBox 2"/>
+          </a:p>
+        </p:txBody>
+      </p:sp>
+      <p:sp>
+        <p:nvSpPr>
+          <p:cNvPr id="3" name="TextBox 2"/>
           <p:cNvSpPr txBox="1"/>
           <p:nvPr/>
         </p:nvSpPr>
-        <p:spPr bwMode="auto">
+        <p:spPr>
           <a:xfrm>
             <a:off x="685800" y="713232"/>
             <a:ext cx="10972800" cy="960120"/>
@@ -6834,7 +4904,6 @@
               <a:spcAft>
                 <a:spcPts val="1000"/>
               </a:spcAft>
-              <a:defRPr/>
             </a:pPr>
             <a:r>
               <a:rPr sz="2600" b="1">
@@ -6844,17 +4913,16 @@
               </a:rPr>
               <a:t>Not one of them uses the free measurement the protocol already takes.</a:t>
             </a:r>
-            <a:endParaRPr/>
-          </a:p>
-        </p:txBody>
-      </p:sp>
-      <p:sp>
-        <p:nvSpPr>
-          <p:cNvPr id="771940923" name="TextBox 3"/>
+          </a:p>
+        </p:txBody>
+      </p:sp>
+      <p:sp>
+        <p:nvSpPr>
+          <p:cNvPr id="4" name="TextBox 3"/>
           <p:cNvSpPr txBox="1"/>
           <p:nvPr/>
         </p:nvSpPr>
-        <p:spPr bwMode="auto">
+        <p:spPr>
           <a:xfrm>
             <a:off x="777240" y="2011680"/>
             <a:ext cx="10789920" cy="3931920"/>
@@ -6874,7 +4942,6 @@
               <a:spcAft>
                 <a:spcPts val="2000"/>
               </a:spcAft>
-              <a:defRPr/>
             </a:pPr>
             <a:r>
               <a:rPr sz="1900" b="0">
@@ -6884,14 +4951,12 @@
               </a:rPr>
               <a:t>Before a connection trusts a new network it must run a security check — send a random number, require it echoed back. That is a compulsory round trip on the new network, so it measures that network's speed for free.</a:t>
             </a:r>
-            <a:endParaRPr/>
           </a:p>
           <a:p>
             <a:pPr algn="l">
               <a:spcAft>
                 <a:spcPts val="2000"/>
               </a:spcAft>
-              <a:defRPr/>
             </a:pPr>
             <a:r>
               <a:rPr sz="2000" b="1">
@@ -6901,14 +4966,12 @@
               </a:rPr>
               <a:t>The standard explicitly permits using it. All five decline.</a:t>
             </a:r>
-            <a:endParaRPr/>
           </a:p>
           <a:p>
             <a:pPr algn="l">
               <a:spcAft>
                 <a:spcPts val="1800"/>
               </a:spcAft>
-              <a:defRPr/>
             </a:pPr>
             <a:r>
               <a:rPr sz="1800" b="0">
@@ -6918,14 +4981,12 @@
               </a:rPr>
               <a:t>Two of them we caught in the act, in consecutive log lines: measure the new network at roughly 40 milliseconds, then throw it away and seed a fixed default instead — 100 milliseconds in one, 333 in the other.</a:t>
             </a:r>
-            <a:endParaRPr/>
           </a:p>
           <a:p>
             <a:pPr algn="l">
               <a:spcAft>
                 <a:spcPts val="1000"/>
               </a:spcAft>
-              <a:defRPr/>
             </a:pPr>
             <a:r>
               <a:rPr sz="1800" b="1">
@@ -6935,17 +4996,16 @@
               </a:rPr>
               <a:t>This is the one finding that is unanimous across every major implementation.</a:t>
             </a:r>
-            <a:endParaRPr/>
-          </a:p>
-        </p:txBody>
-      </p:sp>
-      <p:sp>
-        <p:nvSpPr>
-          <p:cNvPr id="1649135418" name="TextBox 4"/>
+          </a:p>
+        </p:txBody>
+      </p:sp>
+      <p:sp>
+        <p:nvSpPr>
+          <p:cNvPr id="5" name="TextBox 4"/>
           <p:cNvSpPr txBox="1"/>
           <p:nvPr/>
         </p:nvSpPr>
-        <p:spPr bwMode="auto">
+        <p:spPr>
           <a:xfrm>
             <a:off x="685800" y="6291072"/>
             <a:ext cx="10972800" cy="411480"/>
@@ -6965,7 +5025,6 @@
               <a:spcAft>
                 <a:spcPts val="1000"/>
               </a:spcAft>
-              <a:defRPr/>
             </a:pPr>
             <a:r>
               <a:rPr sz="1050" b="0">
@@ -6975,7 +5034,6 @@
               </a:rPr>
               <a:t>RFC 9002 §6.2.2 — a MAY, not a MUST. Nobody is breaking a rule here. But nobody is taking the free measurement either.</a:t>
             </a:r>
-            <a:endParaRPr/>
           </a:p>
         </p:txBody>
       </p:sp>
@@ -6984,41 +5042,26 @@
   <p:clrMapOvr>
     <a:masterClrMapping/>
   </p:clrMapOvr>
-  <mc:AlternateContent xmlns:mc="http://schemas.openxmlformats.org/markup-compatibility/2006">
-    <mc:Choice xmlns:p159="http://schemas.microsoft.com/office/powerpoint/2015/09/main" xmlns:p14="http://schemas.microsoft.com/office/powerpoint/2010/main" Requires="p159">
-      <p:transition p14:dur="500" advClick="1"/>
-    </mc:Choice>
-    <mc:Fallback>
-      <p:transition advClick="1"/>
-    </mc:Fallback>
-  </mc:AlternateContent>
 </p:sld>
 </file>
 
 <file path=ppt/slides/slide8.xml><?xml version="1.0" encoding="utf-8"?>
-<p:sld xmlns:a="http://schemas.openxmlformats.org/drawingml/2006/main" xmlns:r="http://schemas.openxmlformats.org/officeDocument/2006/relationships" xmlns:p="http://schemas.openxmlformats.org/presentationml/2006/main" xmlns:m="http://schemas.openxmlformats.org/officeDocument/2006/math" xmlns:w="http://schemas.openxmlformats.org/wordprocessingml/2006/main" xmlns:mc="http://schemas.openxmlformats.org/markup-compatibility/2006" showMasterPhAnim="0" showMasterSp="1" show="1">
-  <p:cSld name="">
+<p:sld xmlns:a="http://schemas.openxmlformats.org/drawingml/2006/main" xmlns:p="http://schemas.openxmlformats.org/presentationml/2006/main" xmlns:r="http://schemas.openxmlformats.org/officeDocument/2006/relationships">
+  <p:cSld>
     <p:spTree>
       <p:nvGrpSpPr>
         <p:cNvPr id="1" name=""/>
         <p:cNvGrpSpPr/>
         <p:nvPr/>
       </p:nvGrpSpPr>
-      <p:grpSpPr bwMode="auto">
-        <a:xfrm>
-          <a:off x="0" y="0"/>
-          <a:ext cx="0" cy="0"/>
-          <a:chOff x="0" y="0"/>
-          <a:chExt cx="0" cy="0"/>
-        </a:xfrm>
-      </p:grpSpPr>
-      <p:sp>
-        <p:nvSpPr>
-          <p:cNvPr id="2100577361" name="TextBox 1"/>
+      <p:grpSpPr/>
+      <p:sp>
+        <p:nvSpPr>
+          <p:cNvPr id="2" name="TextBox 1"/>
           <p:cNvSpPr txBox="1"/>
           <p:nvPr/>
         </p:nvSpPr>
-        <p:spPr bwMode="auto">
+        <p:spPr>
           <a:xfrm>
             <a:off x="685800" y="365760"/>
             <a:ext cx="10972800" cy="329184"/>
@@ -7038,7 +5081,6 @@
               <a:spcAft>
                 <a:spcPts val="1000"/>
               </a:spcAft>
-              <a:defRPr/>
             </a:pPr>
             <a:r>
               <a:rPr sz="1250" b="1">
@@ -7048,17 +5090,16 @@
               </a:rPr>
               <a:t>FINDING 4</a:t>
             </a:r>
-            <a:endParaRPr/>
-          </a:p>
-        </p:txBody>
-      </p:sp>
-      <p:sp>
-        <p:nvSpPr>
-          <p:cNvPr id="227075668" name="TextBox 2"/>
+          </a:p>
+        </p:txBody>
+      </p:sp>
+      <p:sp>
+        <p:nvSpPr>
+          <p:cNvPr id="3" name="TextBox 2"/>
           <p:cNvSpPr txBox="1"/>
           <p:nvPr/>
         </p:nvSpPr>
-        <p:spPr bwMode="auto">
+        <p:spPr>
           <a:xfrm>
             <a:off x="685800" y="713232"/>
             <a:ext cx="10972800" cy="960120"/>
@@ -7078,7 +5119,6 @@
               <a:spcAft>
                 <a:spcPts val="1000"/>
               </a:spcAft>
-              <a:defRPr/>
             </a:pPr>
             <a:r>
               <a:rPr sz="2600" b="1">
@@ -7088,17 +5128,16 @@
               </a:rPr>
               <a:t>One of them cannot be scored yes or no at all.</a:t>
             </a:r>
-            <a:endParaRPr/>
-          </a:p>
-        </p:txBody>
-      </p:sp>
-      <p:sp>
-        <p:nvSpPr>
-          <p:cNvPr id="449465467" name="TextBox 3"/>
+          </a:p>
+        </p:txBody>
+      </p:sp>
+      <p:sp>
+        <p:nvSpPr>
+          <p:cNvPr id="4" name="TextBox 3"/>
           <p:cNvSpPr txBox="1"/>
           <p:nvPr/>
         </p:nvSpPr>
-        <p:spPr bwMode="auto">
+        <p:spPr>
           <a:xfrm>
             <a:off x="777240" y="2011680"/>
             <a:ext cx="10789920" cy="3931920"/>
@@ -7118,7 +5157,6 @@
               <a:spcAft>
                 <a:spcPts val="2000"/>
               </a:spcAft>
-              <a:defRPr/>
             </a:pPr>
             <a:r>
               <a:rPr sz="1900" b="0">
@@ -7128,14 +5166,12 @@
               </a:rPr>
               <a:t>msquic splits its state: congestion control is shared across the whole connection, but round-trip time is tracked per network path. That produces two answers no yes/no column can hold.</a:t>
             </a:r>
-            <a:endParaRPr/>
           </a:p>
           <a:p>
             <a:pPr algn="l">
               <a:spcAft>
                 <a:spcPts val="1800"/>
               </a:spcAft>
-              <a:defRPr/>
             </a:pPr>
             <a:r>
               <a:rPr sz="1800" b="1">
@@ -7145,14 +5181,12 @@
               </a:rPr>
               <a:t>On the first question the answer is ASYMMETRIC. The endpoint that OBSERVES the move resets. The endpoint that MAKES the move does not. The same connection is compliant at one end and not at the other.</a:t>
             </a:r>
-            <a:endParaRPr/>
           </a:p>
           <a:p>
             <a:pPr algn="l">
               <a:spcAft>
                 <a:spcPts val="2000"/>
               </a:spcAft>
-              <a:defRPr/>
             </a:pPr>
             <a:r>
               <a:rPr sz="1800" b="1">
@@ -7162,14 +5196,12 @@
               </a:rPr>
               <a:t>On the third the answer is SPLIT. Round-trip measurements from the old network are correctly ignored. Acknowledged byte counts are not.</a:t>
             </a:r>
-            <a:endParaRPr/>
           </a:p>
           <a:p>
             <a:pPr algn="l">
               <a:spcAft>
                 <a:spcPts val="800"/>
               </a:spcAft>
-              <a:defRPr/>
             </a:pPr>
             <a:r>
               <a:rPr sz="1700" b="0">
@@ -7179,15 +5211,13 @@
               </a:rPr>
               <a:t>We are not the first to notice the second one. msquic's own source says, at the exact line responsible:</a:t>
             </a:r>
-            <a:endParaRPr/>
-          </a:p>
-          <a:p>
-            <a:pPr marL="411480" indent="0" algn="l">
+          </a:p>
+          <a:p>
+            <a:pPr algn="l" marL="411480" indent="0">
               <a:spcAft>
                 <a:spcPts val="1000"/>
               </a:spcAft>
               <a:buNone/>
-              <a:defRPr/>
             </a:pPr>
             <a:r>
               <a:rPr sz="1500" b="1">
@@ -7197,7 +5227,6 @@
               </a:rPr>
               <a:t>const QUIC_PATH* Path = &amp;Connection-&gt;Paths[0];  // TODO - Correct?</a:t>
             </a:r>
-            <a:endParaRPr/>
           </a:p>
         </p:txBody>
       </p:sp>
@@ -7206,41 +5235,26 @@
   <p:clrMapOvr>
     <a:masterClrMapping/>
   </p:clrMapOvr>
-  <mc:AlternateContent xmlns:mc="http://schemas.openxmlformats.org/markup-compatibility/2006">
-    <mc:Choice xmlns:p159="http://schemas.microsoft.com/office/powerpoint/2015/09/main" xmlns:p14="http://schemas.microsoft.com/office/powerpoint/2010/main" Requires="p159">
-      <p:transition p14:dur="500" advClick="1"/>
-    </mc:Choice>
-    <mc:Fallback>
-      <p:transition advClick="1"/>
-    </mc:Fallback>
-  </mc:AlternateContent>
 </p:sld>
 </file>
 
 <file path=ppt/slides/slide9.xml><?xml version="1.0" encoding="utf-8"?>
-<p:sld xmlns:a="http://schemas.openxmlformats.org/drawingml/2006/main" xmlns:r="http://schemas.openxmlformats.org/officeDocument/2006/relationships" xmlns:p="http://schemas.openxmlformats.org/presentationml/2006/main" xmlns:m="http://schemas.openxmlformats.org/officeDocument/2006/math" xmlns:w="http://schemas.openxmlformats.org/wordprocessingml/2006/main" xmlns:mc="http://schemas.openxmlformats.org/markup-compatibility/2006" showMasterPhAnim="0" showMasterSp="1" show="1">
-  <p:cSld name="">
+<p:sld xmlns:a="http://schemas.openxmlformats.org/drawingml/2006/main" xmlns:p="http://schemas.openxmlformats.org/presentationml/2006/main" xmlns:r="http://schemas.openxmlformats.org/officeDocument/2006/relationships">
+  <p:cSld>
     <p:spTree>
       <p:nvGrpSpPr>
         <p:cNvPr id="1" name=""/>
         <p:cNvGrpSpPr/>
         <p:nvPr/>
       </p:nvGrpSpPr>
-      <p:grpSpPr bwMode="auto">
-        <a:xfrm>
-          <a:off x="0" y="0"/>
-          <a:ext cx="0" cy="0"/>
-          <a:chOff x="0" y="0"/>
-          <a:chExt cx="0" cy="0"/>
-        </a:xfrm>
-      </p:grpSpPr>
-      <p:sp>
-        <p:nvSpPr>
-          <p:cNvPr id="618209642" name="TextBox 1"/>
+      <p:grpSpPr/>
+      <p:sp>
+        <p:nvSpPr>
+          <p:cNvPr id="2" name="TextBox 1"/>
           <p:cNvSpPr txBox="1"/>
           <p:nvPr/>
         </p:nvSpPr>
-        <p:spPr bwMode="auto">
+        <p:spPr>
           <a:xfrm>
             <a:off x="685800" y="365760"/>
             <a:ext cx="10972800" cy="329184"/>
@@ -7260,7 +5274,6 @@
               <a:spcAft>
                 <a:spcPts val="1000"/>
               </a:spcAft>
-              <a:defRPr/>
             </a:pPr>
             <a:r>
               <a:rPr sz="1250" b="1">
@@ -7270,17 +5283,16 @@
               </a:rPr>
               <a:t>FINDING 5</a:t>
             </a:r>
-            <a:endParaRPr/>
-          </a:p>
-        </p:txBody>
-      </p:sp>
-      <p:sp>
-        <p:nvSpPr>
-          <p:cNvPr id="299646315" name="TextBox 2"/>
+          </a:p>
+        </p:txBody>
+      </p:sp>
+      <p:sp>
+        <p:nvSpPr>
+          <p:cNvPr id="3" name="TextBox 2"/>
           <p:cNvSpPr txBox="1"/>
           <p:nvPr/>
         </p:nvSpPr>
-        <p:spPr bwMode="auto">
+        <p:spPr>
           <a:xfrm>
             <a:off x="685800" y="713232"/>
             <a:ext cx="10972800" cy="960120"/>
@@ -7300,7 +5312,6 @@
               <a:spcAft>
                 <a:spcPts val="1000"/>
               </a:spcAft>
-              <a:defRPr/>
             </a:pPr>
             <a:r>
               <a:rPr sz="2600" b="1">
@@ -7310,17 +5321,16 @@
               </a:rPr>
               <a:t>And in that implementation, the sender never recovers its sense of the new network.</a:t>
             </a:r>
-            <a:endParaRPr/>
-          </a:p>
-        </p:txBody>
-      </p:sp>
-      <p:sp>
-        <p:nvSpPr>
-          <p:cNvPr id="185439165" name="TextBox 3"/>
+          </a:p>
+        </p:txBody>
+      </p:sp>
+      <p:sp>
+        <p:nvSpPr>
+          <p:cNvPr id="4" name="TextBox 3"/>
           <p:cNvSpPr txBox="1"/>
           <p:nvPr/>
         </p:nvSpPr>
-        <p:spPr bwMode="auto">
+        <p:spPr>
           <a:xfrm>
             <a:off x="777240" y="2011680"/>
             <a:ext cx="10789920" cy="3931920"/>
@@ -7340,7 +5350,6 @@
               <a:spcAft>
                 <a:spcPts val="1800"/>
               </a:spcAft>
-              <a:defRPr/>
             </a:pPr>
             <a:r>
               <a:rPr sz="1900" b="0">
@@ -7350,14 +5359,12 @@
               </a:rPr>
               <a:t>After migrating, msquic's server holds its round-trip estimate at exactly its starting default — 333 milliseconds — and its minimum-RTT field at the “no measurement yet” marker.</a:t>
             </a:r>
-            <a:endParaRPr/>
           </a:p>
           <a:p>
             <a:pPr algn="l">
               <a:spcAft>
                 <a:spcPts val="1800"/>
               </a:spcAft>
-              <a:defRPr/>
             </a:pPr>
             <a:r>
               <a:rPr sz="1900" b="1">
@@ -7367,14 +5374,12 @@
               </a:rPr>
               <a:t>For every one of roughly 3,800 samples per run. For twenty seconds. In five runs out of five. The real network delay was 40 milliseconds.</a:t>
             </a:r>
-            <a:endParaRPr/>
           </a:p>
           <a:p>
             <a:pPr algn="l">
               <a:spcAft>
                 <a:spcPts val="1800"/>
               </a:spcAft>
-              <a:defRPr/>
             </a:pPr>
             <a:r>
               <a:rPr sz="1800" b="0">
@@ -7384,14 +5389,12 @@
               </a:rPr>
               <a:t>The cost is visible: about 13 Mbit/s where another implementation reached about 19 on the same link.</a:t>
             </a:r>
-            <a:endParaRPr/>
           </a:p>
           <a:p>
             <a:pPr algn="l">
               <a:spcAft>
                 <a:spcPts val="1000"/>
               </a:spcAft>
-              <a:defRPr/>
             </a:pPr>
             <a:r>
               <a:rPr sz="1800" b="1">
@@ -7401,17 +5404,16 @@
               </a:rPr>
               <a:t>The irony is the finding. The endpoint that follows the rule ends up with a permanently broken estimate; the endpoint that ignores it keeps a working one.</a:t>
             </a:r>
-            <a:endParaRPr/>
-          </a:p>
-        </p:txBody>
-      </p:sp>
-      <p:sp>
-        <p:nvSpPr>
-          <p:cNvPr id="1959200423" name="TextBox 4"/>
+          </a:p>
+        </p:txBody>
+      </p:sp>
+      <p:sp>
+        <p:nvSpPr>
+          <p:cNvPr id="5" name="TextBox 4"/>
           <p:cNvSpPr txBox="1"/>
           <p:nvPr/>
         </p:nvSpPr>
-        <p:spPr bwMode="auto">
+        <p:spPr>
           <a:xfrm>
             <a:off x="685800" y="6291072"/>
             <a:ext cx="10972800" cy="411480"/>
@@ -7431,7 +5433,6 @@
               <a:spcAft>
                 <a:spcPts val="1000"/>
               </a:spcAft>
-              <a:defRPr/>
             </a:pPr>
             <a:r>
               <a:rPr sz="1050" b="0">
@@ -7441,7 +5442,6 @@
               </a:rPr>
               <a:t>Reported as an observation, not a diagnosis. We have not yet built an instrumented version to prove the mechanism, and we say so.</a:t>
             </a:r>
-            <a:endParaRPr/>
           </a:p>
         </p:txBody>
       </p:sp>
@@ -7450,19 +5450,11 @@
   <p:clrMapOvr>
     <a:masterClrMapping/>
   </p:clrMapOvr>
-  <mc:AlternateContent xmlns:mc="http://schemas.openxmlformats.org/markup-compatibility/2006">
-    <mc:Choice xmlns:p159="http://schemas.microsoft.com/office/powerpoint/2015/09/main" xmlns:p14="http://schemas.microsoft.com/office/powerpoint/2010/main" Requires="p159">
-      <p:transition p14:dur="500" advClick="1"/>
-    </mc:Choice>
-    <mc:Fallback>
-      <p:transition advClick="1"/>
-    </mc:Fallback>
-  </mc:AlternateContent>
 </p:sld>
 </file>
 
 <file path=ppt/theme/theme1.xml><?xml version="1.0" encoding="utf-8"?>
-<a:theme xmlns:a="http://schemas.openxmlformats.org/drawingml/2006/main" xmlns:r="http://schemas.openxmlformats.org/officeDocument/2006/relationships" xmlns:p="http://schemas.openxmlformats.org/presentationml/2006/main" name="Office Theme">
+<a:theme xmlns:a="http://schemas.openxmlformats.org/drawingml/2006/main" name="Office Theme">
   <a:themeElements>
     <a:clrScheme name="Office">
       <a:dk1>
@@ -7505,13 +5497,73 @@
     <a:fontScheme name="Office">
       <a:majorFont>
         <a:latin typeface="Calibri"/>
-        <a:ea typeface="Arial"/>
-        <a:cs typeface="Arial"/>
+        <a:ea typeface=""/>
+        <a:cs typeface=""/>
+        <a:font script="Jpan" typeface="ＭＳ Ｐゴシック"/>
+        <a:font script="Hang" typeface="맑은 고딕"/>
+        <a:font script="Hans" typeface="宋体"/>
+        <a:font script="Hant" typeface="新細明體"/>
+        <a:font script="Arab" typeface="Times New Roman"/>
+        <a:font script="Hebr" typeface="Times New Roman"/>
+        <a:font script="Thai" typeface="Angsana New"/>
+        <a:font script="Ethi" typeface="Nyala"/>
+        <a:font script="Beng" typeface="Vrinda"/>
+        <a:font script="Gujr" typeface="Shruti"/>
+        <a:font script="Khmr" typeface="MoolBoran"/>
+        <a:font script="Knda" typeface="Tunga"/>
+        <a:font script="Guru" typeface="Raavi"/>
+        <a:font script="Cans" typeface="Euphemia"/>
+        <a:font script="Cher" typeface="Plantagenet Cherokee"/>
+        <a:font script="Yiii" typeface="Microsoft Yi Baiti"/>
+        <a:font script="Tibt" typeface="Microsoft Himalaya"/>
+        <a:font script="Thaa" typeface="MV Boli"/>
+        <a:font script="Deva" typeface="Mangal"/>
+        <a:font script="Telu" typeface="Gautami"/>
+        <a:font script="Taml" typeface="Latha"/>
+        <a:font script="Syrc" typeface="Estrangelo Edessa"/>
+        <a:font script="Orya" typeface="Kalinga"/>
+        <a:font script="Mlym" typeface="Kartika"/>
+        <a:font script="Laoo" typeface="DokChampa"/>
+        <a:font script="Sinh" typeface="Iskoola Pota"/>
+        <a:font script="Mong" typeface="Mongolian Baiti"/>
+        <a:font script="Viet" typeface="Times New Roman"/>
+        <a:font script="Uigh" typeface="Microsoft Uighur"/>
+        <a:font script="Geor" typeface="Sylfaen"/>
       </a:majorFont>
       <a:minorFont>
         <a:latin typeface="Calibri"/>
-        <a:ea typeface="Arial"/>
-        <a:cs typeface="Arial"/>
+        <a:ea typeface=""/>
+        <a:cs typeface=""/>
+        <a:font script="Jpan" typeface="ＭＳ Ｐゴシック"/>
+        <a:font script="Hang" typeface="맑은 고딕"/>
+        <a:font script="Hans" typeface="宋体"/>
+        <a:font script="Hant" typeface="新細明體"/>
+        <a:font script="Arab" typeface="Arial"/>
+        <a:font script="Hebr" typeface="Arial"/>
+        <a:font script="Thai" typeface="Cordia New"/>
+        <a:font script="Ethi" typeface="Nyala"/>
+        <a:font script="Beng" typeface="Vrinda"/>
+        <a:font script="Gujr" typeface="Shruti"/>
+        <a:font script="Khmr" typeface="DaunPenh"/>
+        <a:font script="Knda" typeface="Tunga"/>
+        <a:font script="Guru" typeface="Raavi"/>
+        <a:font script="Cans" typeface="Euphemia"/>
+        <a:font script="Cher" typeface="Plantagenet Cherokee"/>
+        <a:font script="Yiii" typeface="Microsoft Yi Baiti"/>
+        <a:font script="Tibt" typeface="Microsoft Himalaya"/>
+        <a:font script="Thaa" typeface="MV Boli"/>
+        <a:font script="Deva" typeface="Mangal"/>
+        <a:font script="Telu" typeface="Gautami"/>
+        <a:font script="Taml" typeface="Latha"/>
+        <a:font script="Syrc" typeface="Estrangelo Edessa"/>
+        <a:font script="Orya" typeface="Kalinga"/>
+        <a:font script="Mlym" typeface="Kartika"/>
+        <a:font script="Laoo" typeface="DokChampa"/>
+        <a:font script="Sinh" typeface="Iskoola Pota"/>
+        <a:font script="Mong" typeface="Mongolian Baiti"/>
+        <a:font script="Viet" typeface="Arial"/>
+        <a:font script="Uigh" typeface="Microsoft Uighur"/>
+        <a:font script="Geor" typeface="Sylfaen"/>
       </a:minorFont>
     </a:fontScheme>
     <a:fmtScheme name="Office">
@@ -7519,7 +5571,7 @@
         <a:solidFill>
           <a:schemeClr val="phClr"/>
         </a:solidFill>
-        <a:gradFill>
+        <a:gradFill rotWithShape="1">
           <a:gsLst>
             <a:gs pos="0">
               <a:schemeClr val="phClr">
@@ -7542,7 +5594,7 @@
           </a:gsLst>
           <a:lin ang="16200000" scaled="1"/>
         </a:gradFill>
-        <a:gradFill>
+        <a:gradFill rotWithShape="1">
           <a:gsLst>
             <a:gs pos="0">
               <a:schemeClr val="phClr">
@@ -7629,7 +5681,7 @@
         <a:solidFill>
           <a:schemeClr val="phClr"/>
         </a:solidFill>
-        <a:gradFill>
+        <a:gradFill rotWithShape="1">
           <a:gsLst>
             <a:gs pos="0">
               <a:schemeClr val="phClr">
@@ -7651,9 +5703,11 @@
               </a:schemeClr>
             </a:gs>
           </a:gsLst>
-          <a:path path="circle"/>
+          <a:path path="circle">
+            <a:fillToRect l="50000" t="-80000" r="50000" b="180000"/>
+          </a:path>
         </a:gradFill>
-        <a:gradFill>
+        <a:gradFill rotWithShape="1">
           <a:gsLst>
             <a:gs pos="0">
               <a:schemeClr val="phClr">
@@ -7668,14 +5722,16 @@
               </a:schemeClr>
             </a:gs>
           </a:gsLst>
-          <a:path path="circle"/>
+          <a:path path="circle">
+            <a:fillToRect l="50000" t="50000" r="50000" b="50000"/>
+          </a:path>
         </a:gradFill>
       </a:bgFillStyleLst>
     </a:fmtScheme>
   </a:themeElements>
   <a:objectDefaults>
     <a:spDef>
-      <a:spPr bwMode="auto"/>
+      <a:spPr/>
       <a:bodyPr/>
       <a:lstStyle/>
       <a:style>
@@ -7694,7 +5750,7 @@
       </a:style>
     </a:spDef>
     <a:lnDef>
-      <a:spPr bwMode="auto"/>
+      <a:spPr/>
       <a:bodyPr/>
       <a:lstStyle/>
       <a:style>
@@ -7713,260 +5769,6 @@
       </a:style>
     </a:lnDef>
   </a:objectDefaults>
-</a:theme>
-</file>
-
-<file path=ppt/theme/theme2.xml><?xml version="1.0" encoding="utf-8"?>
-<a:theme xmlns:a="http://schemas.openxmlformats.org/drawingml/2006/main" xmlns:r="http://schemas.openxmlformats.org/officeDocument/2006/relationships" xmlns:p="http://schemas.openxmlformats.org/presentationml/2006/main" name="Office Theme">
-  <a:themeElements>
-    <a:clrScheme name="Office">
-      <a:dk1>
-        <a:sysClr val="windowText" lastClr="000000"/>
-      </a:dk1>
-      <a:lt1>
-        <a:sysClr val="window" lastClr="FFFFFF"/>
-      </a:lt1>
-      <a:dk2>
-        <a:srgbClr val="1F497D"/>
-      </a:dk2>
-      <a:lt2>
-        <a:srgbClr val="EEECE1"/>
-      </a:lt2>
-      <a:accent1>
-        <a:srgbClr val="4F81BD"/>
-      </a:accent1>
-      <a:accent2>
-        <a:srgbClr val="C0504D"/>
-      </a:accent2>
-      <a:accent3>
-        <a:srgbClr val="9BBB59"/>
-      </a:accent3>
-      <a:accent4>
-        <a:srgbClr val="8064A2"/>
-      </a:accent4>
-      <a:accent5>
-        <a:srgbClr val="4BACC6"/>
-      </a:accent5>
-      <a:accent6>
-        <a:srgbClr val="F79646"/>
-      </a:accent6>
-      <a:hlink>
-        <a:srgbClr val="0000FF"/>
-      </a:hlink>
-      <a:folHlink>
-        <a:srgbClr val="800080"/>
-      </a:folHlink>
-    </a:clrScheme>
-    <a:fontScheme name="">
-      <a:majorFont>
-        <a:latin typeface="Calibri"/>
-        <a:ea typeface="Arial"/>
-        <a:cs typeface="Arial"/>
-      </a:majorFont>
-      <a:minorFont>
-        <a:latin typeface="Calibri"/>
-        <a:ea typeface="Arial"/>
-        <a:cs typeface="Arial"/>
-      </a:minorFont>
-    </a:fontScheme>
-    <a:fmtScheme name="Office">
-      <a:fillStyleLst>
-        <a:solidFill>
-          <a:schemeClr val="phClr"/>
-        </a:solidFill>
-        <a:gradFill>
-          <a:gsLst>
-            <a:gs pos="0">
-              <a:schemeClr val="phClr">
-                <a:tint val="50000"/>
-                <a:satMod val="300000"/>
-              </a:schemeClr>
-            </a:gs>
-            <a:gs pos="35000">
-              <a:schemeClr val="phClr">
-                <a:tint val="37000"/>
-                <a:satMod val="300000"/>
-              </a:schemeClr>
-            </a:gs>
-            <a:gs pos="100000">
-              <a:schemeClr val="phClr">
-                <a:tint val="15000"/>
-                <a:satMod val="350000"/>
-              </a:schemeClr>
-            </a:gs>
-          </a:gsLst>
-          <a:lin ang="16200000" scaled="1"/>
-        </a:gradFill>
-        <a:gradFill>
-          <a:gsLst>
-            <a:gs pos="0">
-              <a:schemeClr val="phClr">
-                <a:tint val="100000"/>
-                <a:shade val="100000"/>
-                <a:satMod val="130000"/>
-              </a:schemeClr>
-            </a:gs>
-            <a:gs pos="100000">
-              <a:schemeClr val="phClr">
-                <a:tint val="50000"/>
-                <a:shade val="100000"/>
-                <a:satMod val="350000"/>
-              </a:schemeClr>
-            </a:gs>
-          </a:gsLst>
-          <a:lin ang="16200000" scaled="0"/>
-        </a:gradFill>
-      </a:fillStyleLst>
-      <a:lnStyleLst>
-        <a:ln w="9525" cap="flat" cmpd="sng" algn="ctr">
-          <a:solidFill>
-            <a:schemeClr val="phClr">
-              <a:shade val="95000"/>
-              <a:satMod val="105000"/>
-            </a:schemeClr>
-          </a:solidFill>
-          <a:prstDash val="solid"/>
-        </a:ln>
-        <a:ln w="25400" cap="flat" cmpd="sng" algn="ctr">
-          <a:solidFill>
-            <a:schemeClr val="phClr"/>
-          </a:solidFill>
-          <a:prstDash val="solid"/>
-        </a:ln>
-        <a:ln w="38100" cap="flat" cmpd="sng" algn="ctr">
-          <a:solidFill>
-            <a:schemeClr val="phClr"/>
-          </a:solidFill>
-          <a:prstDash val="solid"/>
-        </a:ln>
-      </a:lnStyleLst>
-      <a:effectStyleLst>
-        <a:effectStyle>
-          <a:effectLst>
-            <a:outerShdw blurRad="40000" dist="20000" dir="5400000" rotWithShape="0">
-              <a:srgbClr val="000000">
-                <a:alpha val="38000"/>
-              </a:srgbClr>
-            </a:outerShdw>
-          </a:effectLst>
-        </a:effectStyle>
-        <a:effectStyle>
-          <a:effectLst>
-            <a:outerShdw blurRad="40000" dist="23000" dir="5400000" rotWithShape="0">
-              <a:srgbClr val="000000">
-                <a:alpha val="35000"/>
-              </a:srgbClr>
-            </a:outerShdw>
-          </a:effectLst>
-        </a:effectStyle>
-        <a:effectStyle>
-          <a:effectLst>
-            <a:outerShdw blurRad="40000" dist="23000" dir="5400000" rotWithShape="0">
-              <a:srgbClr val="000000">
-                <a:alpha val="35000"/>
-              </a:srgbClr>
-            </a:outerShdw>
-          </a:effectLst>
-          <a:scene3d>
-            <a:camera prst="orthographicFront">
-              <a:rot lat="0" lon="0" rev="0"/>
-            </a:camera>
-            <a:lightRig rig="threePt" dir="t">
-              <a:rot lat="0" lon="0" rev="1200000"/>
-            </a:lightRig>
-          </a:scene3d>
-          <a:sp3d>
-            <a:bevelT w="63500" h="25400"/>
-          </a:sp3d>
-        </a:effectStyle>
-      </a:effectStyleLst>
-      <a:bgFillStyleLst>
-        <a:solidFill>
-          <a:schemeClr val="phClr"/>
-        </a:solidFill>
-        <a:gradFill>
-          <a:gsLst>
-            <a:gs pos="0">
-              <a:schemeClr val="phClr">
-                <a:tint val="40000"/>
-                <a:satMod val="350000"/>
-              </a:schemeClr>
-            </a:gs>
-            <a:gs pos="40000">
-              <a:schemeClr val="phClr">
-                <a:tint val="45000"/>
-                <a:shade val="99000"/>
-                <a:satMod val="350000"/>
-              </a:schemeClr>
-            </a:gs>
-            <a:gs pos="100000">
-              <a:schemeClr val="phClr">
-                <a:shade val="20000"/>
-                <a:satMod val="255000"/>
-              </a:schemeClr>
-            </a:gs>
-          </a:gsLst>
-          <a:path path="circle"/>
-        </a:gradFill>
-        <a:gradFill>
-          <a:gsLst>
-            <a:gs pos="0">
-              <a:schemeClr val="phClr">
-                <a:tint val="80000"/>
-                <a:satMod val="300000"/>
-              </a:schemeClr>
-            </a:gs>
-            <a:gs pos="100000">
-              <a:schemeClr val="phClr">
-                <a:shade val="30000"/>
-                <a:satMod val="200000"/>
-              </a:schemeClr>
-            </a:gs>
-          </a:gsLst>
-          <a:path path="circle"/>
-        </a:gradFill>
-      </a:bgFillStyleLst>
-    </a:fmtScheme>
-  </a:themeElements>
-  <a:objectDefaults>
-    <a:spDef>
-      <a:spPr bwMode="auto"/>
-      <a:bodyPr/>
-      <a:lstStyle/>
-      <a:style>
-        <a:lnRef idx="1">
-          <a:schemeClr val="accent1"/>
-        </a:lnRef>
-        <a:fillRef idx="3">
-          <a:schemeClr val="accent1"/>
-        </a:fillRef>
-        <a:effectRef idx="2">
-          <a:schemeClr val="accent1"/>
-        </a:effectRef>
-        <a:fontRef idx="minor">
-          <a:schemeClr val="lt1"/>
-        </a:fontRef>
-      </a:style>
-    </a:spDef>
-    <a:lnDef>
-      <a:spPr bwMode="auto"/>
-      <a:bodyPr/>
-      <a:lstStyle/>
-      <a:style>
-        <a:lnRef idx="2">
-          <a:schemeClr val="accent1"/>
-        </a:lnRef>
-        <a:fillRef idx="0">
-          <a:schemeClr val="accent1"/>
-        </a:fillRef>
-        <a:effectRef idx="1">
-          <a:schemeClr val="accent1"/>
-        </a:effectRef>
-        <a:fontRef idx="minor">
-          <a:schemeClr val="tx1"/>
-        </a:fontRef>
-      </a:style>
-    </a:lnDef>
-  </a:objectDefaults>
+  <a:extraClrSchemeLst/>
 </a:theme>
 </file>
--- a/phase2-deliverables/PhaseII_Review.pptx
+++ b/phase2-deliverables/PhaseII_Review.pptx
@@ -3372,7 +3372,7 @@
                   <a:srgbClr val="6A6A6A"/>
                 </a:solidFill>
               </a:rPr>
-              <a:t>Each implementation's own initial window is the dashed line. A drop to exactly that value can only be a reset — we checked each one's loss arithmetic to be sure an ordinary loss event could not produce the same number.</a:t>
+              <a:t>Each implementation's own initial window is the dashed line. A drop to EXACTLY that value can only be a reset — we checked each one's loss arithmetic to be sure an ordinary loss event could not produce the same number. A bar BELOW the line is therefore not a deeper reset but the opposite: loss carried it past the value a reset would have set.</a:t>
             </a:r>
           </a:p>
         </p:txBody>
